--- a/templates/posts/october/05-10-2026-mon-ig-teachers-day.pptx
+++ b/templates/posts/october/05-10-2026-mon-ig-teachers-day.pptx
@@ -517,7 +517,7 @@
           <a:lstStyle/>
           <a:p>
             <a:r>
-              <a:t>Opening slide. Source: mentor roster from Linnea, September 2026, and mentor bios on https://soilfoodweb.com. Leaf frame built from existing cutouts (ferns, leaf sprigs, dried flowers).</a:t>
+              <a:t>Opening slide. Source: mentor roster from Linnea, September 2026, and mentor bios on https://soilfoodweb.com. Leaf frame built from existing cutouts; stickers are drawn shapes.</a:t>
             </a:r>
           </a:p>
         </p:txBody>
@@ -1007,7 +1007,7 @@
           <a:lstStyle/>
           <a:p>
             <a:r>
-              <a:t>Closing slide. Leaf frame built from existing cutouts.</a:t>
+              <a:t>Closing slide. Leaf frame built from existing cutouts; stickers are drawn shapes.</a:t>
             </a:r>
           </a:p>
         </p:txBody>
@@ -4751,14 +4751,156 @@
       </p:pic>
       <p:sp>
         <p:nvSpPr>
-          <p:cNvPr id="9" name="TextBox 8"/>
+          <p:cNvPr id="9" name="Rectangle 8"/>
+          <p:cNvSpPr/>
+          <p:nvPr/>
+        </p:nvSpPr>
+        <p:spPr>
+          <a:xfrm rot="21480000">
+            <a:off x="2000250" y="3810000"/>
+            <a:ext cx="6286500" cy="4476750"/>
+          </a:xfrm>
+          <a:prstGeom prst="rect">
+            <a:avLst/>
+          </a:prstGeom>
+          <a:solidFill>
+            <a:srgbClr val="FFFDF7"/>
+          </a:solidFill>
+          <a:ln>
+            <a:noFill/>
+          </a:ln>
+          <a:effectLst>
+            <a:outerShdw blurRad="228600" dist="76200" dir="5400000" algn="t" rotWithShape="0">
+              <a:srgbClr val="000000">
+                <a:alpha val="30000"/>
+              </a:srgbClr>
+            </a:outerShdw>
+          </a:effectLst>
+        </p:spPr>
+        <p:style>
+          <a:lnRef idx="1">
+            <a:schemeClr val="accent1"/>
+          </a:lnRef>
+          <a:fillRef idx="3">
+            <a:schemeClr val="accent1"/>
+          </a:fillRef>
+          <a:effectRef idx="2">
+            <a:schemeClr val="accent1"/>
+          </a:effectRef>
+          <a:fontRef idx="minor">
+            <a:schemeClr val="lt1"/>
+          </a:fontRef>
+        </p:style>
+        <p:txBody>
+          <a:bodyPr rtlCol="0" anchor="ctr"/>
+          <a:lstStyle/>
+          <a:p>
+            <a:pPr algn="ctr"/>
+          </a:p>
+        </p:txBody>
+      </p:sp>
+      <p:sp>
+        <p:nvSpPr>
+          <p:cNvPr id="10" name="Rectangle 9"/>
+          <p:cNvSpPr/>
+          <p:nvPr/>
+        </p:nvSpPr>
+        <p:spPr>
+          <a:xfrm rot="19920000">
+            <a:off x="1857375" y="3657600"/>
+            <a:ext cx="1428750" cy="419100"/>
+          </a:xfrm>
+          <a:prstGeom prst="rect">
+            <a:avLst/>
+          </a:prstGeom>
+          <a:solidFill>
+            <a:srgbClr val="DBE6A7">
+              <a:alpha val="70000"/>
+            </a:srgbClr>
+          </a:solidFill>
+          <a:ln>
+            <a:noFill/>
+          </a:ln>
+          <a:effectLst/>
+        </p:spPr>
+        <p:style>
+          <a:lnRef idx="1">
+            <a:schemeClr val="accent1"/>
+          </a:lnRef>
+          <a:fillRef idx="3">
+            <a:schemeClr val="accent1"/>
+          </a:fillRef>
+          <a:effectRef idx="2">
+            <a:schemeClr val="accent1"/>
+          </a:effectRef>
+          <a:fontRef idx="minor">
+            <a:schemeClr val="lt1"/>
+          </a:fontRef>
+        </p:style>
+        <p:txBody>
+          <a:bodyPr rtlCol="0" anchor="ctr"/>
+          <a:lstStyle/>
+          <a:p>
+            <a:pPr algn="ctr"/>
+          </a:p>
+        </p:txBody>
+      </p:sp>
+      <p:sp>
+        <p:nvSpPr>
+          <p:cNvPr id="11" name="Rectangle 10"/>
+          <p:cNvSpPr/>
+          <p:nvPr/>
+        </p:nvSpPr>
+        <p:spPr>
+          <a:xfrm rot="1680000">
+            <a:off x="7000875" y="3657600"/>
+            <a:ext cx="1428750" cy="419100"/>
+          </a:xfrm>
+          <a:prstGeom prst="rect">
+            <a:avLst/>
+          </a:prstGeom>
+          <a:solidFill>
+            <a:srgbClr val="DBE6A7">
+              <a:alpha val="70000"/>
+            </a:srgbClr>
+          </a:solidFill>
+          <a:ln>
+            <a:noFill/>
+          </a:ln>
+          <a:effectLst/>
+        </p:spPr>
+        <p:style>
+          <a:lnRef idx="1">
+            <a:schemeClr val="accent1"/>
+          </a:lnRef>
+          <a:fillRef idx="3">
+            <a:schemeClr val="accent1"/>
+          </a:fillRef>
+          <a:effectRef idx="2">
+            <a:schemeClr val="accent1"/>
+          </a:effectRef>
+          <a:fontRef idx="minor">
+            <a:schemeClr val="lt1"/>
+          </a:fontRef>
+        </p:style>
+        <p:txBody>
+          <a:bodyPr rtlCol="0" anchor="ctr"/>
+          <a:lstStyle/>
+          <a:p>
+            <a:pPr algn="ctr"/>
+          </a:p>
+        </p:txBody>
+      </p:sp>
+      <p:sp>
+        <p:nvSpPr>
+          <p:cNvPr id="12" name="TextBox 11"/>
           <p:cNvSpPr txBox="1"/>
           <p:nvPr/>
         </p:nvSpPr>
         <p:spPr>
           <a:xfrm>
-            <a:off x="2190750" y="4476750"/>
-            <a:ext cx="5905500" cy="4362343"/>
+            <a:off x="2286000" y="4476750"/>
+            <a:ext cx="5715000" cy="4191659"/>
           </a:xfrm>
           <a:prstGeom prst="rect">
             <a:avLst/>
@@ -4777,9 +4919,9 @@
               </a:lnSpc>
             </a:pPr>
             <a:r>
-              <a:rPr sz="5000" b="1" i="0">
+              <a:rPr sz="4800" b="1" i="0">
                 <a:solidFill>
-                  <a:srgbClr val="F4F1EA"/>
+                  <a:srgbClr val="22371F"/>
                 </a:solidFill>
                 <a:latin typeface="Montserrat"/>
               </a:rPr>
@@ -4788,9 +4930,641 @@
           </a:p>
         </p:txBody>
       </p:sp>
+      <p:grpSp>
+        <p:nvGrpSpPr>
+          <p:cNvPr id="13" name="Group 12"/>
+          <p:cNvGrpSpPr/>
+          <p:nvPr/>
+        </p:nvGrpSpPr>
+        <p:grpSpPr>
+          <a:xfrm rot="360000">
+            <a:off x="0" y="0"/>
+            <a:ext cx="7739062" cy="8858250"/>
+            <a:chOff x="0" y="0"/>
+            <a:chExt cx="7739062" cy="8858250"/>
+          </a:xfrm>
+        </p:grpSpPr>
+        <p:sp>
+          <p:nvSpPr>
+            <p:cNvPr id="14" name="Rounded Rectangle 13"/>
+            <p:cNvSpPr/>
+            <p:nvPr/>
+          </p:nvSpPr>
+          <p:spPr>
+            <a:xfrm>
+              <a:off x="6738937" y="8715375"/>
+              <a:ext cx="1000125" cy="142875"/>
+            </a:xfrm>
+            <a:prstGeom prst="roundRect">
+              <a:avLst/>
+            </a:prstGeom>
+            <a:solidFill>
+              <a:srgbClr val="3E6B5A"/>
+            </a:solidFill>
+            <a:ln w="57150">
+              <a:solidFill>
+                <a:srgbClr val="FFFFFF"/>
+              </a:solidFill>
+            </a:ln>
+            <a:effectLst>
+              <a:outerShdw blurRad="228600" dist="76200" dir="5400000" algn="t" rotWithShape="0">
+                <a:srgbClr val="000000">
+                  <a:alpha val="30000"/>
+                </a:srgbClr>
+              </a:outerShdw>
+            </a:effectLst>
+          </p:spPr>
+          <p:style>
+            <a:lnRef idx="1">
+              <a:schemeClr val="accent1"/>
+            </a:lnRef>
+            <a:fillRef idx="3">
+              <a:schemeClr val="accent1"/>
+            </a:fillRef>
+            <a:effectRef idx="2">
+              <a:schemeClr val="accent1"/>
+            </a:effectRef>
+            <a:fontRef idx="minor">
+              <a:schemeClr val="lt1"/>
+            </a:fontRef>
+          </p:style>
+          <p:txBody>
+            <a:bodyPr rtlCol="0" anchor="ctr"/>
+            <a:lstStyle/>
+            <a:p>
+              <a:pPr algn="ctr"/>
+            </a:p>
+          </p:txBody>
+        </p:sp>
+        <p:sp>
+          <p:nvSpPr>
+            <p:cNvPr id="15" name="Rounded Rectangle 14"/>
+            <p:cNvSpPr/>
+            <p:nvPr/>
+          </p:nvSpPr>
+          <p:spPr>
+            <a:xfrm>
+              <a:off x="7310437" y="7829550"/>
+              <a:ext cx="200025" cy="914400"/>
+            </a:xfrm>
+            <a:prstGeom prst="roundRect">
+              <a:avLst/>
+            </a:prstGeom>
+            <a:solidFill>
+              <a:srgbClr val="3E6B5A"/>
+            </a:solidFill>
+            <a:ln w="57150">
+              <a:solidFill>
+                <a:srgbClr val="FFFFFF"/>
+              </a:solidFill>
+            </a:ln>
+            <a:effectLst/>
+          </p:spPr>
+          <p:style>
+            <a:lnRef idx="1">
+              <a:schemeClr val="accent1"/>
+            </a:lnRef>
+            <a:fillRef idx="3">
+              <a:schemeClr val="accent1"/>
+            </a:fillRef>
+            <a:effectRef idx="2">
+              <a:schemeClr val="accent1"/>
+            </a:effectRef>
+            <a:fontRef idx="minor">
+              <a:schemeClr val="lt1"/>
+            </a:fontRef>
+          </p:style>
+          <p:txBody>
+            <a:bodyPr rtlCol="0" anchor="ctr"/>
+            <a:lstStyle/>
+            <a:p>
+              <a:pPr algn="ctr"/>
+            </a:p>
+          </p:txBody>
+        </p:sp>
+        <p:sp>
+          <p:nvSpPr>
+            <p:cNvPr id="16" name="Rectangle 15"/>
+            <p:cNvSpPr/>
+            <p:nvPr/>
+          </p:nvSpPr>
+          <p:spPr>
+            <a:xfrm>
+              <a:off x="6838950" y="8315325"/>
+              <a:ext cx="714375" cy="71437"/>
+            </a:xfrm>
+            <a:prstGeom prst="rect">
+              <a:avLst/>
+            </a:prstGeom>
+            <a:solidFill>
+              <a:srgbClr val="22371F"/>
+            </a:solidFill>
+            <a:ln>
+              <a:noFill/>
+            </a:ln>
+            <a:effectLst/>
+          </p:spPr>
+          <p:style>
+            <a:lnRef idx="1">
+              <a:schemeClr val="accent1"/>
+            </a:lnRef>
+            <a:fillRef idx="3">
+              <a:schemeClr val="accent1"/>
+            </a:fillRef>
+            <a:effectRef idx="2">
+              <a:schemeClr val="accent1"/>
+            </a:effectRef>
+            <a:fontRef idx="minor">
+              <a:schemeClr val="lt1"/>
+            </a:fontRef>
+          </p:style>
+          <p:txBody>
+            <a:bodyPr rtlCol="0" anchor="ctr"/>
+            <a:lstStyle/>
+            <a:p>
+              <a:pPr algn="ctr"/>
+            </a:p>
+          </p:txBody>
+        </p:sp>
+        <p:sp>
+          <p:nvSpPr>
+            <p:cNvPr id="17" name="Rounded Rectangle 16"/>
+            <p:cNvSpPr/>
+            <p:nvPr/>
+          </p:nvSpPr>
+          <p:spPr>
+            <a:xfrm rot="20520000">
+              <a:off x="6953250" y="7500937"/>
+              <a:ext cx="228600" cy="714375"/>
+            </a:xfrm>
+            <a:prstGeom prst="roundRect">
+              <a:avLst/>
+            </a:prstGeom>
+            <a:solidFill>
+              <a:srgbClr val="D9D2C3"/>
+            </a:solidFill>
+            <a:ln w="57150">
+              <a:solidFill>
+                <a:srgbClr val="FFFFFF"/>
+              </a:solidFill>
+            </a:ln>
+            <a:effectLst/>
+          </p:spPr>
+          <p:style>
+            <a:lnRef idx="1">
+              <a:schemeClr val="accent1"/>
+            </a:lnRef>
+            <a:fillRef idx="3">
+              <a:schemeClr val="accent1"/>
+            </a:fillRef>
+            <a:effectRef idx="2">
+              <a:schemeClr val="accent1"/>
+            </a:effectRef>
+            <a:fontRef idx="minor">
+              <a:schemeClr val="lt1"/>
+            </a:fontRef>
+          </p:style>
+          <p:txBody>
+            <a:bodyPr rtlCol="0" anchor="ctr"/>
+            <a:lstStyle/>
+            <a:p>
+              <a:pPr algn="ctr"/>
+            </a:p>
+          </p:txBody>
+        </p:sp>
+        <p:sp>
+          <p:nvSpPr>
+            <p:cNvPr id="18" name="Rounded Rectangle 17"/>
+            <p:cNvSpPr/>
+            <p:nvPr/>
+          </p:nvSpPr>
+          <p:spPr>
+            <a:xfrm rot="20520000">
+              <a:off x="6853237" y="7372350"/>
+              <a:ext cx="285750" cy="142875"/>
+            </a:xfrm>
+            <a:prstGeom prst="roundRect">
+              <a:avLst/>
+            </a:prstGeom>
+            <a:solidFill>
+              <a:srgbClr val="3E6B5A"/>
+            </a:solidFill>
+            <a:ln w="57150">
+              <a:solidFill>
+                <a:srgbClr val="FFFFFF"/>
+              </a:solidFill>
+            </a:ln>
+            <a:effectLst/>
+          </p:spPr>
+          <p:style>
+            <a:lnRef idx="1">
+              <a:schemeClr val="accent1"/>
+            </a:lnRef>
+            <a:fillRef idx="3">
+              <a:schemeClr val="accent1"/>
+            </a:fillRef>
+            <a:effectRef idx="2">
+              <a:schemeClr val="accent1"/>
+            </a:effectRef>
+            <a:fontRef idx="minor">
+              <a:schemeClr val="lt1"/>
+            </a:fontRef>
+          </p:style>
+          <p:txBody>
+            <a:bodyPr rtlCol="0" anchor="ctr"/>
+            <a:lstStyle/>
+            <a:p>
+              <a:pPr algn="ctr"/>
+            </a:p>
+          </p:txBody>
+        </p:sp>
+        <p:sp>
+          <p:nvSpPr>
+            <p:cNvPr id="19" name="Oval 18"/>
+            <p:cNvSpPr/>
+            <p:nvPr/>
+          </p:nvSpPr>
+          <p:spPr>
+            <a:xfrm>
+              <a:off x="7267575" y="7972425"/>
+              <a:ext cx="200025" cy="200025"/>
+            </a:xfrm>
+            <a:prstGeom prst="ellipse">
+              <a:avLst/>
+            </a:prstGeom>
+            <a:solidFill>
+              <a:srgbClr val="E0A83A"/>
+            </a:solidFill>
+            <a:ln>
+              <a:noFill/>
+            </a:ln>
+            <a:effectLst/>
+          </p:spPr>
+          <p:style>
+            <a:lnRef idx="1">
+              <a:schemeClr val="accent1"/>
+            </a:lnRef>
+            <a:fillRef idx="3">
+              <a:schemeClr val="accent1"/>
+            </a:fillRef>
+            <a:effectRef idx="2">
+              <a:schemeClr val="accent1"/>
+            </a:effectRef>
+            <a:fontRef idx="minor">
+              <a:schemeClr val="lt1"/>
+            </a:fontRef>
+          </p:style>
+          <p:txBody>
+            <a:bodyPr rtlCol="0" anchor="ctr"/>
+            <a:lstStyle/>
+            <a:p>
+              <a:pPr algn="ctr"/>
+            </a:p>
+          </p:txBody>
+        </p:sp>
+      </p:grpSp>
+      <p:grpSp>
+        <p:nvGrpSpPr>
+          <p:cNvPr id="20" name="Group 19"/>
+          <p:cNvGrpSpPr/>
+          <p:nvPr/>
+        </p:nvGrpSpPr>
+        <p:grpSpPr>
+          <a:xfrm rot="21240000">
+            <a:off x="0" y="0"/>
+            <a:ext cx="3810000" cy="9124950"/>
+            <a:chOff x="0" y="0"/>
+            <a:chExt cx="3810000" cy="9124950"/>
+          </a:xfrm>
+        </p:grpSpPr>
+        <p:sp>
+          <p:nvSpPr>
+            <p:cNvPr id="21" name="Rectangle 20"/>
+            <p:cNvSpPr/>
+            <p:nvPr/>
+          </p:nvSpPr>
+          <p:spPr>
+            <a:xfrm>
+              <a:off x="3105150" y="8031480"/>
+              <a:ext cx="76200" cy="826770"/>
+            </a:xfrm>
+            <a:prstGeom prst="rect">
+              <a:avLst/>
+            </a:prstGeom>
+            <a:solidFill>
+              <a:srgbClr val="7FA05A"/>
+            </a:solidFill>
+            <a:ln>
+              <a:noFill/>
+            </a:ln>
+            <a:effectLst/>
+          </p:spPr>
+          <p:style>
+            <a:lnRef idx="1">
+              <a:schemeClr val="accent1"/>
+            </a:lnRef>
+            <a:fillRef idx="3">
+              <a:schemeClr val="accent1"/>
+            </a:fillRef>
+            <a:effectRef idx="2">
+              <a:schemeClr val="accent1"/>
+            </a:effectRef>
+            <a:fontRef idx="minor">
+              <a:schemeClr val="lt1"/>
+            </a:fontRef>
+          </p:style>
+          <p:txBody>
+            <a:bodyPr rtlCol="0" anchor="ctr"/>
+            <a:lstStyle/>
+            <a:p>
+              <a:pPr algn="ctr"/>
+            </a:p>
+          </p:txBody>
+        </p:sp>
+        <p:sp>
+          <p:nvSpPr>
+            <p:cNvPr id="22" name="Oval 21"/>
+            <p:cNvSpPr/>
+            <p:nvPr/>
+          </p:nvSpPr>
+          <p:spPr>
+            <a:xfrm rot="8700000">
+              <a:off x="2609850" y="7844790"/>
+              <a:ext cx="533400" cy="266700"/>
+            </a:xfrm>
+            <a:prstGeom prst="ellipse">
+              <a:avLst/>
+            </a:prstGeom>
+            <a:solidFill>
+              <a:srgbClr val="59A66C"/>
+            </a:solidFill>
+            <a:ln w="57150">
+              <a:solidFill>
+                <a:srgbClr val="FFFFFF"/>
+              </a:solidFill>
+            </a:ln>
+            <a:effectLst/>
+          </p:spPr>
+          <p:style>
+            <a:lnRef idx="1">
+              <a:schemeClr val="accent1"/>
+            </a:lnRef>
+            <a:fillRef idx="3">
+              <a:schemeClr val="accent1"/>
+            </a:fillRef>
+            <a:effectRef idx="2">
+              <a:schemeClr val="accent1"/>
+            </a:effectRef>
+            <a:fontRef idx="minor">
+              <a:schemeClr val="lt1"/>
+            </a:fontRef>
+          </p:style>
+          <p:txBody>
+            <a:bodyPr rtlCol="0" anchor="ctr"/>
+            <a:lstStyle/>
+            <a:p>
+              <a:pPr algn="ctr"/>
+            </a:p>
+          </p:txBody>
+        </p:sp>
+        <p:sp>
+          <p:nvSpPr>
+            <p:cNvPr id="23" name="Oval 22"/>
+            <p:cNvSpPr/>
+            <p:nvPr/>
+          </p:nvSpPr>
+          <p:spPr>
+            <a:xfrm rot="2100000">
+              <a:off x="3143250" y="7844790"/>
+              <a:ext cx="533400" cy="266700"/>
+            </a:xfrm>
+            <a:prstGeom prst="ellipse">
+              <a:avLst/>
+            </a:prstGeom>
+            <a:solidFill>
+              <a:srgbClr val="59A66C"/>
+            </a:solidFill>
+            <a:ln w="57150">
+              <a:solidFill>
+                <a:srgbClr val="FFFFFF"/>
+              </a:solidFill>
+            </a:ln>
+            <a:effectLst/>
+          </p:spPr>
+          <p:style>
+            <a:lnRef idx="1">
+              <a:schemeClr val="accent1"/>
+            </a:lnRef>
+            <a:fillRef idx="3">
+              <a:schemeClr val="accent1"/>
+            </a:fillRef>
+            <a:effectRef idx="2">
+              <a:schemeClr val="accent1"/>
+            </a:effectRef>
+            <a:fontRef idx="minor">
+              <a:schemeClr val="lt1"/>
+            </a:fontRef>
+          </p:style>
+          <p:txBody>
+            <a:bodyPr rtlCol="0" anchor="ctr"/>
+            <a:lstStyle/>
+            <a:p>
+              <a:pPr algn="ctr"/>
+            </a:p>
+          </p:txBody>
+        </p:sp>
+        <p:sp>
+          <p:nvSpPr>
+            <p:cNvPr id="24" name="Oval 23"/>
+            <p:cNvSpPr/>
+            <p:nvPr/>
+          </p:nvSpPr>
+          <p:spPr>
+            <a:xfrm>
+              <a:off x="2476500" y="8724900"/>
+              <a:ext cx="1333500" cy="400050"/>
+            </a:xfrm>
+            <a:prstGeom prst="ellipse">
+              <a:avLst/>
+            </a:prstGeom>
+            <a:solidFill>
+              <a:srgbClr val="4F3433"/>
+            </a:solidFill>
+            <a:ln w="57150">
+              <a:solidFill>
+                <a:srgbClr val="FFFFFF"/>
+              </a:solidFill>
+            </a:ln>
+            <a:effectLst>
+              <a:outerShdw blurRad="228600" dist="76200" dir="5400000" algn="t" rotWithShape="0">
+                <a:srgbClr val="000000">
+                  <a:alpha val="30000"/>
+                </a:srgbClr>
+              </a:outerShdw>
+            </a:effectLst>
+          </p:spPr>
+          <p:style>
+            <a:lnRef idx="1">
+              <a:schemeClr val="accent1"/>
+            </a:lnRef>
+            <a:fillRef idx="3">
+              <a:schemeClr val="accent1"/>
+            </a:fillRef>
+            <a:effectRef idx="2">
+              <a:schemeClr val="accent1"/>
+            </a:effectRef>
+            <a:fontRef idx="minor">
+              <a:schemeClr val="lt1"/>
+            </a:fontRef>
+          </p:style>
+          <p:txBody>
+            <a:bodyPr rtlCol="0" anchor="ctr"/>
+            <a:lstStyle/>
+            <a:p>
+              <a:pPr algn="ctr"/>
+            </a:p>
+          </p:txBody>
+        </p:sp>
+        <p:sp>
+          <p:nvSpPr>
+            <p:cNvPr id="25" name="Oval 24"/>
+            <p:cNvSpPr/>
+            <p:nvPr/>
+          </p:nvSpPr>
+          <p:spPr>
+            <a:xfrm>
+              <a:off x="3043237" y="8880304"/>
+              <a:ext cx="35901" cy="35901"/>
+            </a:xfrm>
+            <a:prstGeom prst="ellipse">
+              <a:avLst/>
+            </a:prstGeom>
+            <a:solidFill>
+              <a:srgbClr val="F4F1EA"/>
+            </a:solidFill>
+            <a:ln>
+              <a:noFill/>
+            </a:ln>
+            <a:effectLst/>
+          </p:spPr>
+          <p:style>
+            <a:lnRef idx="1">
+              <a:schemeClr val="accent1"/>
+            </a:lnRef>
+            <a:fillRef idx="3">
+              <a:schemeClr val="accent1"/>
+            </a:fillRef>
+            <a:effectRef idx="2">
+              <a:schemeClr val="accent1"/>
+            </a:effectRef>
+            <a:fontRef idx="minor">
+              <a:schemeClr val="lt1"/>
+            </a:fontRef>
+          </p:style>
+          <p:txBody>
+            <a:bodyPr rtlCol="0" anchor="ctr"/>
+            <a:lstStyle/>
+            <a:p>
+              <a:pPr algn="ctr"/>
+            </a:p>
+          </p:txBody>
+        </p:sp>
+        <p:sp>
+          <p:nvSpPr>
+            <p:cNvPr id="26" name="Oval 25"/>
+            <p:cNvSpPr/>
+            <p:nvPr/>
+          </p:nvSpPr>
+          <p:spPr>
+            <a:xfrm>
+              <a:off x="3207360" y="8880304"/>
+              <a:ext cx="35901" cy="35901"/>
+            </a:xfrm>
+            <a:prstGeom prst="ellipse">
+              <a:avLst/>
+            </a:prstGeom>
+            <a:solidFill>
+              <a:srgbClr val="F4F1EA"/>
+            </a:solidFill>
+            <a:ln>
+              <a:noFill/>
+            </a:ln>
+            <a:effectLst/>
+          </p:spPr>
+          <p:style>
+            <a:lnRef idx="1">
+              <a:schemeClr val="accent1"/>
+            </a:lnRef>
+            <a:fillRef idx="3">
+              <a:schemeClr val="accent1"/>
+            </a:fillRef>
+            <a:effectRef idx="2">
+              <a:schemeClr val="accent1"/>
+            </a:effectRef>
+            <a:fontRef idx="minor">
+              <a:schemeClr val="lt1"/>
+            </a:fontRef>
+          </p:style>
+          <p:txBody>
+            <a:bodyPr rtlCol="0" anchor="ctr"/>
+            <a:lstStyle/>
+            <a:p>
+              <a:pPr algn="ctr"/>
+            </a:p>
+          </p:txBody>
+        </p:sp>
+        <p:sp>
+          <p:nvSpPr>
+            <p:cNvPr id="27" name="Block Arc 26"/>
+            <p:cNvSpPr/>
+            <p:nvPr/>
+          </p:nvSpPr>
+          <p:spPr>
+            <a:xfrm rot="10800000">
+              <a:off x="3086832" y="8908512"/>
+              <a:ext cx="112834" cy="82061"/>
+            </a:xfrm>
+            <a:prstGeom prst="blockArc">
+              <a:avLst>
+                <a:gd name="adj1" fmla="val 10800000"/>
+                <a:gd name="adj2" fmla="val 0"/>
+                <a:gd name="adj3" fmla="val 18000"/>
+              </a:avLst>
+            </a:prstGeom>
+            <a:solidFill>
+              <a:srgbClr val="F4F1EA"/>
+            </a:solidFill>
+            <a:ln>
+              <a:noFill/>
+            </a:ln>
+            <a:effectLst/>
+          </p:spPr>
+          <p:style>
+            <a:lnRef idx="1">
+              <a:schemeClr val="accent1"/>
+            </a:lnRef>
+            <a:fillRef idx="3">
+              <a:schemeClr val="accent1"/>
+            </a:fillRef>
+            <a:effectRef idx="2">
+              <a:schemeClr val="accent1"/>
+            </a:effectRef>
+            <a:fontRef idx="minor">
+              <a:schemeClr val="lt1"/>
+            </a:fontRef>
+          </p:style>
+          <p:txBody>
+            <a:bodyPr rtlCol="0" anchor="ctr"/>
+            <a:lstStyle/>
+            <a:p>
+              <a:pPr algn="ctr"/>
+            </a:p>
+          </p:txBody>
+        </p:sp>
+      </p:grpSp>
       <p:pic>
         <p:nvPicPr>
-          <p:cNvPr id="10" name="Picture 9" descr="foundation-logo-white.png"/>
+          <p:cNvPr id="28" name="Picture 27" descr="foundation-logo-white.png"/>
           <p:cNvPicPr>
             <a:picLocks noChangeAspect="1"/>
           </p:cNvPicPr>
@@ -5433,6 +6207,435 @@
           </p:spPr>
         </p:pic>
       </p:grpSp>
+      <p:sp>
+        <p:nvSpPr>
+          <p:cNvPr id="18" name="Rectangle 17"/>
+          <p:cNvSpPr/>
+          <p:nvPr/>
+        </p:nvSpPr>
+        <p:spPr>
+          <a:xfrm rot="19680000">
+            <a:off x="619125" y="523875"/>
+            <a:ext cx="1619250" cy="476250"/>
+          </a:xfrm>
+          <a:prstGeom prst="rect">
+            <a:avLst/>
+          </a:prstGeom>
+          <a:solidFill>
+            <a:srgbClr val="DBE6A7">
+              <a:alpha val="70000"/>
+            </a:srgbClr>
+          </a:solidFill>
+          <a:ln>
+            <a:noFill/>
+          </a:ln>
+          <a:effectLst/>
+        </p:spPr>
+        <p:style>
+          <a:lnRef idx="1">
+            <a:schemeClr val="accent1"/>
+          </a:lnRef>
+          <a:fillRef idx="3">
+            <a:schemeClr val="accent1"/>
+          </a:fillRef>
+          <a:effectRef idx="2">
+            <a:schemeClr val="accent1"/>
+          </a:effectRef>
+          <a:fontRef idx="minor">
+            <a:schemeClr val="lt1"/>
+          </a:fontRef>
+        </p:style>
+        <p:txBody>
+          <a:bodyPr rtlCol="0" anchor="ctr"/>
+          <a:lstStyle/>
+          <a:p>
+            <a:pPr algn="ctr"/>
+          </a:p>
+        </p:txBody>
+      </p:sp>
+      <p:sp>
+        <p:nvSpPr>
+          <p:cNvPr id="19" name="Rectangle 18"/>
+          <p:cNvSpPr/>
+          <p:nvPr/>
+        </p:nvSpPr>
+        <p:spPr>
+          <a:xfrm rot="2160000">
+            <a:off x="8239125" y="952500"/>
+            <a:ext cx="1619250" cy="476250"/>
+          </a:xfrm>
+          <a:prstGeom prst="rect">
+            <a:avLst/>
+          </a:prstGeom>
+          <a:solidFill>
+            <a:srgbClr val="DBE6A7">
+              <a:alpha val="70000"/>
+            </a:srgbClr>
+          </a:solidFill>
+          <a:ln>
+            <a:noFill/>
+          </a:ln>
+          <a:effectLst/>
+        </p:spPr>
+        <p:style>
+          <a:lnRef idx="1">
+            <a:schemeClr val="accent1"/>
+          </a:lnRef>
+          <a:fillRef idx="3">
+            <a:schemeClr val="accent1"/>
+          </a:fillRef>
+          <a:effectRef idx="2">
+            <a:schemeClr val="accent1"/>
+          </a:effectRef>
+          <a:fontRef idx="minor">
+            <a:schemeClr val="lt1"/>
+          </a:fontRef>
+        </p:style>
+        <p:txBody>
+          <a:bodyPr rtlCol="0" anchor="ctr"/>
+          <a:lstStyle/>
+          <a:p>
+            <a:pPr algn="ctr"/>
+          </a:p>
+        </p:txBody>
+      </p:sp>
+      <p:grpSp>
+        <p:nvGrpSpPr>
+          <p:cNvPr id="20" name="Group 19"/>
+          <p:cNvGrpSpPr/>
+          <p:nvPr/>
+        </p:nvGrpSpPr>
+        <p:grpSpPr>
+          <a:xfrm rot="20400000">
+            <a:off x="0" y="0"/>
+            <a:ext cx="10001250" cy="12396787"/>
+            <a:chOff x="0" y="0"/>
+            <a:chExt cx="10001250" cy="12396787"/>
+          </a:xfrm>
+        </p:grpSpPr>
+        <p:sp>
+          <p:nvSpPr>
+            <p:cNvPr id="21" name="Arc 20"/>
+            <p:cNvSpPr/>
+            <p:nvPr/>
+          </p:nvSpPr>
+          <p:spPr>
+            <a:xfrm>
+              <a:off x="8343900" y="12012739"/>
+              <a:ext cx="242887" cy="156019"/>
+            </a:xfrm>
+            <a:prstGeom prst="arc">
+              <a:avLst/>
+            </a:prstGeom>
+            <a:noFill/>
+            <a:ln w="38100">
+              <a:solidFill>
+                <a:srgbClr val="156826"/>
+              </a:solidFill>
+            </a:ln>
+            <a:effectLst/>
+          </p:spPr>
+          <p:style>
+            <a:lnRef idx="1">
+              <a:schemeClr val="accent1"/>
+            </a:lnRef>
+            <a:fillRef idx="3">
+              <a:schemeClr val="accent1"/>
+            </a:fillRef>
+            <a:effectRef idx="2">
+              <a:schemeClr val="accent1"/>
+            </a:effectRef>
+            <a:fontRef idx="minor">
+              <a:schemeClr val="lt1"/>
+            </a:fontRef>
+          </p:style>
+          <p:txBody>
+            <a:bodyPr rtlCol="0" anchor="ctr"/>
+            <a:lstStyle/>
+            <a:p>
+              <a:pPr algn="ctr"/>
+            </a:p>
+          </p:txBody>
+        </p:sp>
+        <p:sp>
+          <p:nvSpPr>
+            <p:cNvPr id="22" name="Arc 21"/>
+            <p:cNvSpPr/>
+            <p:nvPr/>
+          </p:nvSpPr>
+          <p:spPr>
+            <a:xfrm rot="10800000">
+              <a:off x="8115300" y="12024741"/>
+              <a:ext cx="242887" cy="156019"/>
+            </a:xfrm>
+            <a:prstGeom prst="arc">
+              <a:avLst/>
+            </a:prstGeom>
+            <a:noFill/>
+            <a:ln w="38100">
+              <a:solidFill>
+                <a:srgbClr val="156826"/>
+              </a:solidFill>
+            </a:ln>
+            <a:effectLst/>
+          </p:spPr>
+          <p:style>
+            <a:lnRef idx="1">
+              <a:schemeClr val="accent1"/>
+            </a:lnRef>
+            <a:fillRef idx="3">
+              <a:schemeClr val="accent1"/>
+            </a:fillRef>
+            <a:effectRef idx="2">
+              <a:schemeClr val="accent1"/>
+            </a:effectRef>
+            <a:fontRef idx="minor">
+              <a:schemeClr val="lt1"/>
+            </a:fontRef>
+          </p:style>
+          <p:txBody>
+            <a:bodyPr rtlCol="0" anchor="ctr"/>
+            <a:lstStyle/>
+            <a:p>
+              <a:pPr algn="ctr"/>
+            </a:p>
+          </p:txBody>
+        </p:sp>
+        <p:sp>
+          <p:nvSpPr>
+            <p:cNvPr id="23" name="Arc 22"/>
+            <p:cNvSpPr/>
+            <p:nvPr/>
+          </p:nvSpPr>
+          <p:spPr>
+            <a:xfrm>
+              <a:off x="7886700" y="12012739"/>
+              <a:ext cx="242887" cy="156019"/>
+            </a:xfrm>
+            <a:prstGeom prst="arc">
+              <a:avLst/>
+            </a:prstGeom>
+            <a:noFill/>
+            <a:ln w="38100">
+              <a:solidFill>
+                <a:srgbClr val="156826"/>
+              </a:solidFill>
+            </a:ln>
+            <a:effectLst/>
+          </p:spPr>
+          <p:style>
+            <a:lnRef idx="1">
+              <a:schemeClr val="accent1"/>
+            </a:lnRef>
+            <a:fillRef idx="3">
+              <a:schemeClr val="accent1"/>
+            </a:fillRef>
+            <a:effectRef idx="2">
+              <a:schemeClr val="accent1"/>
+            </a:effectRef>
+            <a:fontRef idx="minor">
+              <a:schemeClr val="lt1"/>
+            </a:fontRef>
+          </p:style>
+          <p:txBody>
+            <a:bodyPr rtlCol="0" anchor="ctr"/>
+            <a:lstStyle/>
+            <a:p>
+              <a:pPr algn="ctr"/>
+            </a:p>
+          </p:txBody>
+        </p:sp>
+        <p:sp>
+          <p:nvSpPr>
+            <p:cNvPr id="24" name="Rounded Rectangle 23"/>
+            <p:cNvSpPr/>
+            <p:nvPr/>
+          </p:nvSpPr>
+          <p:spPr>
+            <a:xfrm>
+              <a:off x="8572500" y="11796712"/>
+              <a:ext cx="1428750" cy="600075"/>
+            </a:xfrm>
+            <a:prstGeom prst="roundRect">
+              <a:avLst>
+                <a:gd name="adj" fmla="val 50000"/>
+              </a:avLst>
+            </a:prstGeom>
+            <a:solidFill>
+              <a:srgbClr val="BFD8A6"/>
+            </a:solidFill>
+            <a:ln w="57150">
+              <a:solidFill>
+                <a:srgbClr val="FFFFFF"/>
+              </a:solidFill>
+            </a:ln>
+            <a:effectLst>
+              <a:outerShdw blurRad="228600" dist="76200" dir="5400000" algn="t" rotWithShape="0">
+                <a:srgbClr val="000000">
+                  <a:alpha val="30000"/>
+                </a:srgbClr>
+              </a:outerShdw>
+            </a:effectLst>
+          </p:spPr>
+          <p:style>
+            <a:lnRef idx="1">
+              <a:schemeClr val="accent1"/>
+            </a:lnRef>
+            <a:fillRef idx="3">
+              <a:schemeClr val="accent1"/>
+            </a:fillRef>
+            <a:effectRef idx="2">
+              <a:schemeClr val="accent1"/>
+            </a:effectRef>
+            <a:fontRef idx="minor">
+              <a:schemeClr val="lt1"/>
+            </a:fontRef>
+          </p:style>
+          <p:txBody>
+            <a:bodyPr rtlCol="0" anchor="ctr"/>
+            <a:lstStyle/>
+            <a:p>
+              <a:pPr algn="ctr"/>
+            </a:p>
+          </p:txBody>
+        </p:sp>
+        <p:sp>
+          <p:nvSpPr>
+            <p:cNvPr id="25" name="Oval 24"/>
+            <p:cNvSpPr/>
+            <p:nvPr/>
+          </p:nvSpPr>
+          <p:spPr>
+            <a:xfrm>
+              <a:off x="9331685" y="12044016"/>
+              <a:ext cx="45460" cy="45460"/>
+            </a:xfrm>
+            <a:prstGeom prst="ellipse">
+              <a:avLst/>
+            </a:prstGeom>
+            <a:solidFill>
+              <a:srgbClr val="22371F"/>
+            </a:solidFill>
+            <a:ln>
+              <a:noFill/>
+            </a:ln>
+            <a:effectLst/>
+          </p:spPr>
+          <p:style>
+            <a:lnRef idx="1">
+              <a:schemeClr val="accent1"/>
+            </a:lnRef>
+            <a:fillRef idx="3">
+              <a:schemeClr val="accent1"/>
+            </a:fillRef>
+            <a:effectRef idx="2">
+              <a:schemeClr val="accent1"/>
+            </a:effectRef>
+            <a:fontRef idx="minor">
+              <a:schemeClr val="lt1"/>
+            </a:fontRef>
+          </p:style>
+          <p:txBody>
+            <a:bodyPr rtlCol="0" anchor="ctr"/>
+            <a:lstStyle/>
+            <a:p>
+              <a:pPr algn="ctr"/>
+            </a:p>
+          </p:txBody>
+        </p:sp>
+        <p:sp>
+          <p:nvSpPr>
+            <p:cNvPr id="26" name="Oval 25"/>
+            <p:cNvSpPr/>
+            <p:nvPr/>
+          </p:nvSpPr>
+          <p:spPr>
+            <a:xfrm>
+              <a:off x="9539503" y="12044016"/>
+              <a:ext cx="45460" cy="45460"/>
+            </a:xfrm>
+            <a:prstGeom prst="ellipse">
+              <a:avLst/>
+            </a:prstGeom>
+            <a:solidFill>
+              <a:srgbClr val="22371F"/>
+            </a:solidFill>
+            <a:ln>
+              <a:noFill/>
+            </a:ln>
+            <a:effectLst/>
+          </p:spPr>
+          <p:style>
+            <a:lnRef idx="1">
+              <a:schemeClr val="accent1"/>
+            </a:lnRef>
+            <a:fillRef idx="3">
+              <a:schemeClr val="accent1"/>
+            </a:fillRef>
+            <a:effectRef idx="2">
+              <a:schemeClr val="accent1"/>
+            </a:effectRef>
+            <a:fontRef idx="minor">
+              <a:schemeClr val="lt1"/>
+            </a:fontRef>
+          </p:style>
+          <p:txBody>
+            <a:bodyPr rtlCol="0" anchor="ctr"/>
+            <a:lstStyle/>
+            <a:p>
+              <a:pPr algn="ctr"/>
+            </a:p>
+          </p:txBody>
+        </p:sp>
+        <p:sp>
+          <p:nvSpPr>
+            <p:cNvPr id="27" name="Block Arc 26"/>
+            <p:cNvSpPr/>
+            <p:nvPr/>
+          </p:nvSpPr>
+          <p:spPr>
+            <a:xfrm rot="10800000">
+              <a:off x="9386887" y="12079734"/>
+              <a:ext cx="142874" cy="103909"/>
+            </a:xfrm>
+            <a:prstGeom prst="blockArc">
+              <a:avLst>
+                <a:gd name="adj1" fmla="val 10800000"/>
+                <a:gd name="adj2" fmla="val 0"/>
+                <a:gd name="adj3" fmla="val 18000"/>
+              </a:avLst>
+            </a:prstGeom>
+            <a:solidFill>
+              <a:srgbClr val="22371F"/>
+            </a:solidFill>
+            <a:ln>
+              <a:noFill/>
+            </a:ln>
+            <a:effectLst/>
+          </p:spPr>
+          <p:style>
+            <a:lnRef idx="1">
+              <a:schemeClr val="accent1"/>
+            </a:lnRef>
+            <a:fillRef idx="3">
+              <a:schemeClr val="accent1"/>
+            </a:fillRef>
+            <a:effectRef idx="2">
+              <a:schemeClr val="accent1"/>
+            </a:effectRef>
+            <a:fontRef idx="minor">
+              <a:schemeClr val="lt1"/>
+            </a:fontRef>
+          </p:style>
+          <p:txBody>
+            <a:bodyPr rtlCol="0" anchor="ctr"/>
+            <a:lstStyle/>
+            <a:p>
+              <a:pPr algn="ctr"/>
+            </a:p>
+          </p:txBody>
+        </p:sp>
+      </p:grpSp>
     </p:spTree>
   </p:cSld>
   <p:clrMapOvr>
@@ -5527,7 +6730,7 @@
         </p:sp>
         <p:pic>
           <p:nvPicPr>
-            <p:cNvPr id="4" name="Picture 3" descr="276219616280406109.jpg"/>
+            <p:cNvPr id="4" name="Picture 3" descr="9001695925251202517.jpg"/>
             <p:cNvPicPr>
               <a:picLocks noChangeAspect="1"/>
             </p:cNvPicPr>
@@ -6004,6 +7207,615 @@
             </a:prstGeom>
           </p:spPr>
         </p:pic>
+      </p:grpSp>
+      <p:sp>
+        <p:nvSpPr>
+          <p:cNvPr id="17" name="Rectangle 16"/>
+          <p:cNvSpPr/>
+          <p:nvPr/>
+        </p:nvSpPr>
+        <p:spPr>
+          <a:xfrm rot="19680000">
+            <a:off x="619125" y="523875"/>
+            <a:ext cx="1619250" cy="476250"/>
+          </a:xfrm>
+          <a:prstGeom prst="rect">
+            <a:avLst/>
+          </a:prstGeom>
+          <a:solidFill>
+            <a:srgbClr val="DBE6A7">
+              <a:alpha val="70000"/>
+            </a:srgbClr>
+          </a:solidFill>
+          <a:ln>
+            <a:noFill/>
+          </a:ln>
+          <a:effectLst/>
+        </p:spPr>
+        <p:style>
+          <a:lnRef idx="1">
+            <a:schemeClr val="accent1"/>
+          </a:lnRef>
+          <a:fillRef idx="3">
+            <a:schemeClr val="accent1"/>
+          </a:fillRef>
+          <a:effectRef idx="2">
+            <a:schemeClr val="accent1"/>
+          </a:effectRef>
+          <a:fontRef idx="minor">
+            <a:schemeClr val="lt1"/>
+          </a:fontRef>
+        </p:style>
+        <p:txBody>
+          <a:bodyPr rtlCol="0" anchor="ctr"/>
+          <a:lstStyle/>
+          <a:p>
+            <a:pPr algn="ctr"/>
+          </a:p>
+        </p:txBody>
+      </p:sp>
+      <p:sp>
+        <p:nvSpPr>
+          <p:cNvPr id="18" name="Rectangle 17"/>
+          <p:cNvSpPr/>
+          <p:nvPr/>
+        </p:nvSpPr>
+        <p:spPr>
+          <a:xfrm rot="2160000">
+            <a:off x="8239125" y="952500"/>
+            <a:ext cx="1619250" cy="476250"/>
+          </a:xfrm>
+          <a:prstGeom prst="rect">
+            <a:avLst/>
+          </a:prstGeom>
+          <a:solidFill>
+            <a:srgbClr val="DBE6A7">
+              <a:alpha val="70000"/>
+            </a:srgbClr>
+          </a:solidFill>
+          <a:ln>
+            <a:noFill/>
+          </a:ln>
+          <a:effectLst/>
+        </p:spPr>
+        <p:style>
+          <a:lnRef idx="1">
+            <a:schemeClr val="accent1"/>
+          </a:lnRef>
+          <a:fillRef idx="3">
+            <a:schemeClr val="accent1"/>
+          </a:fillRef>
+          <a:effectRef idx="2">
+            <a:schemeClr val="accent1"/>
+          </a:effectRef>
+          <a:fontRef idx="minor">
+            <a:schemeClr val="lt1"/>
+          </a:fontRef>
+        </p:style>
+        <p:txBody>
+          <a:bodyPr rtlCol="0" anchor="ctr"/>
+          <a:lstStyle/>
+          <a:p>
+            <a:pPr algn="ctr"/>
+          </a:p>
+        </p:txBody>
+      </p:sp>
+      <p:grpSp>
+        <p:nvGrpSpPr>
+          <p:cNvPr id="19" name="Group 18"/>
+          <p:cNvGrpSpPr/>
+          <p:nvPr/>
+        </p:nvGrpSpPr>
+        <p:grpSpPr>
+          <a:xfrm rot="480000">
+            <a:off x="0" y="0"/>
+            <a:ext cx="10182225" cy="12773025"/>
+            <a:chOff x="0" y="0"/>
+            <a:chExt cx="10182225" cy="12773025"/>
+          </a:xfrm>
+        </p:grpSpPr>
+        <p:sp>
+          <p:nvSpPr>
+            <p:cNvPr id="20" name="Oval 19"/>
+            <p:cNvSpPr/>
+            <p:nvPr/>
+          </p:nvSpPr>
+          <p:spPr>
+            <a:xfrm>
+              <a:off x="8596312" y="12401550"/>
+              <a:ext cx="1571625" cy="371475"/>
+            </a:xfrm>
+            <a:prstGeom prst="ellipse">
+              <a:avLst/>
+            </a:prstGeom>
+            <a:solidFill>
+              <a:srgbClr val="FFFDF7"/>
+            </a:solidFill>
+            <a:ln w="57150">
+              <a:solidFill>
+                <a:srgbClr val="FFFFFF"/>
+              </a:solidFill>
+            </a:ln>
+            <a:effectLst>
+              <a:outerShdw blurRad="228600" dist="76200" dir="5400000" algn="t" rotWithShape="0">
+                <a:srgbClr val="000000">
+                  <a:alpha val="30000"/>
+                </a:srgbClr>
+              </a:outerShdw>
+            </a:effectLst>
+          </p:spPr>
+          <p:style>
+            <a:lnRef idx="1">
+              <a:schemeClr val="accent1"/>
+            </a:lnRef>
+            <a:fillRef idx="3">
+              <a:schemeClr val="accent1"/>
+            </a:fillRef>
+            <a:effectRef idx="2">
+              <a:schemeClr val="accent1"/>
+            </a:effectRef>
+            <a:fontRef idx="minor">
+              <a:schemeClr val="lt1"/>
+            </a:fontRef>
+          </p:style>
+          <p:txBody>
+            <a:bodyPr rtlCol="0" anchor="ctr"/>
+            <a:lstStyle/>
+            <a:p>
+              <a:pPr algn="ctr"/>
+            </a:p>
+          </p:txBody>
+        </p:sp>
+        <p:sp>
+          <p:nvSpPr>
+            <p:cNvPr id="21" name="Donut 20"/>
+            <p:cNvSpPr/>
+            <p:nvPr/>
+          </p:nvSpPr>
+          <p:spPr>
+            <a:xfrm>
+              <a:off x="9753600" y="11830050"/>
+              <a:ext cx="428625" cy="428625"/>
+            </a:xfrm>
+            <a:prstGeom prst="donut">
+              <a:avLst/>
+            </a:prstGeom>
+            <a:solidFill>
+              <a:srgbClr val="FFFDF7"/>
+            </a:solidFill>
+            <a:ln w="57150">
+              <a:solidFill>
+                <a:srgbClr val="FFFFFF"/>
+              </a:solidFill>
+            </a:ln>
+            <a:effectLst/>
+          </p:spPr>
+          <p:style>
+            <a:lnRef idx="1">
+              <a:schemeClr val="accent1"/>
+            </a:lnRef>
+            <a:fillRef idx="3">
+              <a:schemeClr val="accent1"/>
+            </a:fillRef>
+            <a:effectRef idx="2">
+              <a:schemeClr val="accent1"/>
+            </a:effectRef>
+            <a:fontRef idx="minor">
+              <a:schemeClr val="lt1"/>
+            </a:fontRef>
+          </p:style>
+          <p:txBody>
+            <a:bodyPr rtlCol="0" anchor="ctr"/>
+            <a:lstStyle/>
+            <a:p>
+              <a:pPr algn="ctr"/>
+            </a:p>
+          </p:txBody>
+        </p:sp>
+        <p:sp>
+          <p:nvSpPr>
+            <p:cNvPr id="22" name="Rounded Rectangle 21"/>
+            <p:cNvSpPr/>
+            <p:nvPr/>
+          </p:nvSpPr>
+          <p:spPr>
+            <a:xfrm>
+              <a:off x="8839200" y="11644312"/>
+              <a:ext cx="1085850" cy="885825"/>
+            </a:xfrm>
+            <a:prstGeom prst="roundRect">
+              <a:avLst/>
+            </a:prstGeom>
+            <a:solidFill>
+              <a:srgbClr val="FFFDF7"/>
+            </a:solidFill>
+            <a:ln w="57150">
+              <a:solidFill>
+                <a:srgbClr val="FFFFFF"/>
+              </a:solidFill>
+            </a:ln>
+            <a:effectLst/>
+          </p:spPr>
+          <p:style>
+            <a:lnRef idx="1">
+              <a:schemeClr val="accent1"/>
+            </a:lnRef>
+            <a:fillRef idx="3">
+              <a:schemeClr val="accent1"/>
+            </a:fillRef>
+            <a:effectRef idx="2">
+              <a:schemeClr val="accent1"/>
+            </a:effectRef>
+            <a:fontRef idx="minor">
+              <a:schemeClr val="lt1"/>
+            </a:fontRef>
+          </p:style>
+          <p:txBody>
+            <a:bodyPr rtlCol="0" anchor="ctr"/>
+            <a:lstStyle/>
+            <a:p>
+              <a:pPr algn="ctr"/>
+            </a:p>
+          </p:txBody>
+        </p:sp>
+        <p:sp>
+          <p:nvSpPr>
+            <p:cNvPr id="23" name="Rectangle 22"/>
+            <p:cNvSpPr/>
+            <p:nvPr/>
+          </p:nvSpPr>
+          <p:spPr>
+            <a:xfrm>
+              <a:off x="8867775" y="12172950"/>
+              <a:ext cx="1028700" cy="114300"/>
+            </a:xfrm>
+            <a:prstGeom prst="rect">
+              <a:avLst/>
+            </a:prstGeom>
+            <a:solidFill>
+              <a:srgbClr val="156826"/>
+            </a:solidFill>
+            <a:ln>
+              <a:noFill/>
+            </a:ln>
+            <a:effectLst/>
+          </p:spPr>
+          <p:style>
+            <a:lnRef idx="1">
+              <a:schemeClr val="accent1"/>
+            </a:lnRef>
+            <a:fillRef idx="3">
+              <a:schemeClr val="accent1"/>
+            </a:fillRef>
+            <a:effectRef idx="2">
+              <a:schemeClr val="accent1"/>
+            </a:effectRef>
+            <a:fontRef idx="minor">
+              <a:schemeClr val="lt1"/>
+            </a:fontRef>
+          </p:style>
+          <p:txBody>
+            <a:bodyPr rtlCol="0" anchor="ctr"/>
+            <a:lstStyle/>
+            <a:p>
+              <a:pPr algn="ctr"/>
+            </a:p>
+          </p:txBody>
+        </p:sp>
+        <p:sp>
+          <p:nvSpPr>
+            <p:cNvPr id="24" name="Oval 23"/>
+            <p:cNvSpPr/>
+            <p:nvPr/>
+          </p:nvSpPr>
+          <p:spPr>
+            <a:xfrm>
+              <a:off x="8867775" y="11544300"/>
+              <a:ext cx="1028700" cy="228600"/>
+            </a:xfrm>
+            <a:prstGeom prst="ellipse">
+              <a:avLst/>
+            </a:prstGeom>
+            <a:solidFill>
+              <a:srgbClr val="4F3433"/>
+            </a:solidFill>
+            <a:ln w="57150">
+              <a:solidFill>
+                <a:srgbClr val="FFFFFF"/>
+              </a:solidFill>
+            </a:ln>
+            <a:effectLst/>
+          </p:spPr>
+          <p:style>
+            <a:lnRef idx="1">
+              <a:schemeClr val="accent1"/>
+            </a:lnRef>
+            <a:fillRef idx="3">
+              <a:schemeClr val="accent1"/>
+            </a:fillRef>
+            <a:effectRef idx="2">
+              <a:schemeClr val="accent1"/>
+            </a:effectRef>
+            <a:fontRef idx="minor">
+              <a:schemeClr val="lt1"/>
+            </a:fontRef>
+          </p:style>
+          <p:txBody>
+            <a:bodyPr rtlCol="0" anchor="ctr"/>
+            <a:lstStyle/>
+            <a:p>
+              <a:pPr algn="ctr"/>
+            </a:p>
+          </p:txBody>
+        </p:sp>
+        <p:sp>
+          <p:nvSpPr>
+            <p:cNvPr id="25" name="Oval 24"/>
+            <p:cNvSpPr/>
+            <p:nvPr/>
+          </p:nvSpPr>
+          <p:spPr>
+            <a:xfrm>
+              <a:off x="9227343" y="11945143"/>
+              <a:ext cx="55562" cy="55562"/>
+            </a:xfrm>
+            <a:prstGeom prst="ellipse">
+              <a:avLst/>
+            </a:prstGeom>
+            <a:solidFill>
+              <a:srgbClr val="4F3433"/>
+            </a:solidFill>
+            <a:ln>
+              <a:noFill/>
+            </a:ln>
+            <a:effectLst/>
+          </p:spPr>
+          <p:style>
+            <a:lnRef idx="1">
+              <a:schemeClr val="accent1"/>
+            </a:lnRef>
+            <a:fillRef idx="3">
+              <a:schemeClr val="accent1"/>
+            </a:fillRef>
+            <a:effectRef idx="2">
+              <a:schemeClr val="accent1"/>
+            </a:effectRef>
+            <a:fontRef idx="minor">
+              <a:schemeClr val="lt1"/>
+            </a:fontRef>
+          </p:style>
+          <p:txBody>
+            <a:bodyPr rtlCol="0" anchor="ctr"/>
+            <a:lstStyle/>
+            <a:p>
+              <a:pPr algn="ctr"/>
+            </a:p>
+          </p:txBody>
+        </p:sp>
+        <p:sp>
+          <p:nvSpPr>
+            <p:cNvPr id="26" name="Oval 25"/>
+            <p:cNvSpPr/>
+            <p:nvPr/>
+          </p:nvSpPr>
+          <p:spPr>
+            <a:xfrm>
+              <a:off x="9481343" y="11945143"/>
+              <a:ext cx="55562" cy="55562"/>
+            </a:xfrm>
+            <a:prstGeom prst="ellipse">
+              <a:avLst/>
+            </a:prstGeom>
+            <a:solidFill>
+              <a:srgbClr val="4F3433"/>
+            </a:solidFill>
+            <a:ln>
+              <a:noFill/>
+            </a:ln>
+            <a:effectLst/>
+          </p:spPr>
+          <p:style>
+            <a:lnRef idx="1">
+              <a:schemeClr val="accent1"/>
+            </a:lnRef>
+            <a:fillRef idx="3">
+              <a:schemeClr val="accent1"/>
+            </a:fillRef>
+            <a:effectRef idx="2">
+              <a:schemeClr val="accent1"/>
+            </a:effectRef>
+            <a:fontRef idx="minor">
+              <a:schemeClr val="lt1"/>
+            </a:fontRef>
+          </p:style>
+          <p:txBody>
+            <a:bodyPr rtlCol="0" anchor="ctr"/>
+            <a:lstStyle/>
+            <a:p>
+              <a:pPr algn="ctr"/>
+            </a:p>
+          </p:txBody>
+        </p:sp>
+        <p:sp>
+          <p:nvSpPr>
+            <p:cNvPr id="27" name="Block Arc 26"/>
+            <p:cNvSpPr/>
+            <p:nvPr/>
+          </p:nvSpPr>
+          <p:spPr>
+            <a:xfrm rot="10800000">
+              <a:off x="9294812" y="11988800"/>
+              <a:ext cx="174625" cy="127000"/>
+            </a:xfrm>
+            <a:prstGeom prst="blockArc">
+              <a:avLst>
+                <a:gd name="adj1" fmla="val 10800000"/>
+                <a:gd name="adj2" fmla="val 0"/>
+                <a:gd name="adj3" fmla="val 18000"/>
+              </a:avLst>
+            </a:prstGeom>
+            <a:solidFill>
+              <a:srgbClr val="4F3433"/>
+            </a:solidFill>
+            <a:ln>
+              <a:noFill/>
+            </a:ln>
+            <a:effectLst/>
+          </p:spPr>
+          <p:style>
+            <a:lnRef idx="1">
+              <a:schemeClr val="accent1"/>
+            </a:lnRef>
+            <a:fillRef idx="3">
+              <a:schemeClr val="accent1"/>
+            </a:fillRef>
+            <a:effectRef idx="2">
+              <a:schemeClr val="accent1"/>
+            </a:effectRef>
+            <a:fontRef idx="minor">
+              <a:schemeClr val="lt1"/>
+            </a:fontRef>
+          </p:style>
+          <p:txBody>
+            <a:bodyPr rtlCol="0" anchor="ctr"/>
+            <a:lstStyle/>
+            <a:p>
+              <a:pPr algn="ctr"/>
+            </a:p>
+          </p:txBody>
+        </p:sp>
+        <p:sp>
+          <p:nvSpPr>
+            <p:cNvPr id="28" name="Wave 27"/>
+            <p:cNvSpPr/>
+            <p:nvPr/>
+          </p:nvSpPr>
+          <p:spPr>
+            <a:xfrm rot="5400000">
+              <a:off x="9110662" y="11115675"/>
+              <a:ext cx="85725" cy="342900"/>
+            </a:xfrm>
+            <a:prstGeom prst="wave">
+              <a:avLst/>
+            </a:prstGeom>
+            <a:solidFill>
+              <a:srgbClr val="D8D2C4"/>
+            </a:solidFill>
+            <a:ln>
+              <a:noFill/>
+            </a:ln>
+            <a:effectLst/>
+          </p:spPr>
+          <p:style>
+            <a:lnRef idx="1">
+              <a:schemeClr val="accent1"/>
+            </a:lnRef>
+            <a:fillRef idx="3">
+              <a:schemeClr val="accent1"/>
+            </a:fillRef>
+            <a:effectRef idx="2">
+              <a:schemeClr val="accent1"/>
+            </a:effectRef>
+            <a:fontRef idx="minor">
+              <a:schemeClr val="lt1"/>
+            </a:fontRef>
+          </p:style>
+          <p:txBody>
+            <a:bodyPr rtlCol="0" anchor="ctr"/>
+            <a:lstStyle/>
+            <a:p>
+              <a:pPr algn="ctr"/>
+            </a:p>
+          </p:txBody>
+        </p:sp>
+        <p:sp>
+          <p:nvSpPr>
+            <p:cNvPr id="29" name="Wave 28"/>
+            <p:cNvSpPr/>
+            <p:nvPr/>
+          </p:nvSpPr>
+          <p:spPr>
+            <a:xfrm rot="5400000">
+              <a:off x="9339262" y="11115675"/>
+              <a:ext cx="85725" cy="342900"/>
+            </a:xfrm>
+            <a:prstGeom prst="wave">
+              <a:avLst/>
+            </a:prstGeom>
+            <a:solidFill>
+              <a:srgbClr val="D8D2C4"/>
+            </a:solidFill>
+            <a:ln>
+              <a:noFill/>
+            </a:ln>
+            <a:effectLst/>
+          </p:spPr>
+          <p:style>
+            <a:lnRef idx="1">
+              <a:schemeClr val="accent1"/>
+            </a:lnRef>
+            <a:fillRef idx="3">
+              <a:schemeClr val="accent1"/>
+            </a:fillRef>
+            <a:effectRef idx="2">
+              <a:schemeClr val="accent1"/>
+            </a:effectRef>
+            <a:fontRef idx="minor">
+              <a:schemeClr val="lt1"/>
+            </a:fontRef>
+          </p:style>
+          <p:txBody>
+            <a:bodyPr rtlCol="0" anchor="ctr"/>
+            <a:lstStyle/>
+            <a:p>
+              <a:pPr algn="ctr"/>
+            </a:p>
+          </p:txBody>
+        </p:sp>
+        <p:sp>
+          <p:nvSpPr>
+            <p:cNvPr id="30" name="Wave 29"/>
+            <p:cNvSpPr/>
+            <p:nvPr/>
+          </p:nvSpPr>
+          <p:spPr>
+            <a:xfrm rot="5400000">
+              <a:off x="9567862" y="11115675"/>
+              <a:ext cx="85725" cy="342900"/>
+            </a:xfrm>
+            <a:prstGeom prst="wave">
+              <a:avLst/>
+            </a:prstGeom>
+            <a:solidFill>
+              <a:srgbClr val="D8D2C4"/>
+            </a:solidFill>
+            <a:ln>
+              <a:noFill/>
+            </a:ln>
+            <a:effectLst/>
+          </p:spPr>
+          <p:style>
+            <a:lnRef idx="1">
+              <a:schemeClr val="accent1"/>
+            </a:lnRef>
+            <a:fillRef idx="3">
+              <a:schemeClr val="accent1"/>
+            </a:fillRef>
+            <a:effectRef idx="2">
+              <a:schemeClr val="accent1"/>
+            </a:effectRef>
+            <a:fontRef idx="minor">
+              <a:schemeClr val="lt1"/>
+            </a:fontRef>
+          </p:style>
+          <p:txBody>
+            <a:bodyPr rtlCol="0" anchor="ctr"/>
+            <a:lstStyle/>
+            <a:p>
+              <a:pPr algn="ctr"/>
+            </a:p>
+          </p:txBody>
+        </p:sp>
       </p:grpSp>
     </p:spTree>
   </p:cSld>
@@ -6626,6 +8438,695 @@
           </p:spPr>
         </p:pic>
       </p:grpSp>
+      <p:sp>
+        <p:nvSpPr>
+          <p:cNvPr id="18" name="Rectangle 17"/>
+          <p:cNvSpPr/>
+          <p:nvPr/>
+        </p:nvSpPr>
+        <p:spPr>
+          <a:xfrm rot="19680000">
+            <a:off x="619125" y="523875"/>
+            <a:ext cx="1619250" cy="476250"/>
+          </a:xfrm>
+          <a:prstGeom prst="rect">
+            <a:avLst/>
+          </a:prstGeom>
+          <a:solidFill>
+            <a:srgbClr val="DBE6A7">
+              <a:alpha val="70000"/>
+            </a:srgbClr>
+          </a:solidFill>
+          <a:ln>
+            <a:noFill/>
+          </a:ln>
+          <a:effectLst/>
+        </p:spPr>
+        <p:style>
+          <a:lnRef idx="1">
+            <a:schemeClr val="accent1"/>
+          </a:lnRef>
+          <a:fillRef idx="3">
+            <a:schemeClr val="accent1"/>
+          </a:fillRef>
+          <a:effectRef idx="2">
+            <a:schemeClr val="accent1"/>
+          </a:effectRef>
+          <a:fontRef idx="minor">
+            <a:schemeClr val="lt1"/>
+          </a:fontRef>
+        </p:style>
+        <p:txBody>
+          <a:bodyPr rtlCol="0" anchor="ctr"/>
+          <a:lstStyle/>
+          <a:p>
+            <a:pPr algn="ctr"/>
+          </a:p>
+        </p:txBody>
+      </p:sp>
+      <p:sp>
+        <p:nvSpPr>
+          <p:cNvPr id="19" name="Rectangle 18"/>
+          <p:cNvSpPr/>
+          <p:nvPr/>
+        </p:nvSpPr>
+        <p:spPr>
+          <a:xfrm rot="2160000">
+            <a:off x="8239125" y="952500"/>
+            <a:ext cx="1619250" cy="476250"/>
+          </a:xfrm>
+          <a:prstGeom prst="rect">
+            <a:avLst/>
+          </a:prstGeom>
+          <a:solidFill>
+            <a:srgbClr val="DBE6A7">
+              <a:alpha val="70000"/>
+            </a:srgbClr>
+          </a:solidFill>
+          <a:ln>
+            <a:noFill/>
+          </a:ln>
+          <a:effectLst/>
+        </p:spPr>
+        <p:style>
+          <a:lnRef idx="1">
+            <a:schemeClr val="accent1"/>
+          </a:lnRef>
+          <a:fillRef idx="3">
+            <a:schemeClr val="accent1"/>
+          </a:fillRef>
+          <a:effectRef idx="2">
+            <a:schemeClr val="accent1"/>
+          </a:effectRef>
+          <a:fontRef idx="minor">
+            <a:schemeClr val="lt1"/>
+          </a:fontRef>
+        </p:style>
+        <p:txBody>
+          <a:bodyPr rtlCol="0" anchor="ctr"/>
+          <a:lstStyle/>
+          <a:p>
+            <a:pPr algn="ctr"/>
+          </a:p>
+        </p:txBody>
+      </p:sp>
+      <p:grpSp>
+        <p:nvGrpSpPr>
+          <p:cNvPr id="20" name="Group 19"/>
+          <p:cNvGrpSpPr/>
+          <p:nvPr/>
+        </p:nvGrpSpPr>
+        <p:grpSpPr>
+          <a:xfrm rot="1800000">
+            <a:off x="0" y="0"/>
+            <a:ext cx="9867900" cy="12477750"/>
+            <a:chOff x="0" y="0"/>
+            <a:chExt cx="9867900" cy="12477750"/>
+          </a:xfrm>
+        </p:grpSpPr>
+        <p:sp>
+          <p:nvSpPr>
+            <p:cNvPr id="21" name="Rectangle 20"/>
+            <p:cNvSpPr/>
+            <p:nvPr/>
+          </p:nvSpPr>
+          <p:spPr>
+            <a:xfrm rot="1500000">
+              <a:off x="8997846" y="11878071"/>
+              <a:ext cx="171450" cy="38100"/>
+            </a:xfrm>
+            <a:prstGeom prst="rect">
+              <a:avLst/>
+            </a:prstGeom>
+            <a:solidFill>
+              <a:srgbClr val="22371F"/>
+            </a:solidFill>
+            <a:ln>
+              <a:noFill/>
+            </a:ln>
+            <a:effectLst/>
+          </p:spPr>
+          <p:style>
+            <a:lnRef idx="1">
+              <a:schemeClr val="accent1"/>
+            </a:lnRef>
+            <a:fillRef idx="3">
+              <a:schemeClr val="accent1"/>
+            </a:fillRef>
+            <a:effectRef idx="2">
+              <a:schemeClr val="accent1"/>
+            </a:effectRef>
+            <a:fontRef idx="minor">
+              <a:schemeClr val="lt1"/>
+            </a:fontRef>
+          </p:style>
+          <p:txBody>
+            <a:bodyPr rtlCol="0" anchor="ctr"/>
+            <a:lstStyle/>
+            <a:p>
+              <a:pPr algn="ctr"/>
+            </a:p>
+          </p:txBody>
+        </p:sp>
+        <p:sp>
+          <p:nvSpPr>
+            <p:cNvPr id="22" name="Rectangle 21"/>
+            <p:cNvSpPr/>
+            <p:nvPr/>
+          </p:nvSpPr>
+          <p:spPr>
+            <a:xfrm>
+              <a:off x="8991600" y="12077700"/>
+              <a:ext cx="171450" cy="38100"/>
+            </a:xfrm>
+            <a:prstGeom prst="rect">
+              <a:avLst/>
+            </a:prstGeom>
+            <a:solidFill>
+              <a:srgbClr val="22371F"/>
+            </a:solidFill>
+            <a:ln>
+              <a:noFill/>
+            </a:ln>
+            <a:effectLst/>
+          </p:spPr>
+          <p:style>
+            <a:lnRef idx="1">
+              <a:schemeClr val="accent1"/>
+            </a:lnRef>
+            <a:fillRef idx="3">
+              <a:schemeClr val="accent1"/>
+            </a:fillRef>
+            <a:effectRef idx="2">
+              <a:schemeClr val="accent1"/>
+            </a:effectRef>
+            <a:fontRef idx="minor">
+              <a:schemeClr val="lt1"/>
+            </a:fontRef>
+          </p:style>
+          <p:txBody>
+            <a:bodyPr rtlCol="0" anchor="ctr"/>
+            <a:lstStyle/>
+            <a:p>
+              <a:pPr algn="ctr"/>
+            </a:p>
+          </p:txBody>
+        </p:sp>
+        <p:sp>
+          <p:nvSpPr>
+            <p:cNvPr id="23" name="Rectangle 22"/>
+            <p:cNvSpPr/>
+            <p:nvPr/>
+          </p:nvSpPr>
+          <p:spPr>
+            <a:xfrm rot="20100000">
+              <a:off x="8997846" y="12277328"/>
+              <a:ext cx="171450" cy="38100"/>
+            </a:xfrm>
+            <a:prstGeom prst="rect">
+              <a:avLst/>
+            </a:prstGeom>
+            <a:solidFill>
+              <a:srgbClr val="22371F"/>
+            </a:solidFill>
+            <a:ln>
+              <a:noFill/>
+            </a:ln>
+            <a:effectLst/>
+          </p:spPr>
+          <p:style>
+            <a:lnRef idx="1">
+              <a:schemeClr val="accent1"/>
+            </a:lnRef>
+            <a:fillRef idx="3">
+              <a:schemeClr val="accent1"/>
+            </a:fillRef>
+            <a:effectRef idx="2">
+              <a:schemeClr val="accent1"/>
+            </a:effectRef>
+            <a:fontRef idx="minor">
+              <a:schemeClr val="lt1"/>
+            </a:fontRef>
+          </p:style>
+          <p:txBody>
+            <a:bodyPr rtlCol="0" anchor="ctr"/>
+            <a:lstStyle/>
+            <a:p>
+              <a:pPr algn="ctr"/>
+            </a:p>
+          </p:txBody>
+        </p:sp>
+        <p:sp>
+          <p:nvSpPr>
+            <p:cNvPr id="24" name="Rectangle 23"/>
+            <p:cNvSpPr/>
+            <p:nvPr/>
+          </p:nvSpPr>
+          <p:spPr>
+            <a:xfrm rot="20100000">
+              <a:off x="9690203" y="11878071"/>
+              <a:ext cx="171450" cy="38100"/>
+            </a:xfrm>
+            <a:prstGeom prst="rect">
+              <a:avLst/>
+            </a:prstGeom>
+            <a:solidFill>
+              <a:srgbClr val="22371F"/>
+            </a:solidFill>
+            <a:ln>
+              <a:noFill/>
+            </a:ln>
+            <a:effectLst/>
+          </p:spPr>
+          <p:style>
+            <a:lnRef idx="1">
+              <a:schemeClr val="accent1"/>
+            </a:lnRef>
+            <a:fillRef idx="3">
+              <a:schemeClr val="accent1"/>
+            </a:fillRef>
+            <a:effectRef idx="2">
+              <a:schemeClr val="accent1"/>
+            </a:effectRef>
+            <a:fontRef idx="minor">
+              <a:schemeClr val="lt1"/>
+            </a:fontRef>
+          </p:style>
+          <p:txBody>
+            <a:bodyPr rtlCol="0" anchor="ctr"/>
+            <a:lstStyle/>
+            <a:p>
+              <a:pPr algn="ctr"/>
+            </a:p>
+          </p:txBody>
+        </p:sp>
+        <p:sp>
+          <p:nvSpPr>
+            <p:cNvPr id="25" name="Rectangle 24"/>
+            <p:cNvSpPr/>
+            <p:nvPr/>
+          </p:nvSpPr>
+          <p:spPr>
+            <a:xfrm>
+              <a:off x="9696450" y="12077700"/>
+              <a:ext cx="171450" cy="38100"/>
+            </a:xfrm>
+            <a:prstGeom prst="rect">
+              <a:avLst/>
+            </a:prstGeom>
+            <a:solidFill>
+              <a:srgbClr val="22371F"/>
+            </a:solidFill>
+            <a:ln>
+              <a:noFill/>
+            </a:ln>
+            <a:effectLst/>
+          </p:spPr>
+          <p:style>
+            <a:lnRef idx="1">
+              <a:schemeClr val="accent1"/>
+            </a:lnRef>
+            <a:fillRef idx="3">
+              <a:schemeClr val="accent1"/>
+            </a:fillRef>
+            <a:effectRef idx="2">
+              <a:schemeClr val="accent1"/>
+            </a:effectRef>
+            <a:fontRef idx="minor">
+              <a:schemeClr val="lt1"/>
+            </a:fontRef>
+          </p:style>
+          <p:txBody>
+            <a:bodyPr rtlCol="0" anchor="ctr"/>
+            <a:lstStyle/>
+            <a:p>
+              <a:pPr algn="ctr"/>
+            </a:p>
+          </p:txBody>
+        </p:sp>
+        <p:sp>
+          <p:nvSpPr>
+            <p:cNvPr id="26" name="Rectangle 25"/>
+            <p:cNvSpPr/>
+            <p:nvPr/>
+          </p:nvSpPr>
+          <p:spPr>
+            <a:xfrm rot="1500000">
+              <a:off x="9690203" y="12277328"/>
+              <a:ext cx="171450" cy="38100"/>
+            </a:xfrm>
+            <a:prstGeom prst="rect">
+              <a:avLst/>
+            </a:prstGeom>
+            <a:solidFill>
+              <a:srgbClr val="22371F"/>
+            </a:solidFill>
+            <a:ln>
+              <a:noFill/>
+            </a:ln>
+            <a:effectLst/>
+          </p:spPr>
+          <p:style>
+            <a:lnRef idx="1">
+              <a:schemeClr val="accent1"/>
+            </a:lnRef>
+            <a:fillRef idx="3">
+              <a:schemeClr val="accent1"/>
+            </a:fillRef>
+            <a:effectRef idx="2">
+              <a:schemeClr val="accent1"/>
+            </a:effectRef>
+            <a:fontRef idx="minor">
+              <a:schemeClr val="lt1"/>
+            </a:fontRef>
+          </p:style>
+          <p:txBody>
+            <a:bodyPr rtlCol="0" anchor="ctr"/>
+            <a:lstStyle/>
+            <a:p>
+              <a:pPr algn="ctr"/>
+            </a:p>
+          </p:txBody>
+        </p:sp>
+        <p:sp>
+          <p:nvSpPr>
+            <p:cNvPr id="27" name="Oval 26"/>
+            <p:cNvSpPr/>
+            <p:nvPr/>
+          </p:nvSpPr>
+          <p:spPr>
+            <a:xfrm>
+              <a:off x="9296400" y="11506200"/>
+              <a:ext cx="266700" cy="228600"/>
+            </a:xfrm>
+            <a:prstGeom prst="ellipse">
+              <a:avLst/>
+            </a:prstGeom>
+            <a:solidFill>
+              <a:srgbClr val="22371F"/>
+            </a:solidFill>
+            <a:ln w="57150">
+              <a:solidFill>
+                <a:srgbClr val="FFFFFF"/>
+              </a:solidFill>
+            </a:ln>
+            <a:effectLst/>
+          </p:spPr>
+          <p:style>
+            <a:lnRef idx="1">
+              <a:schemeClr val="accent1"/>
+            </a:lnRef>
+            <a:fillRef idx="3">
+              <a:schemeClr val="accent1"/>
+            </a:fillRef>
+            <a:effectRef idx="2">
+              <a:schemeClr val="accent1"/>
+            </a:effectRef>
+            <a:fontRef idx="minor">
+              <a:schemeClr val="lt1"/>
+            </a:fontRef>
+          </p:style>
+          <p:txBody>
+            <a:bodyPr rtlCol="0" anchor="ctr"/>
+            <a:lstStyle/>
+            <a:p>
+              <a:pPr algn="ctr"/>
+            </a:p>
+          </p:txBody>
+        </p:sp>
+        <p:sp>
+          <p:nvSpPr>
+            <p:cNvPr id="28" name="Oval 27"/>
+            <p:cNvSpPr/>
+            <p:nvPr/>
+          </p:nvSpPr>
+          <p:spPr>
+            <a:xfrm>
+              <a:off x="9144000" y="11668125"/>
+              <a:ext cx="571500" cy="809625"/>
+            </a:xfrm>
+            <a:prstGeom prst="ellipse">
+              <a:avLst/>
+            </a:prstGeom>
+            <a:solidFill>
+              <a:srgbClr val="2F4A3A"/>
+            </a:solidFill>
+            <a:ln w="57150">
+              <a:solidFill>
+                <a:srgbClr val="FFFFFF"/>
+              </a:solidFill>
+            </a:ln>
+            <a:effectLst>
+              <a:outerShdw blurRad="228600" dist="76200" dir="5400000" algn="t" rotWithShape="0">
+                <a:srgbClr val="000000">
+                  <a:alpha val="30000"/>
+                </a:srgbClr>
+              </a:outerShdw>
+            </a:effectLst>
+          </p:spPr>
+          <p:style>
+            <a:lnRef idx="1">
+              <a:schemeClr val="accent1"/>
+            </a:lnRef>
+            <a:fillRef idx="3">
+              <a:schemeClr val="accent1"/>
+            </a:fillRef>
+            <a:effectRef idx="2">
+              <a:schemeClr val="accent1"/>
+            </a:effectRef>
+            <a:fontRef idx="minor">
+              <a:schemeClr val="lt1"/>
+            </a:fontRef>
+          </p:style>
+          <p:txBody>
+            <a:bodyPr rtlCol="0" anchor="ctr"/>
+            <a:lstStyle/>
+            <a:p>
+              <a:pPr algn="ctr"/>
+            </a:p>
+          </p:txBody>
+        </p:sp>
+        <p:sp>
+          <p:nvSpPr>
+            <p:cNvPr id="29" name="Rectangle 28"/>
+            <p:cNvSpPr/>
+            <p:nvPr/>
+          </p:nvSpPr>
+          <p:spPr>
+            <a:xfrm>
+              <a:off x="9410700" y="11696700"/>
+              <a:ext cx="38100" cy="762000"/>
+            </a:xfrm>
+            <a:prstGeom prst="rect">
+              <a:avLst/>
+            </a:prstGeom>
+            <a:solidFill>
+              <a:srgbClr val="FFFFFF"/>
+            </a:solidFill>
+            <a:ln>
+              <a:noFill/>
+            </a:ln>
+            <a:effectLst/>
+          </p:spPr>
+          <p:style>
+            <a:lnRef idx="1">
+              <a:schemeClr val="accent1"/>
+            </a:lnRef>
+            <a:fillRef idx="3">
+              <a:schemeClr val="accent1"/>
+            </a:fillRef>
+            <a:effectRef idx="2">
+              <a:schemeClr val="accent1"/>
+            </a:effectRef>
+            <a:fontRef idx="minor">
+              <a:schemeClr val="lt1"/>
+            </a:fontRef>
+          </p:style>
+          <p:txBody>
+            <a:bodyPr rtlCol="0" anchor="ctr"/>
+            <a:lstStyle/>
+            <a:p>
+              <a:pPr algn="ctr"/>
+            </a:p>
+          </p:txBody>
+        </p:sp>
+        <p:sp>
+          <p:nvSpPr>
+            <p:cNvPr id="30" name="Oval 29"/>
+            <p:cNvSpPr/>
+            <p:nvPr/>
+          </p:nvSpPr>
+          <p:spPr>
+            <a:xfrm>
+              <a:off x="9258300" y="11915775"/>
+              <a:ext cx="76200" cy="76200"/>
+            </a:xfrm>
+            <a:prstGeom prst="ellipse">
+              <a:avLst/>
+            </a:prstGeom>
+            <a:solidFill>
+              <a:srgbClr val="DBE6A7"/>
+            </a:solidFill>
+            <a:ln>
+              <a:noFill/>
+            </a:ln>
+            <a:effectLst/>
+          </p:spPr>
+          <p:style>
+            <a:lnRef idx="1">
+              <a:schemeClr val="accent1"/>
+            </a:lnRef>
+            <a:fillRef idx="3">
+              <a:schemeClr val="accent1"/>
+            </a:fillRef>
+            <a:effectRef idx="2">
+              <a:schemeClr val="accent1"/>
+            </a:effectRef>
+            <a:fontRef idx="minor">
+              <a:schemeClr val="lt1"/>
+            </a:fontRef>
+          </p:style>
+          <p:txBody>
+            <a:bodyPr rtlCol="0" anchor="ctr"/>
+            <a:lstStyle/>
+            <a:p>
+              <a:pPr algn="ctr"/>
+            </a:p>
+          </p:txBody>
+        </p:sp>
+        <p:sp>
+          <p:nvSpPr>
+            <p:cNvPr id="31" name="Oval 30"/>
+            <p:cNvSpPr/>
+            <p:nvPr/>
+          </p:nvSpPr>
+          <p:spPr>
+            <a:xfrm>
+              <a:off x="9525000" y="12011025"/>
+              <a:ext cx="76200" cy="76200"/>
+            </a:xfrm>
+            <a:prstGeom prst="ellipse">
+              <a:avLst/>
+            </a:prstGeom>
+            <a:solidFill>
+              <a:srgbClr val="DBE6A7"/>
+            </a:solidFill>
+            <a:ln>
+              <a:noFill/>
+            </a:ln>
+            <a:effectLst/>
+          </p:spPr>
+          <p:style>
+            <a:lnRef idx="1">
+              <a:schemeClr val="accent1"/>
+            </a:lnRef>
+            <a:fillRef idx="3">
+              <a:schemeClr val="accent1"/>
+            </a:fillRef>
+            <a:effectRef idx="2">
+              <a:schemeClr val="accent1"/>
+            </a:effectRef>
+            <a:fontRef idx="minor">
+              <a:schemeClr val="lt1"/>
+            </a:fontRef>
+          </p:style>
+          <p:txBody>
+            <a:bodyPr rtlCol="0" anchor="ctr"/>
+            <a:lstStyle/>
+            <a:p>
+              <a:pPr algn="ctr"/>
+            </a:p>
+          </p:txBody>
+        </p:sp>
+        <p:sp>
+          <p:nvSpPr>
+            <p:cNvPr id="32" name="Oval 31"/>
+            <p:cNvSpPr/>
+            <p:nvPr/>
+          </p:nvSpPr>
+          <p:spPr>
+            <a:xfrm>
+              <a:off x="9277350" y="12201525"/>
+              <a:ext cx="76200" cy="76200"/>
+            </a:xfrm>
+            <a:prstGeom prst="ellipse">
+              <a:avLst/>
+            </a:prstGeom>
+            <a:solidFill>
+              <a:srgbClr val="DBE6A7"/>
+            </a:solidFill>
+            <a:ln>
+              <a:noFill/>
+            </a:ln>
+            <a:effectLst/>
+          </p:spPr>
+          <p:style>
+            <a:lnRef idx="1">
+              <a:schemeClr val="accent1"/>
+            </a:lnRef>
+            <a:fillRef idx="3">
+              <a:schemeClr val="accent1"/>
+            </a:fillRef>
+            <a:effectRef idx="2">
+              <a:schemeClr val="accent1"/>
+            </a:effectRef>
+            <a:fontRef idx="minor">
+              <a:schemeClr val="lt1"/>
+            </a:fontRef>
+          </p:style>
+          <p:txBody>
+            <a:bodyPr rtlCol="0" anchor="ctr"/>
+            <a:lstStyle/>
+            <a:p>
+              <a:pPr algn="ctr"/>
+            </a:p>
+          </p:txBody>
+        </p:sp>
+        <p:sp>
+          <p:nvSpPr>
+            <p:cNvPr id="33" name="Oval 32"/>
+            <p:cNvSpPr/>
+            <p:nvPr/>
+          </p:nvSpPr>
+          <p:spPr>
+            <a:xfrm>
+              <a:off x="9505950" y="12268200"/>
+              <a:ext cx="76200" cy="76200"/>
+            </a:xfrm>
+            <a:prstGeom prst="ellipse">
+              <a:avLst/>
+            </a:prstGeom>
+            <a:solidFill>
+              <a:srgbClr val="DBE6A7"/>
+            </a:solidFill>
+            <a:ln>
+              <a:noFill/>
+            </a:ln>
+            <a:effectLst/>
+          </p:spPr>
+          <p:style>
+            <a:lnRef idx="1">
+              <a:schemeClr val="accent1"/>
+            </a:lnRef>
+            <a:fillRef idx="3">
+              <a:schemeClr val="accent1"/>
+            </a:fillRef>
+            <a:effectRef idx="2">
+              <a:schemeClr val="accent1"/>
+            </a:effectRef>
+            <a:fontRef idx="minor">
+              <a:schemeClr val="lt1"/>
+            </a:fontRef>
+          </p:style>
+          <p:txBody>
+            <a:bodyPr rtlCol="0" anchor="ctr"/>
+            <a:lstStyle/>
+            <a:p>
+              <a:pPr algn="ctr"/>
+            </a:p>
+          </p:txBody>
+        </p:sp>
+      </p:grpSp>
     </p:spTree>
   </p:cSld>
   <p:clrMapOvr>
@@ -7247,6 +9748,122 @@
           </p:spPr>
         </p:pic>
       </p:grpSp>
+      <p:sp>
+        <p:nvSpPr>
+          <p:cNvPr id="18" name="Rectangle 17"/>
+          <p:cNvSpPr/>
+          <p:nvPr/>
+        </p:nvSpPr>
+        <p:spPr>
+          <a:xfrm rot="19680000">
+            <a:off x="619125" y="523875"/>
+            <a:ext cx="1619250" cy="476250"/>
+          </a:xfrm>
+          <a:prstGeom prst="rect">
+            <a:avLst/>
+          </a:prstGeom>
+          <a:solidFill>
+            <a:srgbClr val="DBE6A7">
+              <a:alpha val="70000"/>
+            </a:srgbClr>
+          </a:solidFill>
+          <a:ln>
+            <a:noFill/>
+          </a:ln>
+          <a:effectLst/>
+        </p:spPr>
+        <p:style>
+          <a:lnRef idx="1">
+            <a:schemeClr val="accent1"/>
+          </a:lnRef>
+          <a:fillRef idx="3">
+            <a:schemeClr val="accent1"/>
+          </a:fillRef>
+          <a:effectRef idx="2">
+            <a:schemeClr val="accent1"/>
+          </a:effectRef>
+          <a:fontRef idx="minor">
+            <a:schemeClr val="lt1"/>
+          </a:fontRef>
+        </p:style>
+        <p:txBody>
+          <a:bodyPr rtlCol="0" anchor="ctr"/>
+          <a:lstStyle/>
+          <a:p>
+            <a:pPr algn="ctr"/>
+          </a:p>
+        </p:txBody>
+      </p:sp>
+      <p:sp>
+        <p:nvSpPr>
+          <p:cNvPr id="19" name="Rectangle 18"/>
+          <p:cNvSpPr/>
+          <p:nvPr/>
+        </p:nvSpPr>
+        <p:spPr>
+          <a:xfrm rot="2160000">
+            <a:off x="8239125" y="952500"/>
+            <a:ext cx="1619250" cy="476250"/>
+          </a:xfrm>
+          <a:prstGeom prst="rect">
+            <a:avLst/>
+          </a:prstGeom>
+          <a:solidFill>
+            <a:srgbClr val="DBE6A7">
+              <a:alpha val="70000"/>
+            </a:srgbClr>
+          </a:solidFill>
+          <a:ln>
+            <a:noFill/>
+          </a:ln>
+          <a:effectLst/>
+        </p:spPr>
+        <p:style>
+          <a:lnRef idx="1">
+            <a:schemeClr val="accent1"/>
+          </a:lnRef>
+          <a:fillRef idx="3">
+            <a:schemeClr val="accent1"/>
+          </a:fillRef>
+          <a:effectRef idx="2">
+            <a:schemeClr val="accent1"/>
+          </a:effectRef>
+          <a:fontRef idx="minor">
+            <a:schemeClr val="lt1"/>
+          </a:fontRef>
+        </p:style>
+        <p:txBody>
+          <a:bodyPr rtlCol="0" anchor="ctr"/>
+          <a:lstStyle/>
+          <a:p>
+            <a:pPr algn="ctr"/>
+          </a:p>
+        </p:txBody>
+      </p:sp>
+      <p:pic>
+        <p:nvPicPr>
+          <p:cNvPr id="20" name="Picture 19" descr="trim-dried-flowers-2-1.png"/>
+          <p:cNvPicPr>
+            <a:picLocks noChangeAspect="1"/>
+          </p:cNvPicPr>
+          <p:nvPr/>
+        </p:nvPicPr>
+        <p:blipFill>
+          <a:blip r:embed="rId4"/>
+          <a:stretch>
+            <a:fillRect/>
+          </a:stretch>
+        </p:blipFill>
+        <p:spPr>
+          <a:xfrm rot="1440000">
+            <a:off x="8810625" y="10830254"/>
+            <a:ext cx="1428750" cy="2151991"/>
+          </a:xfrm>
+          <a:prstGeom prst="rect">
+            <a:avLst/>
+          </a:prstGeom>
+        </p:spPr>
+      </p:pic>
     </p:spTree>
   </p:cSld>
   <p:clrMapOvr>
@@ -7341,7 +9958,7 @@
         </p:sp>
         <p:pic>
           <p:nvPicPr>
-            <p:cNvPr id="4" name="Picture 3" descr="5684526537729628308.jpg"/>
+            <p:cNvPr id="4" name="Picture 3" descr="4466978079890479619.jpg"/>
             <p:cNvPicPr>
               <a:picLocks noChangeAspect="1"/>
             </p:cNvPicPr>
@@ -7818,6 +10435,479 @@
             </a:prstGeom>
           </p:spPr>
         </p:pic>
+      </p:grpSp>
+      <p:sp>
+        <p:nvSpPr>
+          <p:cNvPr id="17" name="Rectangle 16"/>
+          <p:cNvSpPr/>
+          <p:nvPr/>
+        </p:nvSpPr>
+        <p:spPr>
+          <a:xfrm rot="19680000">
+            <a:off x="619125" y="523875"/>
+            <a:ext cx="1619250" cy="476250"/>
+          </a:xfrm>
+          <a:prstGeom prst="rect">
+            <a:avLst/>
+          </a:prstGeom>
+          <a:solidFill>
+            <a:srgbClr val="DBE6A7">
+              <a:alpha val="70000"/>
+            </a:srgbClr>
+          </a:solidFill>
+          <a:ln>
+            <a:noFill/>
+          </a:ln>
+          <a:effectLst/>
+        </p:spPr>
+        <p:style>
+          <a:lnRef idx="1">
+            <a:schemeClr val="accent1"/>
+          </a:lnRef>
+          <a:fillRef idx="3">
+            <a:schemeClr val="accent1"/>
+          </a:fillRef>
+          <a:effectRef idx="2">
+            <a:schemeClr val="accent1"/>
+          </a:effectRef>
+          <a:fontRef idx="minor">
+            <a:schemeClr val="lt1"/>
+          </a:fontRef>
+        </p:style>
+        <p:txBody>
+          <a:bodyPr rtlCol="0" anchor="ctr"/>
+          <a:lstStyle/>
+          <a:p>
+            <a:pPr algn="ctr"/>
+          </a:p>
+        </p:txBody>
+      </p:sp>
+      <p:sp>
+        <p:nvSpPr>
+          <p:cNvPr id="18" name="Rectangle 17"/>
+          <p:cNvSpPr/>
+          <p:nvPr/>
+        </p:nvSpPr>
+        <p:spPr>
+          <a:xfrm rot="2160000">
+            <a:off x="8239125" y="952500"/>
+            <a:ext cx="1619250" cy="476250"/>
+          </a:xfrm>
+          <a:prstGeom prst="rect">
+            <a:avLst/>
+          </a:prstGeom>
+          <a:solidFill>
+            <a:srgbClr val="DBE6A7">
+              <a:alpha val="70000"/>
+            </a:srgbClr>
+          </a:solidFill>
+          <a:ln>
+            <a:noFill/>
+          </a:ln>
+          <a:effectLst/>
+        </p:spPr>
+        <p:style>
+          <a:lnRef idx="1">
+            <a:schemeClr val="accent1"/>
+          </a:lnRef>
+          <a:fillRef idx="3">
+            <a:schemeClr val="accent1"/>
+          </a:fillRef>
+          <a:effectRef idx="2">
+            <a:schemeClr val="accent1"/>
+          </a:effectRef>
+          <a:fontRef idx="minor">
+            <a:schemeClr val="lt1"/>
+          </a:fontRef>
+        </p:style>
+        <p:txBody>
+          <a:bodyPr rtlCol="0" anchor="ctr"/>
+          <a:lstStyle/>
+          <a:p>
+            <a:pPr algn="ctr"/>
+          </a:p>
+        </p:txBody>
+      </p:sp>
+      <p:grpSp>
+        <p:nvGrpSpPr>
+          <p:cNvPr id="19" name="Group 18"/>
+          <p:cNvGrpSpPr/>
+          <p:nvPr/>
+        </p:nvGrpSpPr>
+        <p:grpSpPr>
+          <a:xfrm rot="360000">
+            <a:off x="0" y="0"/>
+            <a:ext cx="10072687" cy="12382499"/>
+            <a:chOff x="0" y="0"/>
+            <a:chExt cx="10072687" cy="12382499"/>
+          </a:xfrm>
+        </p:grpSpPr>
+        <p:sp>
+          <p:nvSpPr>
+            <p:cNvPr id="20" name="Rounded Rectangle 19"/>
+            <p:cNvSpPr/>
+            <p:nvPr/>
+          </p:nvSpPr>
+          <p:spPr>
+            <a:xfrm>
+              <a:off x="9229725" y="11596687"/>
+              <a:ext cx="400050" cy="785812"/>
+            </a:xfrm>
+            <a:prstGeom prst="roundRect">
+              <a:avLst/>
+            </a:prstGeom>
+            <a:solidFill>
+              <a:srgbClr val="FFFDF7"/>
+            </a:solidFill>
+            <a:ln w="57150">
+              <a:solidFill>
+                <a:srgbClr val="FFFFFF"/>
+              </a:solidFill>
+            </a:ln>
+            <a:effectLst>
+              <a:outerShdw blurRad="228600" dist="76200" dir="5400000" algn="t" rotWithShape="0">
+                <a:srgbClr val="000000">
+                  <a:alpha val="30000"/>
+                </a:srgbClr>
+              </a:outerShdw>
+            </a:effectLst>
+          </p:spPr>
+          <p:style>
+            <a:lnRef idx="1">
+              <a:schemeClr val="accent1"/>
+            </a:lnRef>
+            <a:fillRef idx="3">
+              <a:schemeClr val="accent1"/>
+            </a:fillRef>
+            <a:effectRef idx="2">
+              <a:schemeClr val="accent1"/>
+            </a:effectRef>
+            <a:fontRef idx="minor">
+              <a:schemeClr val="lt1"/>
+            </a:fontRef>
+          </p:style>
+          <p:txBody>
+            <a:bodyPr rtlCol="0" anchor="ctr"/>
+            <a:lstStyle/>
+            <a:p>
+              <a:pPr algn="ctr"/>
+            </a:p>
+          </p:txBody>
+        </p:sp>
+        <p:sp>
+          <p:nvSpPr>
+            <p:cNvPr id="21" name="Chord 20"/>
+            <p:cNvSpPr/>
+            <p:nvPr/>
+          </p:nvSpPr>
+          <p:spPr>
+            <a:xfrm>
+              <a:off x="8786812" y="11025187"/>
+              <a:ext cx="1285875" cy="1143000"/>
+            </a:xfrm>
+            <a:prstGeom prst="chord">
+              <a:avLst/>
+            </a:prstGeom>
+            <a:solidFill>
+              <a:srgbClr val="B98A5E"/>
+            </a:solidFill>
+            <a:ln w="57150">
+              <a:solidFill>
+                <a:srgbClr val="FFFFFF"/>
+              </a:solidFill>
+            </a:ln>
+            <a:effectLst/>
+          </p:spPr>
+          <p:style>
+            <a:lnRef idx="1">
+              <a:schemeClr val="accent1"/>
+            </a:lnRef>
+            <a:fillRef idx="3">
+              <a:schemeClr val="accent1"/>
+            </a:fillRef>
+            <a:effectRef idx="2">
+              <a:schemeClr val="accent1"/>
+            </a:effectRef>
+            <a:fontRef idx="minor">
+              <a:schemeClr val="lt1"/>
+            </a:fontRef>
+          </p:style>
+          <p:txBody>
+            <a:bodyPr rtlCol="0" anchor="ctr"/>
+            <a:lstStyle/>
+            <a:p>
+              <a:pPr algn="ctr"/>
+            </a:p>
+          </p:txBody>
+        </p:sp>
+        <p:sp>
+          <p:nvSpPr>
+            <p:cNvPr id="22" name="Oval 21"/>
+            <p:cNvSpPr/>
+            <p:nvPr/>
+          </p:nvSpPr>
+          <p:spPr>
+            <a:xfrm>
+              <a:off x="9072562" y="11210925"/>
+              <a:ext cx="142875" cy="114300"/>
+            </a:xfrm>
+            <a:prstGeom prst="ellipse">
+              <a:avLst/>
+            </a:prstGeom>
+            <a:solidFill>
+              <a:srgbClr val="FFFDF7"/>
+            </a:solidFill>
+            <a:ln>
+              <a:noFill/>
+            </a:ln>
+            <a:effectLst/>
+          </p:spPr>
+          <p:style>
+            <a:lnRef idx="1">
+              <a:schemeClr val="accent1"/>
+            </a:lnRef>
+            <a:fillRef idx="3">
+              <a:schemeClr val="accent1"/>
+            </a:fillRef>
+            <a:effectRef idx="2">
+              <a:schemeClr val="accent1"/>
+            </a:effectRef>
+            <a:fontRef idx="minor">
+              <a:schemeClr val="lt1"/>
+            </a:fontRef>
+          </p:style>
+          <p:txBody>
+            <a:bodyPr rtlCol="0" anchor="ctr"/>
+            <a:lstStyle/>
+            <a:p>
+              <a:pPr algn="ctr"/>
+            </a:p>
+          </p:txBody>
+        </p:sp>
+        <p:sp>
+          <p:nvSpPr>
+            <p:cNvPr id="23" name="Oval 22"/>
+            <p:cNvSpPr/>
+            <p:nvPr/>
+          </p:nvSpPr>
+          <p:spPr>
+            <a:xfrm>
+              <a:off x="9529762" y="11125200"/>
+              <a:ext cx="142875" cy="114300"/>
+            </a:xfrm>
+            <a:prstGeom prst="ellipse">
+              <a:avLst/>
+            </a:prstGeom>
+            <a:solidFill>
+              <a:srgbClr val="FFFDF7"/>
+            </a:solidFill>
+            <a:ln>
+              <a:noFill/>
+            </a:ln>
+            <a:effectLst/>
+          </p:spPr>
+          <p:style>
+            <a:lnRef idx="1">
+              <a:schemeClr val="accent1"/>
+            </a:lnRef>
+            <a:fillRef idx="3">
+              <a:schemeClr val="accent1"/>
+            </a:fillRef>
+            <a:effectRef idx="2">
+              <a:schemeClr val="accent1"/>
+            </a:effectRef>
+            <a:fontRef idx="minor">
+              <a:schemeClr val="lt1"/>
+            </a:fontRef>
+          </p:style>
+          <p:txBody>
+            <a:bodyPr rtlCol="0" anchor="ctr"/>
+            <a:lstStyle/>
+            <a:p>
+              <a:pPr algn="ctr"/>
+            </a:p>
+          </p:txBody>
+        </p:sp>
+        <p:sp>
+          <p:nvSpPr>
+            <p:cNvPr id="24" name="Oval 23"/>
+            <p:cNvSpPr/>
+            <p:nvPr/>
+          </p:nvSpPr>
+          <p:spPr>
+            <a:xfrm>
+              <a:off x="9715500" y="11325225"/>
+              <a:ext cx="142875" cy="114300"/>
+            </a:xfrm>
+            <a:prstGeom prst="ellipse">
+              <a:avLst/>
+            </a:prstGeom>
+            <a:solidFill>
+              <a:srgbClr val="FFFDF7"/>
+            </a:solidFill>
+            <a:ln>
+              <a:noFill/>
+            </a:ln>
+            <a:effectLst/>
+          </p:spPr>
+          <p:style>
+            <a:lnRef idx="1">
+              <a:schemeClr val="accent1"/>
+            </a:lnRef>
+            <a:fillRef idx="3">
+              <a:schemeClr val="accent1"/>
+            </a:fillRef>
+            <a:effectRef idx="2">
+              <a:schemeClr val="accent1"/>
+            </a:effectRef>
+            <a:fontRef idx="minor">
+              <a:schemeClr val="lt1"/>
+            </a:fontRef>
+          </p:style>
+          <p:txBody>
+            <a:bodyPr rtlCol="0" anchor="ctr"/>
+            <a:lstStyle/>
+            <a:p>
+              <a:pPr algn="ctr"/>
+            </a:p>
+          </p:txBody>
+        </p:sp>
+        <p:sp>
+          <p:nvSpPr>
+            <p:cNvPr id="25" name="Oval 24"/>
+            <p:cNvSpPr/>
+            <p:nvPr/>
+          </p:nvSpPr>
+          <p:spPr>
+            <a:xfrm>
+              <a:off x="9336881" y="11937206"/>
+              <a:ext cx="33337" cy="33337"/>
+            </a:xfrm>
+            <a:prstGeom prst="ellipse">
+              <a:avLst/>
+            </a:prstGeom>
+            <a:solidFill>
+              <a:srgbClr val="4F3433"/>
+            </a:solidFill>
+            <a:ln>
+              <a:noFill/>
+            </a:ln>
+            <a:effectLst/>
+          </p:spPr>
+          <p:style>
+            <a:lnRef idx="1">
+              <a:schemeClr val="accent1"/>
+            </a:lnRef>
+            <a:fillRef idx="3">
+              <a:schemeClr val="accent1"/>
+            </a:fillRef>
+            <a:effectRef idx="2">
+              <a:schemeClr val="accent1"/>
+            </a:effectRef>
+            <a:fontRef idx="minor">
+              <a:schemeClr val="lt1"/>
+            </a:fontRef>
+          </p:style>
+          <p:txBody>
+            <a:bodyPr rtlCol="0" anchor="ctr"/>
+            <a:lstStyle/>
+            <a:p>
+              <a:pPr algn="ctr"/>
+            </a:p>
+          </p:txBody>
+        </p:sp>
+        <p:sp>
+          <p:nvSpPr>
+            <p:cNvPr id="26" name="Oval 25"/>
+            <p:cNvSpPr/>
+            <p:nvPr/>
+          </p:nvSpPr>
+          <p:spPr>
+            <a:xfrm>
+              <a:off x="9489281" y="11937206"/>
+              <a:ext cx="33337" cy="33337"/>
+            </a:xfrm>
+            <a:prstGeom prst="ellipse">
+              <a:avLst/>
+            </a:prstGeom>
+            <a:solidFill>
+              <a:srgbClr val="4F3433"/>
+            </a:solidFill>
+            <a:ln>
+              <a:noFill/>
+            </a:ln>
+            <a:effectLst/>
+          </p:spPr>
+          <p:style>
+            <a:lnRef idx="1">
+              <a:schemeClr val="accent1"/>
+            </a:lnRef>
+            <a:fillRef idx="3">
+              <a:schemeClr val="accent1"/>
+            </a:fillRef>
+            <a:effectRef idx="2">
+              <a:schemeClr val="accent1"/>
+            </a:effectRef>
+            <a:fontRef idx="minor">
+              <a:schemeClr val="lt1"/>
+            </a:fontRef>
+          </p:style>
+          <p:txBody>
+            <a:bodyPr rtlCol="0" anchor="ctr"/>
+            <a:lstStyle/>
+            <a:p>
+              <a:pPr algn="ctr"/>
+            </a:p>
+          </p:txBody>
+        </p:sp>
+        <p:sp>
+          <p:nvSpPr>
+            <p:cNvPr id="27" name="Block Arc 26"/>
+            <p:cNvSpPr/>
+            <p:nvPr/>
+          </p:nvSpPr>
+          <p:spPr>
+            <a:xfrm rot="10800000">
+              <a:off x="9377362" y="11963400"/>
+              <a:ext cx="104775" cy="76200"/>
+            </a:xfrm>
+            <a:prstGeom prst="blockArc">
+              <a:avLst>
+                <a:gd name="adj1" fmla="val 10800000"/>
+                <a:gd name="adj2" fmla="val 0"/>
+                <a:gd name="adj3" fmla="val 18000"/>
+              </a:avLst>
+            </a:prstGeom>
+            <a:solidFill>
+              <a:srgbClr val="4F3433"/>
+            </a:solidFill>
+            <a:ln>
+              <a:noFill/>
+            </a:ln>
+            <a:effectLst/>
+          </p:spPr>
+          <p:style>
+            <a:lnRef idx="1">
+              <a:schemeClr val="accent1"/>
+            </a:lnRef>
+            <a:fillRef idx="3">
+              <a:schemeClr val="accent1"/>
+            </a:fillRef>
+            <a:effectRef idx="2">
+              <a:schemeClr val="accent1"/>
+            </a:effectRef>
+            <a:fontRef idx="minor">
+              <a:schemeClr val="lt1"/>
+            </a:fontRef>
+          </p:style>
+          <p:txBody>
+            <a:bodyPr rtlCol="0" anchor="ctr"/>
+            <a:lstStyle/>
+            <a:p>
+              <a:pPr algn="ctr"/>
+            </a:p>
+          </p:txBody>
+        </p:sp>
       </p:grpSp>
     </p:spTree>
   </p:cSld>
@@ -8439,6 +11529,525 @@
             </a:prstGeom>
           </p:spPr>
         </p:pic>
+      </p:grpSp>
+      <p:sp>
+        <p:nvSpPr>
+          <p:cNvPr id="18" name="Rectangle 17"/>
+          <p:cNvSpPr/>
+          <p:nvPr/>
+        </p:nvSpPr>
+        <p:spPr>
+          <a:xfrm rot="19680000">
+            <a:off x="619125" y="523875"/>
+            <a:ext cx="1619250" cy="476250"/>
+          </a:xfrm>
+          <a:prstGeom prst="rect">
+            <a:avLst/>
+          </a:prstGeom>
+          <a:solidFill>
+            <a:srgbClr val="DBE6A7">
+              <a:alpha val="70000"/>
+            </a:srgbClr>
+          </a:solidFill>
+          <a:ln>
+            <a:noFill/>
+          </a:ln>
+          <a:effectLst/>
+        </p:spPr>
+        <p:style>
+          <a:lnRef idx="1">
+            <a:schemeClr val="accent1"/>
+          </a:lnRef>
+          <a:fillRef idx="3">
+            <a:schemeClr val="accent1"/>
+          </a:fillRef>
+          <a:effectRef idx="2">
+            <a:schemeClr val="accent1"/>
+          </a:effectRef>
+          <a:fontRef idx="minor">
+            <a:schemeClr val="lt1"/>
+          </a:fontRef>
+        </p:style>
+        <p:txBody>
+          <a:bodyPr rtlCol="0" anchor="ctr"/>
+          <a:lstStyle/>
+          <a:p>
+            <a:pPr algn="ctr"/>
+          </a:p>
+        </p:txBody>
+      </p:sp>
+      <p:sp>
+        <p:nvSpPr>
+          <p:cNvPr id="19" name="Rectangle 18"/>
+          <p:cNvSpPr/>
+          <p:nvPr/>
+        </p:nvSpPr>
+        <p:spPr>
+          <a:xfrm rot="2160000">
+            <a:off x="8239125" y="952500"/>
+            <a:ext cx="1619250" cy="476250"/>
+          </a:xfrm>
+          <a:prstGeom prst="rect">
+            <a:avLst/>
+          </a:prstGeom>
+          <a:solidFill>
+            <a:srgbClr val="DBE6A7">
+              <a:alpha val="70000"/>
+            </a:srgbClr>
+          </a:solidFill>
+          <a:ln>
+            <a:noFill/>
+          </a:ln>
+          <a:effectLst/>
+        </p:spPr>
+        <p:style>
+          <a:lnRef idx="1">
+            <a:schemeClr val="accent1"/>
+          </a:lnRef>
+          <a:fillRef idx="3">
+            <a:schemeClr val="accent1"/>
+          </a:fillRef>
+          <a:effectRef idx="2">
+            <a:schemeClr val="accent1"/>
+          </a:effectRef>
+          <a:fontRef idx="minor">
+            <a:schemeClr val="lt1"/>
+          </a:fontRef>
+        </p:style>
+        <p:txBody>
+          <a:bodyPr rtlCol="0" anchor="ctr"/>
+          <a:lstStyle/>
+          <a:p>
+            <a:pPr algn="ctr"/>
+          </a:p>
+        </p:txBody>
+      </p:sp>
+      <p:grpSp>
+        <p:nvGrpSpPr>
+          <p:cNvPr id="20" name="Group 19"/>
+          <p:cNvGrpSpPr/>
+          <p:nvPr/>
+        </p:nvGrpSpPr>
+        <p:grpSpPr>
+          <a:xfrm rot="600000">
+            <a:off x="0" y="0"/>
+            <a:ext cx="9875520" cy="12830175"/>
+            <a:chOff x="0" y="0"/>
+            <a:chExt cx="9875520" cy="12830175"/>
+          </a:xfrm>
+        </p:grpSpPr>
+        <p:sp>
+          <p:nvSpPr>
+            <p:cNvPr id="21" name="Rectangle 20"/>
+            <p:cNvSpPr/>
+            <p:nvPr/>
+          </p:nvSpPr>
+          <p:spPr>
+            <a:xfrm>
+              <a:off x="9401175" y="11715750"/>
+              <a:ext cx="57150" cy="1114425"/>
+            </a:xfrm>
+            <a:prstGeom prst="rect">
+              <a:avLst/>
+            </a:prstGeom>
+            <a:solidFill>
+              <a:srgbClr val="7FA05A"/>
+            </a:solidFill>
+            <a:ln>
+              <a:noFill/>
+            </a:ln>
+            <a:effectLst/>
+          </p:spPr>
+          <p:style>
+            <a:lnRef idx="1">
+              <a:schemeClr val="accent1"/>
+            </a:lnRef>
+            <a:fillRef idx="3">
+              <a:schemeClr val="accent1"/>
+            </a:fillRef>
+            <a:effectRef idx="2">
+              <a:schemeClr val="accent1"/>
+            </a:effectRef>
+            <a:fontRef idx="minor">
+              <a:schemeClr val="lt1"/>
+            </a:fontRef>
+          </p:style>
+          <p:txBody>
+            <a:bodyPr rtlCol="0" anchor="ctr"/>
+            <a:lstStyle/>
+            <a:p>
+              <a:pPr algn="ctr"/>
+            </a:p>
+          </p:txBody>
+        </p:sp>
+        <p:sp>
+          <p:nvSpPr>
+            <p:cNvPr id="22" name="Oval 21"/>
+            <p:cNvSpPr/>
+            <p:nvPr/>
+          </p:nvSpPr>
+          <p:spPr>
+            <a:xfrm rot="19800000">
+              <a:off x="9448800" y="12272962"/>
+              <a:ext cx="385762" cy="171450"/>
+            </a:xfrm>
+            <a:prstGeom prst="ellipse">
+              <a:avLst/>
+            </a:prstGeom>
+            <a:solidFill>
+              <a:srgbClr val="59A66C"/>
+            </a:solidFill>
+            <a:ln w="57150">
+              <a:solidFill>
+                <a:srgbClr val="FFFFFF"/>
+              </a:solidFill>
+            </a:ln>
+            <a:effectLst/>
+          </p:spPr>
+          <p:style>
+            <a:lnRef idx="1">
+              <a:schemeClr val="accent1"/>
+            </a:lnRef>
+            <a:fillRef idx="3">
+              <a:schemeClr val="accent1"/>
+            </a:fillRef>
+            <a:effectRef idx="2">
+              <a:schemeClr val="accent1"/>
+            </a:effectRef>
+            <a:fontRef idx="minor">
+              <a:schemeClr val="lt1"/>
+            </a:fontRef>
+          </p:style>
+          <p:txBody>
+            <a:bodyPr rtlCol="0" anchor="ctr"/>
+            <a:lstStyle/>
+            <a:p>
+              <a:pPr algn="ctr"/>
+            </a:p>
+          </p:txBody>
+        </p:sp>
+        <p:sp>
+          <p:nvSpPr>
+            <p:cNvPr id="23" name="Oval 22"/>
+            <p:cNvSpPr/>
+            <p:nvPr/>
+          </p:nvSpPr>
+          <p:spPr>
+            <a:xfrm>
+              <a:off x="9515475" y="11595735"/>
+              <a:ext cx="360045" cy="240030"/>
+            </a:xfrm>
+            <a:prstGeom prst="ellipse">
+              <a:avLst/>
+            </a:prstGeom>
+            <a:solidFill>
+              <a:srgbClr val="F2CF5B"/>
+            </a:solidFill>
+            <a:ln w="38100">
+              <a:solidFill>
+                <a:srgbClr val="FFFFFF"/>
+              </a:solidFill>
+            </a:ln>
+            <a:effectLst/>
+          </p:spPr>
+          <p:style>
+            <a:lnRef idx="1">
+              <a:schemeClr val="accent1"/>
+            </a:lnRef>
+            <a:fillRef idx="3">
+              <a:schemeClr val="accent1"/>
+            </a:fillRef>
+            <a:effectRef idx="2">
+              <a:schemeClr val="accent1"/>
+            </a:effectRef>
+            <a:fontRef idx="minor">
+              <a:schemeClr val="lt1"/>
+            </a:fontRef>
+          </p:style>
+          <p:txBody>
+            <a:bodyPr rtlCol="0" anchor="ctr"/>
+            <a:lstStyle/>
+            <a:p>
+              <a:pPr algn="ctr"/>
+            </a:p>
+          </p:txBody>
+        </p:sp>
+        <p:sp>
+          <p:nvSpPr>
+            <p:cNvPr id="24" name="Oval 23"/>
+            <p:cNvSpPr/>
+            <p:nvPr/>
+          </p:nvSpPr>
+          <p:spPr>
+            <a:xfrm rot="3600000">
+              <a:off x="9382601" y="11825879"/>
+              <a:ext cx="360045" cy="240030"/>
+            </a:xfrm>
+            <a:prstGeom prst="ellipse">
+              <a:avLst/>
+            </a:prstGeom>
+            <a:solidFill>
+              <a:srgbClr val="F2CF5B"/>
+            </a:solidFill>
+            <a:ln w="38100">
+              <a:solidFill>
+                <a:srgbClr val="FFFFFF"/>
+              </a:solidFill>
+            </a:ln>
+            <a:effectLst/>
+          </p:spPr>
+          <p:style>
+            <a:lnRef idx="1">
+              <a:schemeClr val="accent1"/>
+            </a:lnRef>
+            <a:fillRef idx="3">
+              <a:schemeClr val="accent1"/>
+            </a:fillRef>
+            <a:effectRef idx="2">
+              <a:schemeClr val="accent1"/>
+            </a:effectRef>
+            <a:fontRef idx="minor">
+              <a:schemeClr val="lt1"/>
+            </a:fontRef>
+          </p:style>
+          <p:txBody>
+            <a:bodyPr rtlCol="0" anchor="ctr"/>
+            <a:lstStyle/>
+            <a:p>
+              <a:pPr algn="ctr"/>
+            </a:p>
+          </p:txBody>
+        </p:sp>
+        <p:sp>
+          <p:nvSpPr>
+            <p:cNvPr id="25" name="Oval 24"/>
+            <p:cNvSpPr/>
+            <p:nvPr/>
+          </p:nvSpPr>
+          <p:spPr>
+            <a:xfrm rot="7200000">
+              <a:off x="9116853" y="11825879"/>
+              <a:ext cx="360045" cy="240030"/>
+            </a:xfrm>
+            <a:prstGeom prst="ellipse">
+              <a:avLst/>
+            </a:prstGeom>
+            <a:solidFill>
+              <a:srgbClr val="F2CF5B"/>
+            </a:solidFill>
+            <a:ln w="38100">
+              <a:solidFill>
+                <a:srgbClr val="FFFFFF"/>
+              </a:solidFill>
+            </a:ln>
+            <a:effectLst/>
+          </p:spPr>
+          <p:style>
+            <a:lnRef idx="1">
+              <a:schemeClr val="accent1"/>
+            </a:lnRef>
+            <a:fillRef idx="3">
+              <a:schemeClr val="accent1"/>
+            </a:fillRef>
+            <a:effectRef idx="2">
+              <a:schemeClr val="accent1"/>
+            </a:effectRef>
+            <a:fontRef idx="minor">
+              <a:schemeClr val="lt1"/>
+            </a:fontRef>
+          </p:style>
+          <p:txBody>
+            <a:bodyPr rtlCol="0" anchor="ctr"/>
+            <a:lstStyle/>
+            <a:p>
+              <a:pPr algn="ctr"/>
+            </a:p>
+          </p:txBody>
+        </p:sp>
+        <p:sp>
+          <p:nvSpPr>
+            <p:cNvPr id="26" name="Oval 25"/>
+            <p:cNvSpPr/>
+            <p:nvPr/>
+          </p:nvSpPr>
+          <p:spPr>
+            <a:xfrm rot="10800000">
+              <a:off x="8983980" y="11595735"/>
+              <a:ext cx="360045" cy="240030"/>
+            </a:xfrm>
+            <a:prstGeom prst="ellipse">
+              <a:avLst/>
+            </a:prstGeom>
+            <a:solidFill>
+              <a:srgbClr val="F2CF5B"/>
+            </a:solidFill>
+            <a:ln w="38100">
+              <a:solidFill>
+                <a:srgbClr val="FFFFFF"/>
+              </a:solidFill>
+            </a:ln>
+            <a:effectLst/>
+          </p:spPr>
+          <p:style>
+            <a:lnRef idx="1">
+              <a:schemeClr val="accent1"/>
+            </a:lnRef>
+            <a:fillRef idx="3">
+              <a:schemeClr val="accent1"/>
+            </a:fillRef>
+            <a:effectRef idx="2">
+              <a:schemeClr val="accent1"/>
+            </a:effectRef>
+            <a:fontRef idx="minor">
+              <a:schemeClr val="lt1"/>
+            </a:fontRef>
+          </p:style>
+          <p:txBody>
+            <a:bodyPr rtlCol="0" anchor="ctr"/>
+            <a:lstStyle/>
+            <a:p>
+              <a:pPr algn="ctr"/>
+            </a:p>
+          </p:txBody>
+        </p:sp>
+        <p:sp>
+          <p:nvSpPr>
+            <p:cNvPr id="27" name="Oval 26"/>
+            <p:cNvSpPr/>
+            <p:nvPr/>
+          </p:nvSpPr>
+          <p:spPr>
+            <a:xfrm rot="14400000">
+              <a:off x="9116853" y="11365590"/>
+              <a:ext cx="360045" cy="240030"/>
+            </a:xfrm>
+            <a:prstGeom prst="ellipse">
+              <a:avLst/>
+            </a:prstGeom>
+            <a:solidFill>
+              <a:srgbClr val="F2CF5B"/>
+            </a:solidFill>
+            <a:ln w="38100">
+              <a:solidFill>
+                <a:srgbClr val="FFFFFF"/>
+              </a:solidFill>
+            </a:ln>
+            <a:effectLst/>
+          </p:spPr>
+          <p:style>
+            <a:lnRef idx="1">
+              <a:schemeClr val="accent1"/>
+            </a:lnRef>
+            <a:fillRef idx="3">
+              <a:schemeClr val="accent1"/>
+            </a:fillRef>
+            <a:effectRef idx="2">
+              <a:schemeClr val="accent1"/>
+            </a:effectRef>
+            <a:fontRef idx="minor">
+              <a:schemeClr val="lt1"/>
+            </a:fontRef>
+          </p:style>
+          <p:txBody>
+            <a:bodyPr rtlCol="0" anchor="ctr"/>
+            <a:lstStyle/>
+            <a:p>
+              <a:pPr algn="ctr"/>
+            </a:p>
+          </p:txBody>
+        </p:sp>
+        <p:sp>
+          <p:nvSpPr>
+            <p:cNvPr id="28" name="Oval 27"/>
+            <p:cNvSpPr/>
+            <p:nvPr/>
+          </p:nvSpPr>
+          <p:spPr>
+            <a:xfrm rot="18000000">
+              <a:off x="9382601" y="11365590"/>
+              <a:ext cx="360045" cy="240030"/>
+            </a:xfrm>
+            <a:prstGeom prst="ellipse">
+              <a:avLst/>
+            </a:prstGeom>
+            <a:solidFill>
+              <a:srgbClr val="F2CF5B"/>
+            </a:solidFill>
+            <a:ln w="38100">
+              <a:solidFill>
+                <a:srgbClr val="FFFFFF"/>
+              </a:solidFill>
+            </a:ln>
+            <a:effectLst/>
+          </p:spPr>
+          <p:style>
+            <a:lnRef idx="1">
+              <a:schemeClr val="accent1"/>
+            </a:lnRef>
+            <a:fillRef idx="3">
+              <a:schemeClr val="accent1"/>
+            </a:fillRef>
+            <a:effectRef idx="2">
+              <a:schemeClr val="accent1"/>
+            </a:effectRef>
+            <a:fontRef idx="minor">
+              <a:schemeClr val="lt1"/>
+            </a:fontRef>
+          </p:style>
+          <p:txBody>
+            <a:bodyPr rtlCol="0" anchor="ctr"/>
+            <a:lstStyle/>
+            <a:p>
+              <a:pPr algn="ctr"/>
+            </a:p>
+          </p:txBody>
+        </p:sp>
+        <p:sp>
+          <p:nvSpPr>
+            <p:cNvPr id="29" name="Oval 28"/>
+            <p:cNvSpPr/>
+            <p:nvPr/>
+          </p:nvSpPr>
+          <p:spPr>
+            <a:xfrm>
+              <a:off x="9266872" y="11552872"/>
+              <a:ext cx="325755" cy="325755"/>
+            </a:xfrm>
+            <a:prstGeom prst="ellipse">
+              <a:avLst/>
+            </a:prstGeom>
+            <a:solidFill>
+              <a:srgbClr val="8C6A4E"/>
+            </a:solidFill>
+            <a:ln w="38100">
+              <a:solidFill>
+                <a:srgbClr val="FFFFFF"/>
+              </a:solidFill>
+            </a:ln>
+            <a:effectLst/>
+          </p:spPr>
+          <p:style>
+            <a:lnRef idx="1">
+              <a:schemeClr val="accent1"/>
+            </a:lnRef>
+            <a:fillRef idx="3">
+              <a:schemeClr val="accent1"/>
+            </a:fillRef>
+            <a:effectRef idx="2">
+              <a:schemeClr val="accent1"/>
+            </a:effectRef>
+            <a:fontRef idx="minor">
+              <a:schemeClr val="lt1"/>
+            </a:fontRef>
+          </p:style>
+          <p:txBody>
+            <a:bodyPr rtlCol="0" anchor="ctr"/>
+            <a:lstStyle/>
+            <a:p>
+              <a:pPr algn="ctr"/>
+            </a:p>
+          </p:txBody>
+        </p:sp>
       </p:grpSp>
     </p:spTree>
   </p:cSld>
@@ -8636,14 +12245,156 @@
       </p:pic>
       <p:sp>
         <p:nvSpPr>
-          <p:cNvPr id="9" name="TextBox 8"/>
+          <p:cNvPr id="9" name="Rectangle 8"/>
+          <p:cNvSpPr/>
+          <p:nvPr/>
+        </p:nvSpPr>
+        <p:spPr>
+          <a:xfrm rot="120000">
+            <a:off x="2000250" y="4286250"/>
+            <a:ext cx="6286500" cy="4286250"/>
+          </a:xfrm>
+          <a:prstGeom prst="rect">
+            <a:avLst/>
+          </a:prstGeom>
+          <a:solidFill>
+            <a:srgbClr val="FFFDF7"/>
+          </a:solidFill>
+          <a:ln>
+            <a:noFill/>
+          </a:ln>
+          <a:effectLst>
+            <a:outerShdw blurRad="228600" dist="76200" dir="5400000" algn="t" rotWithShape="0">
+              <a:srgbClr val="000000">
+                <a:alpha val="30000"/>
+              </a:srgbClr>
+            </a:outerShdw>
+          </a:effectLst>
+        </p:spPr>
+        <p:style>
+          <a:lnRef idx="1">
+            <a:schemeClr val="accent1"/>
+          </a:lnRef>
+          <a:fillRef idx="3">
+            <a:schemeClr val="accent1"/>
+          </a:fillRef>
+          <a:effectRef idx="2">
+            <a:schemeClr val="accent1"/>
+          </a:effectRef>
+          <a:fontRef idx="minor">
+            <a:schemeClr val="lt1"/>
+          </a:fontRef>
+        </p:style>
+        <p:txBody>
+          <a:bodyPr rtlCol="0" anchor="ctr"/>
+          <a:lstStyle/>
+          <a:p>
+            <a:pPr algn="ctr"/>
+          </a:p>
+        </p:txBody>
+      </p:sp>
+      <p:sp>
+        <p:nvSpPr>
+          <p:cNvPr id="10" name="Rectangle 9"/>
+          <p:cNvSpPr/>
+          <p:nvPr/>
+        </p:nvSpPr>
+        <p:spPr>
+          <a:xfrm rot="19920000">
+            <a:off x="1857375" y="4133850"/>
+            <a:ext cx="1428750" cy="419100"/>
+          </a:xfrm>
+          <a:prstGeom prst="rect">
+            <a:avLst/>
+          </a:prstGeom>
+          <a:solidFill>
+            <a:srgbClr val="DBE6A7">
+              <a:alpha val="70000"/>
+            </a:srgbClr>
+          </a:solidFill>
+          <a:ln>
+            <a:noFill/>
+          </a:ln>
+          <a:effectLst/>
+        </p:spPr>
+        <p:style>
+          <a:lnRef idx="1">
+            <a:schemeClr val="accent1"/>
+          </a:lnRef>
+          <a:fillRef idx="3">
+            <a:schemeClr val="accent1"/>
+          </a:fillRef>
+          <a:effectRef idx="2">
+            <a:schemeClr val="accent1"/>
+          </a:effectRef>
+          <a:fontRef idx="minor">
+            <a:schemeClr val="lt1"/>
+          </a:fontRef>
+        </p:style>
+        <p:txBody>
+          <a:bodyPr rtlCol="0" anchor="ctr"/>
+          <a:lstStyle/>
+          <a:p>
+            <a:pPr algn="ctr"/>
+          </a:p>
+        </p:txBody>
+      </p:sp>
+      <p:sp>
+        <p:nvSpPr>
+          <p:cNvPr id="11" name="Rectangle 10"/>
+          <p:cNvSpPr/>
+          <p:nvPr/>
+        </p:nvSpPr>
+        <p:spPr>
+          <a:xfrm rot="1680000">
+            <a:off x="7000875" y="4133850"/>
+            <a:ext cx="1428750" cy="419100"/>
+          </a:xfrm>
+          <a:prstGeom prst="rect">
+            <a:avLst/>
+          </a:prstGeom>
+          <a:solidFill>
+            <a:srgbClr val="DBE6A7">
+              <a:alpha val="70000"/>
+            </a:srgbClr>
+          </a:solidFill>
+          <a:ln>
+            <a:noFill/>
+          </a:ln>
+          <a:effectLst/>
+        </p:spPr>
+        <p:style>
+          <a:lnRef idx="1">
+            <a:schemeClr val="accent1"/>
+          </a:lnRef>
+          <a:fillRef idx="3">
+            <a:schemeClr val="accent1"/>
+          </a:fillRef>
+          <a:effectRef idx="2">
+            <a:schemeClr val="accent1"/>
+          </a:effectRef>
+          <a:fontRef idx="minor">
+            <a:schemeClr val="lt1"/>
+          </a:fontRef>
+        </p:style>
+        <p:txBody>
+          <a:bodyPr rtlCol="0" anchor="ctr"/>
+          <a:lstStyle/>
+          <a:p>
+            <a:pPr algn="ctr"/>
+          </a:p>
+        </p:txBody>
+      </p:sp>
+      <p:sp>
+        <p:nvSpPr>
+          <p:cNvPr id="12" name="TextBox 11"/>
           <p:cNvSpPr txBox="1"/>
           <p:nvPr/>
         </p:nvSpPr>
         <p:spPr>
           <a:xfrm>
-            <a:off x="2190750" y="4953000"/>
-            <a:ext cx="5905500" cy="4362343"/>
+            <a:off x="2286000" y="5048250"/>
+            <a:ext cx="5715000" cy="4191659"/>
           </a:xfrm>
           <a:prstGeom prst="rect">
             <a:avLst/>
@@ -8662,9 +12413,9 @@
               </a:lnSpc>
             </a:pPr>
             <a:r>
-              <a:rPr sz="5000" b="1" i="0">
+              <a:rPr sz="4800" b="1" i="0">
                 <a:solidFill>
-                  <a:srgbClr val="F4F1EA"/>
+                  <a:srgbClr val="22371F"/>
                 </a:solidFill>
                 <a:latin typeface="Montserrat"/>
               </a:rPr>
@@ -8673,9 +12424,773 @@
           </a:p>
         </p:txBody>
       </p:sp>
+      <p:grpSp>
+        <p:nvGrpSpPr>
+          <p:cNvPr id="13" name="Group 12"/>
+          <p:cNvGrpSpPr/>
+          <p:nvPr/>
+        </p:nvGrpSpPr>
+        <p:grpSpPr>
+          <a:xfrm rot="21120000">
+            <a:off x="0" y="0"/>
+            <a:ext cx="3589020" cy="9972675"/>
+            <a:chOff x="0" y="0"/>
+            <a:chExt cx="3589020" cy="9972675"/>
+          </a:xfrm>
+        </p:grpSpPr>
+        <p:sp>
+          <p:nvSpPr>
+            <p:cNvPr id="14" name="Rectangle 13"/>
+            <p:cNvSpPr/>
+            <p:nvPr/>
+          </p:nvSpPr>
+          <p:spPr>
+            <a:xfrm>
+              <a:off x="3114675" y="8858250"/>
+              <a:ext cx="57150" cy="1114425"/>
+            </a:xfrm>
+            <a:prstGeom prst="rect">
+              <a:avLst/>
+            </a:prstGeom>
+            <a:solidFill>
+              <a:srgbClr val="7FA05A"/>
+            </a:solidFill>
+            <a:ln>
+              <a:noFill/>
+            </a:ln>
+            <a:effectLst/>
+          </p:spPr>
+          <p:style>
+            <a:lnRef idx="1">
+              <a:schemeClr val="accent1"/>
+            </a:lnRef>
+            <a:fillRef idx="3">
+              <a:schemeClr val="accent1"/>
+            </a:fillRef>
+            <a:effectRef idx="2">
+              <a:schemeClr val="accent1"/>
+            </a:effectRef>
+            <a:fontRef idx="minor">
+              <a:schemeClr val="lt1"/>
+            </a:fontRef>
+          </p:style>
+          <p:txBody>
+            <a:bodyPr rtlCol="0" anchor="ctr"/>
+            <a:lstStyle/>
+            <a:p>
+              <a:pPr algn="ctr"/>
+            </a:p>
+          </p:txBody>
+        </p:sp>
+        <p:sp>
+          <p:nvSpPr>
+            <p:cNvPr id="15" name="Oval 14"/>
+            <p:cNvSpPr/>
+            <p:nvPr/>
+          </p:nvSpPr>
+          <p:spPr>
+            <a:xfrm rot="19800000">
+              <a:off x="3162300" y="9415462"/>
+              <a:ext cx="385762" cy="171450"/>
+            </a:xfrm>
+            <a:prstGeom prst="ellipse">
+              <a:avLst/>
+            </a:prstGeom>
+            <a:solidFill>
+              <a:srgbClr val="59A66C"/>
+            </a:solidFill>
+            <a:ln w="57150">
+              <a:solidFill>
+                <a:srgbClr val="FFFFFF"/>
+              </a:solidFill>
+            </a:ln>
+            <a:effectLst/>
+          </p:spPr>
+          <p:style>
+            <a:lnRef idx="1">
+              <a:schemeClr val="accent1"/>
+            </a:lnRef>
+            <a:fillRef idx="3">
+              <a:schemeClr val="accent1"/>
+            </a:fillRef>
+            <a:effectRef idx="2">
+              <a:schemeClr val="accent1"/>
+            </a:effectRef>
+            <a:fontRef idx="minor">
+              <a:schemeClr val="lt1"/>
+            </a:fontRef>
+          </p:style>
+          <p:txBody>
+            <a:bodyPr rtlCol="0" anchor="ctr"/>
+            <a:lstStyle/>
+            <a:p>
+              <a:pPr algn="ctr"/>
+            </a:p>
+          </p:txBody>
+        </p:sp>
+        <p:sp>
+          <p:nvSpPr>
+            <p:cNvPr id="16" name="Oval 15"/>
+            <p:cNvSpPr/>
+            <p:nvPr/>
+          </p:nvSpPr>
+          <p:spPr>
+            <a:xfrm>
+              <a:off x="3228975" y="8738235"/>
+              <a:ext cx="360045" cy="240030"/>
+            </a:xfrm>
+            <a:prstGeom prst="ellipse">
+              <a:avLst/>
+            </a:prstGeom>
+            <a:solidFill>
+              <a:srgbClr val="F2CF5B"/>
+            </a:solidFill>
+            <a:ln w="38100">
+              <a:solidFill>
+                <a:srgbClr val="FFFFFF"/>
+              </a:solidFill>
+            </a:ln>
+            <a:effectLst/>
+          </p:spPr>
+          <p:style>
+            <a:lnRef idx="1">
+              <a:schemeClr val="accent1"/>
+            </a:lnRef>
+            <a:fillRef idx="3">
+              <a:schemeClr val="accent1"/>
+            </a:fillRef>
+            <a:effectRef idx="2">
+              <a:schemeClr val="accent1"/>
+            </a:effectRef>
+            <a:fontRef idx="minor">
+              <a:schemeClr val="lt1"/>
+            </a:fontRef>
+          </p:style>
+          <p:txBody>
+            <a:bodyPr rtlCol="0" anchor="ctr"/>
+            <a:lstStyle/>
+            <a:p>
+              <a:pPr algn="ctr"/>
+            </a:p>
+          </p:txBody>
+        </p:sp>
+        <p:sp>
+          <p:nvSpPr>
+            <p:cNvPr id="17" name="Oval 16"/>
+            <p:cNvSpPr/>
+            <p:nvPr/>
+          </p:nvSpPr>
+          <p:spPr>
+            <a:xfrm rot="3600000">
+              <a:off x="3096101" y="8968379"/>
+              <a:ext cx="360045" cy="240030"/>
+            </a:xfrm>
+            <a:prstGeom prst="ellipse">
+              <a:avLst/>
+            </a:prstGeom>
+            <a:solidFill>
+              <a:srgbClr val="F2CF5B"/>
+            </a:solidFill>
+            <a:ln w="38100">
+              <a:solidFill>
+                <a:srgbClr val="FFFFFF"/>
+              </a:solidFill>
+            </a:ln>
+            <a:effectLst/>
+          </p:spPr>
+          <p:style>
+            <a:lnRef idx="1">
+              <a:schemeClr val="accent1"/>
+            </a:lnRef>
+            <a:fillRef idx="3">
+              <a:schemeClr val="accent1"/>
+            </a:fillRef>
+            <a:effectRef idx="2">
+              <a:schemeClr val="accent1"/>
+            </a:effectRef>
+            <a:fontRef idx="minor">
+              <a:schemeClr val="lt1"/>
+            </a:fontRef>
+          </p:style>
+          <p:txBody>
+            <a:bodyPr rtlCol="0" anchor="ctr"/>
+            <a:lstStyle/>
+            <a:p>
+              <a:pPr algn="ctr"/>
+            </a:p>
+          </p:txBody>
+        </p:sp>
+        <p:sp>
+          <p:nvSpPr>
+            <p:cNvPr id="18" name="Oval 17"/>
+            <p:cNvSpPr/>
+            <p:nvPr/>
+          </p:nvSpPr>
+          <p:spPr>
+            <a:xfrm rot="7200000">
+              <a:off x="2830353" y="8968379"/>
+              <a:ext cx="360045" cy="240030"/>
+            </a:xfrm>
+            <a:prstGeom prst="ellipse">
+              <a:avLst/>
+            </a:prstGeom>
+            <a:solidFill>
+              <a:srgbClr val="F2CF5B"/>
+            </a:solidFill>
+            <a:ln w="38100">
+              <a:solidFill>
+                <a:srgbClr val="FFFFFF"/>
+              </a:solidFill>
+            </a:ln>
+            <a:effectLst/>
+          </p:spPr>
+          <p:style>
+            <a:lnRef idx="1">
+              <a:schemeClr val="accent1"/>
+            </a:lnRef>
+            <a:fillRef idx="3">
+              <a:schemeClr val="accent1"/>
+            </a:fillRef>
+            <a:effectRef idx="2">
+              <a:schemeClr val="accent1"/>
+            </a:effectRef>
+            <a:fontRef idx="minor">
+              <a:schemeClr val="lt1"/>
+            </a:fontRef>
+          </p:style>
+          <p:txBody>
+            <a:bodyPr rtlCol="0" anchor="ctr"/>
+            <a:lstStyle/>
+            <a:p>
+              <a:pPr algn="ctr"/>
+            </a:p>
+          </p:txBody>
+        </p:sp>
+        <p:sp>
+          <p:nvSpPr>
+            <p:cNvPr id="19" name="Oval 18"/>
+            <p:cNvSpPr/>
+            <p:nvPr/>
+          </p:nvSpPr>
+          <p:spPr>
+            <a:xfrm rot="10800000">
+              <a:off x="2697480" y="8738235"/>
+              <a:ext cx="360045" cy="240030"/>
+            </a:xfrm>
+            <a:prstGeom prst="ellipse">
+              <a:avLst/>
+            </a:prstGeom>
+            <a:solidFill>
+              <a:srgbClr val="F2CF5B"/>
+            </a:solidFill>
+            <a:ln w="38100">
+              <a:solidFill>
+                <a:srgbClr val="FFFFFF"/>
+              </a:solidFill>
+            </a:ln>
+            <a:effectLst/>
+          </p:spPr>
+          <p:style>
+            <a:lnRef idx="1">
+              <a:schemeClr val="accent1"/>
+            </a:lnRef>
+            <a:fillRef idx="3">
+              <a:schemeClr val="accent1"/>
+            </a:fillRef>
+            <a:effectRef idx="2">
+              <a:schemeClr val="accent1"/>
+            </a:effectRef>
+            <a:fontRef idx="minor">
+              <a:schemeClr val="lt1"/>
+            </a:fontRef>
+          </p:style>
+          <p:txBody>
+            <a:bodyPr rtlCol="0" anchor="ctr"/>
+            <a:lstStyle/>
+            <a:p>
+              <a:pPr algn="ctr"/>
+            </a:p>
+          </p:txBody>
+        </p:sp>
+        <p:sp>
+          <p:nvSpPr>
+            <p:cNvPr id="20" name="Oval 19"/>
+            <p:cNvSpPr/>
+            <p:nvPr/>
+          </p:nvSpPr>
+          <p:spPr>
+            <a:xfrm rot="14400000">
+              <a:off x="2830353" y="8508090"/>
+              <a:ext cx="360045" cy="240030"/>
+            </a:xfrm>
+            <a:prstGeom prst="ellipse">
+              <a:avLst/>
+            </a:prstGeom>
+            <a:solidFill>
+              <a:srgbClr val="F2CF5B"/>
+            </a:solidFill>
+            <a:ln w="38100">
+              <a:solidFill>
+                <a:srgbClr val="FFFFFF"/>
+              </a:solidFill>
+            </a:ln>
+            <a:effectLst/>
+          </p:spPr>
+          <p:style>
+            <a:lnRef idx="1">
+              <a:schemeClr val="accent1"/>
+            </a:lnRef>
+            <a:fillRef idx="3">
+              <a:schemeClr val="accent1"/>
+            </a:fillRef>
+            <a:effectRef idx="2">
+              <a:schemeClr val="accent1"/>
+            </a:effectRef>
+            <a:fontRef idx="minor">
+              <a:schemeClr val="lt1"/>
+            </a:fontRef>
+          </p:style>
+          <p:txBody>
+            <a:bodyPr rtlCol="0" anchor="ctr"/>
+            <a:lstStyle/>
+            <a:p>
+              <a:pPr algn="ctr"/>
+            </a:p>
+          </p:txBody>
+        </p:sp>
+        <p:sp>
+          <p:nvSpPr>
+            <p:cNvPr id="21" name="Oval 20"/>
+            <p:cNvSpPr/>
+            <p:nvPr/>
+          </p:nvSpPr>
+          <p:spPr>
+            <a:xfrm rot="18000000">
+              <a:off x="3096101" y="8508090"/>
+              <a:ext cx="360045" cy="240030"/>
+            </a:xfrm>
+            <a:prstGeom prst="ellipse">
+              <a:avLst/>
+            </a:prstGeom>
+            <a:solidFill>
+              <a:srgbClr val="F2CF5B"/>
+            </a:solidFill>
+            <a:ln w="38100">
+              <a:solidFill>
+                <a:srgbClr val="FFFFFF"/>
+              </a:solidFill>
+            </a:ln>
+            <a:effectLst/>
+          </p:spPr>
+          <p:style>
+            <a:lnRef idx="1">
+              <a:schemeClr val="accent1"/>
+            </a:lnRef>
+            <a:fillRef idx="3">
+              <a:schemeClr val="accent1"/>
+            </a:fillRef>
+            <a:effectRef idx="2">
+              <a:schemeClr val="accent1"/>
+            </a:effectRef>
+            <a:fontRef idx="minor">
+              <a:schemeClr val="lt1"/>
+            </a:fontRef>
+          </p:style>
+          <p:txBody>
+            <a:bodyPr rtlCol="0" anchor="ctr"/>
+            <a:lstStyle/>
+            <a:p>
+              <a:pPr algn="ctr"/>
+            </a:p>
+          </p:txBody>
+        </p:sp>
+        <p:sp>
+          <p:nvSpPr>
+            <p:cNvPr id="22" name="Oval 21"/>
+            <p:cNvSpPr/>
+            <p:nvPr/>
+          </p:nvSpPr>
+          <p:spPr>
+            <a:xfrm>
+              <a:off x="2980372" y="8695372"/>
+              <a:ext cx="325755" cy="325755"/>
+            </a:xfrm>
+            <a:prstGeom prst="ellipse">
+              <a:avLst/>
+            </a:prstGeom>
+            <a:solidFill>
+              <a:srgbClr val="8C6A4E"/>
+            </a:solidFill>
+            <a:ln w="38100">
+              <a:solidFill>
+                <a:srgbClr val="FFFFFF"/>
+              </a:solidFill>
+            </a:ln>
+            <a:effectLst/>
+          </p:spPr>
+          <p:style>
+            <a:lnRef idx="1">
+              <a:schemeClr val="accent1"/>
+            </a:lnRef>
+            <a:fillRef idx="3">
+              <a:schemeClr val="accent1"/>
+            </a:fillRef>
+            <a:effectRef idx="2">
+              <a:schemeClr val="accent1"/>
+            </a:effectRef>
+            <a:fontRef idx="minor">
+              <a:schemeClr val="lt1"/>
+            </a:fontRef>
+          </p:style>
+          <p:txBody>
+            <a:bodyPr rtlCol="0" anchor="ctr"/>
+            <a:lstStyle/>
+            <a:p>
+              <a:pPr algn="ctr"/>
+            </a:p>
+          </p:txBody>
+        </p:sp>
+      </p:grpSp>
+      <p:grpSp>
+        <p:nvGrpSpPr>
+          <p:cNvPr id="23" name="Group 22"/>
+          <p:cNvGrpSpPr/>
+          <p:nvPr/>
+        </p:nvGrpSpPr>
+        <p:grpSpPr>
+          <a:xfrm rot="20880000">
+            <a:off x="0" y="0"/>
+            <a:ext cx="7905750" cy="9328785"/>
+            <a:chOff x="0" y="0"/>
+            <a:chExt cx="7905750" cy="9328785"/>
+          </a:xfrm>
+        </p:grpSpPr>
+        <p:sp>
+          <p:nvSpPr>
+            <p:cNvPr id="24" name="Arc 23"/>
+            <p:cNvSpPr/>
+            <p:nvPr/>
+          </p:nvSpPr>
+          <p:spPr>
+            <a:xfrm>
+              <a:off x="6358890" y="8970340"/>
+              <a:ext cx="226695" cy="145618"/>
+            </a:xfrm>
+            <a:prstGeom prst="arc">
+              <a:avLst/>
+            </a:prstGeom>
+            <a:noFill/>
+            <a:ln w="38100">
+              <a:solidFill>
+                <a:srgbClr val="156826"/>
+              </a:solidFill>
+            </a:ln>
+            <a:effectLst/>
+          </p:spPr>
+          <p:style>
+            <a:lnRef idx="1">
+              <a:schemeClr val="accent1"/>
+            </a:lnRef>
+            <a:fillRef idx="3">
+              <a:schemeClr val="accent1"/>
+            </a:fillRef>
+            <a:effectRef idx="2">
+              <a:schemeClr val="accent1"/>
+            </a:effectRef>
+            <a:fontRef idx="minor">
+              <a:schemeClr val="lt1"/>
+            </a:fontRef>
+          </p:style>
+          <p:txBody>
+            <a:bodyPr rtlCol="0" anchor="ctr"/>
+            <a:lstStyle/>
+            <a:p>
+              <a:pPr algn="ctr"/>
+            </a:p>
+          </p:txBody>
+        </p:sp>
+        <p:sp>
+          <p:nvSpPr>
+            <p:cNvPr id="25" name="Arc 24"/>
+            <p:cNvSpPr/>
+            <p:nvPr/>
+          </p:nvSpPr>
+          <p:spPr>
+            <a:xfrm rot="10800000">
+              <a:off x="6145530" y="8981541"/>
+              <a:ext cx="226695" cy="145618"/>
+            </a:xfrm>
+            <a:prstGeom prst="arc">
+              <a:avLst/>
+            </a:prstGeom>
+            <a:noFill/>
+            <a:ln w="38100">
+              <a:solidFill>
+                <a:srgbClr val="156826"/>
+              </a:solidFill>
+            </a:ln>
+            <a:effectLst/>
+          </p:spPr>
+          <p:style>
+            <a:lnRef idx="1">
+              <a:schemeClr val="accent1"/>
+            </a:lnRef>
+            <a:fillRef idx="3">
+              <a:schemeClr val="accent1"/>
+            </a:fillRef>
+            <a:effectRef idx="2">
+              <a:schemeClr val="accent1"/>
+            </a:effectRef>
+            <a:fontRef idx="minor">
+              <a:schemeClr val="lt1"/>
+            </a:fontRef>
+          </p:style>
+          <p:txBody>
+            <a:bodyPr rtlCol="0" anchor="ctr"/>
+            <a:lstStyle/>
+            <a:p>
+              <a:pPr algn="ctr"/>
+            </a:p>
+          </p:txBody>
+        </p:sp>
+        <p:sp>
+          <p:nvSpPr>
+            <p:cNvPr id="26" name="Arc 25"/>
+            <p:cNvSpPr/>
+            <p:nvPr/>
+          </p:nvSpPr>
+          <p:spPr>
+            <a:xfrm>
+              <a:off x="5932170" y="8970340"/>
+              <a:ext cx="226695" cy="145618"/>
+            </a:xfrm>
+            <a:prstGeom prst="arc">
+              <a:avLst/>
+            </a:prstGeom>
+            <a:noFill/>
+            <a:ln w="38100">
+              <a:solidFill>
+                <a:srgbClr val="156826"/>
+              </a:solidFill>
+            </a:ln>
+            <a:effectLst/>
+          </p:spPr>
+          <p:style>
+            <a:lnRef idx="1">
+              <a:schemeClr val="accent1"/>
+            </a:lnRef>
+            <a:fillRef idx="3">
+              <a:schemeClr val="accent1"/>
+            </a:fillRef>
+            <a:effectRef idx="2">
+              <a:schemeClr val="accent1"/>
+            </a:effectRef>
+            <a:fontRef idx="minor">
+              <a:schemeClr val="lt1"/>
+            </a:fontRef>
+          </p:style>
+          <p:txBody>
+            <a:bodyPr rtlCol="0" anchor="ctr"/>
+            <a:lstStyle/>
+            <a:p>
+              <a:pPr algn="ctr"/>
+            </a:p>
+          </p:txBody>
+        </p:sp>
+        <p:sp>
+          <p:nvSpPr>
+            <p:cNvPr id="27" name="Rounded Rectangle 26"/>
+            <p:cNvSpPr/>
+            <p:nvPr/>
+          </p:nvSpPr>
+          <p:spPr>
+            <a:xfrm>
+              <a:off x="6572250" y="8768715"/>
+              <a:ext cx="1333500" cy="560070"/>
+            </a:xfrm>
+            <a:prstGeom prst="roundRect">
+              <a:avLst>
+                <a:gd name="adj" fmla="val 50000"/>
+              </a:avLst>
+            </a:prstGeom>
+            <a:solidFill>
+              <a:srgbClr val="BFD8A6"/>
+            </a:solidFill>
+            <a:ln w="57150">
+              <a:solidFill>
+                <a:srgbClr val="FFFFFF"/>
+              </a:solidFill>
+            </a:ln>
+            <a:effectLst>
+              <a:outerShdw blurRad="228600" dist="76200" dir="5400000" algn="t" rotWithShape="0">
+                <a:srgbClr val="000000">
+                  <a:alpha val="30000"/>
+                </a:srgbClr>
+              </a:outerShdw>
+            </a:effectLst>
+          </p:spPr>
+          <p:style>
+            <a:lnRef idx="1">
+              <a:schemeClr val="accent1"/>
+            </a:lnRef>
+            <a:fillRef idx="3">
+              <a:schemeClr val="accent1"/>
+            </a:fillRef>
+            <a:effectRef idx="2">
+              <a:schemeClr val="accent1"/>
+            </a:effectRef>
+            <a:fontRef idx="minor">
+              <a:schemeClr val="lt1"/>
+            </a:fontRef>
+          </p:style>
+          <p:txBody>
+            <a:bodyPr rtlCol="0" anchor="ctr"/>
+            <a:lstStyle/>
+            <a:p>
+              <a:pPr algn="ctr"/>
+            </a:p>
+          </p:txBody>
+        </p:sp>
+        <p:sp>
+          <p:nvSpPr>
+            <p:cNvPr id="28" name="Oval 27"/>
+            <p:cNvSpPr/>
+            <p:nvPr/>
+          </p:nvSpPr>
+          <p:spPr>
+            <a:xfrm>
+              <a:off x="7280823" y="8999531"/>
+              <a:ext cx="42429" cy="42429"/>
+            </a:xfrm>
+            <a:prstGeom prst="ellipse">
+              <a:avLst/>
+            </a:prstGeom>
+            <a:solidFill>
+              <a:srgbClr val="22371F"/>
+            </a:solidFill>
+            <a:ln>
+              <a:noFill/>
+            </a:ln>
+            <a:effectLst/>
+          </p:spPr>
+          <p:style>
+            <a:lnRef idx="1">
+              <a:schemeClr val="accent1"/>
+            </a:lnRef>
+            <a:fillRef idx="3">
+              <a:schemeClr val="accent1"/>
+            </a:fillRef>
+            <a:effectRef idx="2">
+              <a:schemeClr val="accent1"/>
+            </a:effectRef>
+            <a:fontRef idx="minor">
+              <a:schemeClr val="lt1"/>
+            </a:fontRef>
+          </p:style>
+          <p:txBody>
+            <a:bodyPr rtlCol="0" anchor="ctr"/>
+            <a:lstStyle/>
+            <a:p>
+              <a:pPr algn="ctr"/>
+            </a:p>
+          </p:txBody>
+        </p:sp>
+        <p:sp>
+          <p:nvSpPr>
+            <p:cNvPr id="29" name="Oval 28"/>
+            <p:cNvSpPr/>
+            <p:nvPr/>
+          </p:nvSpPr>
+          <p:spPr>
+            <a:xfrm>
+              <a:off x="7474787" y="8999531"/>
+              <a:ext cx="42429" cy="42429"/>
+            </a:xfrm>
+            <a:prstGeom prst="ellipse">
+              <a:avLst/>
+            </a:prstGeom>
+            <a:solidFill>
+              <a:srgbClr val="22371F"/>
+            </a:solidFill>
+            <a:ln>
+              <a:noFill/>
+            </a:ln>
+            <a:effectLst/>
+          </p:spPr>
+          <p:style>
+            <a:lnRef idx="1">
+              <a:schemeClr val="accent1"/>
+            </a:lnRef>
+            <a:fillRef idx="3">
+              <a:schemeClr val="accent1"/>
+            </a:fillRef>
+            <a:effectRef idx="2">
+              <a:schemeClr val="accent1"/>
+            </a:effectRef>
+            <a:fontRef idx="minor">
+              <a:schemeClr val="lt1"/>
+            </a:fontRef>
+          </p:style>
+          <p:txBody>
+            <a:bodyPr rtlCol="0" anchor="ctr"/>
+            <a:lstStyle/>
+            <a:p>
+              <a:pPr algn="ctr"/>
+            </a:p>
+          </p:txBody>
+        </p:sp>
+        <p:sp>
+          <p:nvSpPr>
+            <p:cNvPr id="30" name="Block Arc 29"/>
+            <p:cNvSpPr/>
+            <p:nvPr/>
+          </p:nvSpPr>
+          <p:spPr>
+            <a:xfrm rot="10800000">
+              <a:off x="7332345" y="9032869"/>
+              <a:ext cx="133350" cy="96981"/>
+            </a:xfrm>
+            <a:prstGeom prst="blockArc">
+              <a:avLst>
+                <a:gd name="adj1" fmla="val 10800000"/>
+                <a:gd name="adj2" fmla="val 0"/>
+                <a:gd name="adj3" fmla="val 18000"/>
+              </a:avLst>
+            </a:prstGeom>
+            <a:solidFill>
+              <a:srgbClr val="22371F"/>
+            </a:solidFill>
+            <a:ln>
+              <a:noFill/>
+            </a:ln>
+            <a:effectLst/>
+          </p:spPr>
+          <p:style>
+            <a:lnRef idx="1">
+              <a:schemeClr val="accent1"/>
+            </a:lnRef>
+            <a:fillRef idx="3">
+              <a:schemeClr val="accent1"/>
+            </a:fillRef>
+            <a:effectRef idx="2">
+              <a:schemeClr val="accent1"/>
+            </a:effectRef>
+            <a:fontRef idx="minor">
+              <a:schemeClr val="lt1"/>
+            </a:fontRef>
+          </p:style>
+          <p:txBody>
+            <a:bodyPr rtlCol="0" anchor="ctr"/>
+            <a:lstStyle/>
+            <a:p>
+              <a:pPr algn="ctr"/>
+            </a:p>
+          </p:txBody>
+        </p:sp>
+      </p:grpSp>
       <p:pic>
         <p:nvPicPr>
-          <p:cNvPr id="10" name="Picture 9" descr="foundation-logo-white.png"/>
+          <p:cNvPr id="31" name="Picture 30" descr="foundation-logo-white.png"/>
           <p:cNvPicPr>
             <a:picLocks noChangeAspect="1"/>
           </p:cNvPicPr>
@@ -9318,6 +13833,435 @@
           </p:spPr>
         </p:pic>
       </p:grpSp>
+      <p:sp>
+        <p:nvSpPr>
+          <p:cNvPr id="18" name="Rectangle 17"/>
+          <p:cNvSpPr/>
+          <p:nvPr/>
+        </p:nvSpPr>
+        <p:spPr>
+          <a:xfrm rot="19680000">
+            <a:off x="619125" y="523875"/>
+            <a:ext cx="1619250" cy="476250"/>
+          </a:xfrm>
+          <a:prstGeom prst="rect">
+            <a:avLst/>
+          </a:prstGeom>
+          <a:solidFill>
+            <a:srgbClr val="DBE6A7">
+              <a:alpha val="70000"/>
+            </a:srgbClr>
+          </a:solidFill>
+          <a:ln>
+            <a:noFill/>
+          </a:ln>
+          <a:effectLst/>
+        </p:spPr>
+        <p:style>
+          <a:lnRef idx="1">
+            <a:schemeClr val="accent1"/>
+          </a:lnRef>
+          <a:fillRef idx="3">
+            <a:schemeClr val="accent1"/>
+          </a:fillRef>
+          <a:effectRef idx="2">
+            <a:schemeClr val="accent1"/>
+          </a:effectRef>
+          <a:fontRef idx="minor">
+            <a:schemeClr val="lt1"/>
+          </a:fontRef>
+        </p:style>
+        <p:txBody>
+          <a:bodyPr rtlCol="0" anchor="ctr"/>
+          <a:lstStyle/>
+          <a:p>
+            <a:pPr algn="ctr"/>
+          </a:p>
+        </p:txBody>
+      </p:sp>
+      <p:sp>
+        <p:nvSpPr>
+          <p:cNvPr id="19" name="Rectangle 18"/>
+          <p:cNvSpPr/>
+          <p:nvPr/>
+        </p:nvSpPr>
+        <p:spPr>
+          <a:xfrm rot="2160000">
+            <a:off x="8239125" y="952500"/>
+            <a:ext cx="1619250" cy="476250"/>
+          </a:xfrm>
+          <a:prstGeom prst="rect">
+            <a:avLst/>
+          </a:prstGeom>
+          <a:solidFill>
+            <a:srgbClr val="DBE6A7">
+              <a:alpha val="70000"/>
+            </a:srgbClr>
+          </a:solidFill>
+          <a:ln>
+            <a:noFill/>
+          </a:ln>
+          <a:effectLst/>
+        </p:spPr>
+        <p:style>
+          <a:lnRef idx="1">
+            <a:schemeClr val="accent1"/>
+          </a:lnRef>
+          <a:fillRef idx="3">
+            <a:schemeClr val="accent1"/>
+          </a:fillRef>
+          <a:effectRef idx="2">
+            <a:schemeClr val="accent1"/>
+          </a:effectRef>
+          <a:fontRef idx="minor">
+            <a:schemeClr val="lt1"/>
+          </a:fontRef>
+        </p:style>
+        <p:txBody>
+          <a:bodyPr rtlCol="0" anchor="ctr"/>
+          <a:lstStyle/>
+          <a:p>
+            <a:pPr algn="ctr"/>
+          </a:p>
+        </p:txBody>
+      </p:sp>
+      <p:grpSp>
+        <p:nvGrpSpPr>
+          <p:cNvPr id="20" name="Group 19"/>
+          <p:cNvGrpSpPr/>
+          <p:nvPr/>
+        </p:nvGrpSpPr>
+        <p:grpSpPr>
+          <a:xfrm rot="20400000">
+            <a:off x="0" y="0"/>
+            <a:ext cx="10001250" cy="12396787"/>
+            <a:chOff x="0" y="0"/>
+            <a:chExt cx="10001250" cy="12396787"/>
+          </a:xfrm>
+        </p:grpSpPr>
+        <p:sp>
+          <p:nvSpPr>
+            <p:cNvPr id="21" name="Arc 20"/>
+            <p:cNvSpPr/>
+            <p:nvPr/>
+          </p:nvSpPr>
+          <p:spPr>
+            <a:xfrm>
+              <a:off x="8343900" y="12012739"/>
+              <a:ext cx="242887" cy="156019"/>
+            </a:xfrm>
+            <a:prstGeom prst="arc">
+              <a:avLst/>
+            </a:prstGeom>
+            <a:noFill/>
+            <a:ln w="38100">
+              <a:solidFill>
+                <a:srgbClr val="156826"/>
+              </a:solidFill>
+            </a:ln>
+            <a:effectLst/>
+          </p:spPr>
+          <p:style>
+            <a:lnRef idx="1">
+              <a:schemeClr val="accent1"/>
+            </a:lnRef>
+            <a:fillRef idx="3">
+              <a:schemeClr val="accent1"/>
+            </a:fillRef>
+            <a:effectRef idx="2">
+              <a:schemeClr val="accent1"/>
+            </a:effectRef>
+            <a:fontRef idx="minor">
+              <a:schemeClr val="lt1"/>
+            </a:fontRef>
+          </p:style>
+          <p:txBody>
+            <a:bodyPr rtlCol="0" anchor="ctr"/>
+            <a:lstStyle/>
+            <a:p>
+              <a:pPr algn="ctr"/>
+            </a:p>
+          </p:txBody>
+        </p:sp>
+        <p:sp>
+          <p:nvSpPr>
+            <p:cNvPr id="22" name="Arc 21"/>
+            <p:cNvSpPr/>
+            <p:nvPr/>
+          </p:nvSpPr>
+          <p:spPr>
+            <a:xfrm rot="10800000">
+              <a:off x="8115300" y="12024741"/>
+              <a:ext cx="242887" cy="156019"/>
+            </a:xfrm>
+            <a:prstGeom prst="arc">
+              <a:avLst/>
+            </a:prstGeom>
+            <a:noFill/>
+            <a:ln w="38100">
+              <a:solidFill>
+                <a:srgbClr val="156826"/>
+              </a:solidFill>
+            </a:ln>
+            <a:effectLst/>
+          </p:spPr>
+          <p:style>
+            <a:lnRef idx="1">
+              <a:schemeClr val="accent1"/>
+            </a:lnRef>
+            <a:fillRef idx="3">
+              <a:schemeClr val="accent1"/>
+            </a:fillRef>
+            <a:effectRef idx="2">
+              <a:schemeClr val="accent1"/>
+            </a:effectRef>
+            <a:fontRef idx="minor">
+              <a:schemeClr val="lt1"/>
+            </a:fontRef>
+          </p:style>
+          <p:txBody>
+            <a:bodyPr rtlCol="0" anchor="ctr"/>
+            <a:lstStyle/>
+            <a:p>
+              <a:pPr algn="ctr"/>
+            </a:p>
+          </p:txBody>
+        </p:sp>
+        <p:sp>
+          <p:nvSpPr>
+            <p:cNvPr id="23" name="Arc 22"/>
+            <p:cNvSpPr/>
+            <p:nvPr/>
+          </p:nvSpPr>
+          <p:spPr>
+            <a:xfrm>
+              <a:off x="7886700" y="12012739"/>
+              <a:ext cx="242887" cy="156019"/>
+            </a:xfrm>
+            <a:prstGeom prst="arc">
+              <a:avLst/>
+            </a:prstGeom>
+            <a:noFill/>
+            <a:ln w="38100">
+              <a:solidFill>
+                <a:srgbClr val="156826"/>
+              </a:solidFill>
+            </a:ln>
+            <a:effectLst/>
+          </p:spPr>
+          <p:style>
+            <a:lnRef idx="1">
+              <a:schemeClr val="accent1"/>
+            </a:lnRef>
+            <a:fillRef idx="3">
+              <a:schemeClr val="accent1"/>
+            </a:fillRef>
+            <a:effectRef idx="2">
+              <a:schemeClr val="accent1"/>
+            </a:effectRef>
+            <a:fontRef idx="minor">
+              <a:schemeClr val="lt1"/>
+            </a:fontRef>
+          </p:style>
+          <p:txBody>
+            <a:bodyPr rtlCol="0" anchor="ctr"/>
+            <a:lstStyle/>
+            <a:p>
+              <a:pPr algn="ctr"/>
+            </a:p>
+          </p:txBody>
+        </p:sp>
+        <p:sp>
+          <p:nvSpPr>
+            <p:cNvPr id="24" name="Rounded Rectangle 23"/>
+            <p:cNvSpPr/>
+            <p:nvPr/>
+          </p:nvSpPr>
+          <p:spPr>
+            <a:xfrm>
+              <a:off x="8572500" y="11796712"/>
+              <a:ext cx="1428750" cy="600075"/>
+            </a:xfrm>
+            <a:prstGeom prst="roundRect">
+              <a:avLst>
+                <a:gd name="adj" fmla="val 50000"/>
+              </a:avLst>
+            </a:prstGeom>
+            <a:solidFill>
+              <a:srgbClr val="BFD8A6"/>
+            </a:solidFill>
+            <a:ln w="57150">
+              <a:solidFill>
+                <a:srgbClr val="FFFFFF"/>
+              </a:solidFill>
+            </a:ln>
+            <a:effectLst>
+              <a:outerShdw blurRad="228600" dist="76200" dir="5400000" algn="t" rotWithShape="0">
+                <a:srgbClr val="000000">
+                  <a:alpha val="30000"/>
+                </a:srgbClr>
+              </a:outerShdw>
+            </a:effectLst>
+          </p:spPr>
+          <p:style>
+            <a:lnRef idx="1">
+              <a:schemeClr val="accent1"/>
+            </a:lnRef>
+            <a:fillRef idx="3">
+              <a:schemeClr val="accent1"/>
+            </a:fillRef>
+            <a:effectRef idx="2">
+              <a:schemeClr val="accent1"/>
+            </a:effectRef>
+            <a:fontRef idx="minor">
+              <a:schemeClr val="lt1"/>
+            </a:fontRef>
+          </p:style>
+          <p:txBody>
+            <a:bodyPr rtlCol="0" anchor="ctr"/>
+            <a:lstStyle/>
+            <a:p>
+              <a:pPr algn="ctr"/>
+            </a:p>
+          </p:txBody>
+        </p:sp>
+        <p:sp>
+          <p:nvSpPr>
+            <p:cNvPr id="25" name="Oval 24"/>
+            <p:cNvSpPr/>
+            <p:nvPr/>
+          </p:nvSpPr>
+          <p:spPr>
+            <a:xfrm>
+              <a:off x="9331685" y="12044016"/>
+              <a:ext cx="45460" cy="45460"/>
+            </a:xfrm>
+            <a:prstGeom prst="ellipse">
+              <a:avLst/>
+            </a:prstGeom>
+            <a:solidFill>
+              <a:srgbClr val="22371F"/>
+            </a:solidFill>
+            <a:ln>
+              <a:noFill/>
+            </a:ln>
+            <a:effectLst/>
+          </p:spPr>
+          <p:style>
+            <a:lnRef idx="1">
+              <a:schemeClr val="accent1"/>
+            </a:lnRef>
+            <a:fillRef idx="3">
+              <a:schemeClr val="accent1"/>
+            </a:fillRef>
+            <a:effectRef idx="2">
+              <a:schemeClr val="accent1"/>
+            </a:effectRef>
+            <a:fontRef idx="minor">
+              <a:schemeClr val="lt1"/>
+            </a:fontRef>
+          </p:style>
+          <p:txBody>
+            <a:bodyPr rtlCol="0" anchor="ctr"/>
+            <a:lstStyle/>
+            <a:p>
+              <a:pPr algn="ctr"/>
+            </a:p>
+          </p:txBody>
+        </p:sp>
+        <p:sp>
+          <p:nvSpPr>
+            <p:cNvPr id="26" name="Oval 25"/>
+            <p:cNvSpPr/>
+            <p:nvPr/>
+          </p:nvSpPr>
+          <p:spPr>
+            <a:xfrm>
+              <a:off x="9539503" y="12044016"/>
+              <a:ext cx="45460" cy="45460"/>
+            </a:xfrm>
+            <a:prstGeom prst="ellipse">
+              <a:avLst/>
+            </a:prstGeom>
+            <a:solidFill>
+              <a:srgbClr val="22371F"/>
+            </a:solidFill>
+            <a:ln>
+              <a:noFill/>
+            </a:ln>
+            <a:effectLst/>
+          </p:spPr>
+          <p:style>
+            <a:lnRef idx="1">
+              <a:schemeClr val="accent1"/>
+            </a:lnRef>
+            <a:fillRef idx="3">
+              <a:schemeClr val="accent1"/>
+            </a:fillRef>
+            <a:effectRef idx="2">
+              <a:schemeClr val="accent1"/>
+            </a:effectRef>
+            <a:fontRef idx="minor">
+              <a:schemeClr val="lt1"/>
+            </a:fontRef>
+          </p:style>
+          <p:txBody>
+            <a:bodyPr rtlCol="0" anchor="ctr"/>
+            <a:lstStyle/>
+            <a:p>
+              <a:pPr algn="ctr"/>
+            </a:p>
+          </p:txBody>
+        </p:sp>
+        <p:sp>
+          <p:nvSpPr>
+            <p:cNvPr id="27" name="Block Arc 26"/>
+            <p:cNvSpPr/>
+            <p:nvPr/>
+          </p:nvSpPr>
+          <p:spPr>
+            <a:xfrm rot="10800000">
+              <a:off x="9386887" y="12079734"/>
+              <a:ext cx="142874" cy="103909"/>
+            </a:xfrm>
+            <a:prstGeom prst="blockArc">
+              <a:avLst>
+                <a:gd name="adj1" fmla="val 10800000"/>
+                <a:gd name="adj2" fmla="val 0"/>
+                <a:gd name="adj3" fmla="val 18000"/>
+              </a:avLst>
+            </a:prstGeom>
+            <a:solidFill>
+              <a:srgbClr val="22371F"/>
+            </a:solidFill>
+            <a:ln>
+              <a:noFill/>
+            </a:ln>
+            <a:effectLst/>
+          </p:spPr>
+          <p:style>
+            <a:lnRef idx="1">
+              <a:schemeClr val="accent1"/>
+            </a:lnRef>
+            <a:fillRef idx="3">
+              <a:schemeClr val="accent1"/>
+            </a:fillRef>
+            <a:effectRef idx="2">
+              <a:schemeClr val="accent1"/>
+            </a:effectRef>
+            <a:fontRef idx="minor">
+              <a:schemeClr val="lt1"/>
+            </a:fontRef>
+          </p:style>
+          <p:txBody>
+            <a:bodyPr rtlCol="0" anchor="ctr"/>
+            <a:lstStyle/>
+            <a:p>
+              <a:pPr algn="ctr"/>
+            </a:p>
+          </p:txBody>
+        </p:sp>
+      </p:grpSp>
     </p:spTree>
   </p:cSld>
   <p:clrMapOvr>
@@ -9412,7 +14356,7 @@
         </p:sp>
         <p:pic>
           <p:nvPicPr>
-            <p:cNvPr id="4" name="Picture 3" descr="3922740342659304466.jpg"/>
+            <p:cNvPr id="4" name="Picture 3" descr="6711507890228017999.jpg"/>
             <p:cNvPicPr>
               <a:picLocks noChangeAspect="1"/>
             </p:cNvPicPr>
@@ -9889,6 +14833,525 @@
             </a:prstGeom>
           </p:spPr>
         </p:pic>
+      </p:grpSp>
+      <p:sp>
+        <p:nvSpPr>
+          <p:cNvPr id="17" name="Rectangle 16"/>
+          <p:cNvSpPr/>
+          <p:nvPr/>
+        </p:nvSpPr>
+        <p:spPr>
+          <a:xfrm rot="19680000">
+            <a:off x="619125" y="523875"/>
+            <a:ext cx="1619250" cy="476250"/>
+          </a:xfrm>
+          <a:prstGeom prst="rect">
+            <a:avLst/>
+          </a:prstGeom>
+          <a:solidFill>
+            <a:srgbClr val="DBE6A7">
+              <a:alpha val="70000"/>
+            </a:srgbClr>
+          </a:solidFill>
+          <a:ln>
+            <a:noFill/>
+          </a:ln>
+          <a:effectLst/>
+        </p:spPr>
+        <p:style>
+          <a:lnRef idx="1">
+            <a:schemeClr val="accent1"/>
+          </a:lnRef>
+          <a:fillRef idx="3">
+            <a:schemeClr val="accent1"/>
+          </a:fillRef>
+          <a:effectRef idx="2">
+            <a:schemeClr val="accent1"/>
+          </a:effectRef>
+          <a:fontRef idx="minor">
+            <a:schemeClr val="lt1"/>
+          </a:fontRef>
+        </p:style>
+        <p:txBody>
+          <a:bodyPr rtlCol="0" anchor="ctr"/>
+          <a:lstStyle/>
+          <a:p>
+            <a:pPr algn="ctr"/>
+          </a:p>
+        </p:txBody>
+      </p:sp>
+      <p:sp>
+        <p:nvSpPr>
+          <p:cNvPr id="18" name="Rectangle 17"/>
+          <p:cNvSpPr/>
+          <p:nvPr/>
+        </p:nvSpPr>
+        <p:spPr>
+          <a:xfrm rot="2160000">
+            <a:off x="8239125" y="952500"/>
+            <a:ext cx="1619250" cy="476250"/>
+          </a:xfrm>
+          <a:prstGeom prst="rect">
+            <a:avLst/>
+          </a:prstGeom>
+          <a:solidFill>
+            <a:srgbClr val="DBE6A7">
+              <a:alpha val="70000"/>
+            </a:srgbClr>
+          </a:solidFill>
+          <a:ln>
+            <a:noFill/>
+          </a:ln>
+          <a:effectLst/>
+        </p:spPr>
+        <p:style>
+          <a:lnRef idx="1">
+            <a:schemeClr val="accent1"/>
+          </a:lnRef>
+          <a:fillRef idx="3">
+            <a:schemeClr val="accent1"/>
+          </a:fillRef>
+          <a:effectRef idx="2">
+            <a:schemeClr val="accent1"/>
+          </a:effectRef>
+          <a:fontRef idx="minor">
+            <a:schemeClr val="lt1"/>
+          </a:fontRef>
+        </p:style>
+        <p:txBody>
+          <a:bodyPr rtlCol="0" anchor="ctr"/>
+          <a:lstStyle/>
+          <a:p>
+            <a:pPr algn="ctr"/>
+          </a:p>
+        </p:txBody>
+      </p:sp>
+      <p:grpSp>
+        <p:nvGrpSpPr>
+          <p:cNvPr id="19" name="Group 18"/>
+          <p:cNvGrpSpPr/>
+          <p:nvPr/>
+        </p:nvGrpSpPr>
+        <p:grpSpPr>
+          <a:xfrm rot="600000">
+            <a:off x="0" y="0"/>
+            <a:ext cx="9875520" cy="12830175"/>
+            <a:chOff x="0" y="0"/>
+            <a:chExt cx="9875520" cy="12830175"/>
+          </a:xfrm>
+        </p:grpSpPr>
+        <p:sp>
+          <p:nvSpPr>
+            <p:cNvPr id="20" name="Rectangle 19"/>
+            <p:cNvSpPr/>
+            <p:nvPr/>
+          </p:nvSpPr>
+          <p:spPr>
+            <a:xfrm>
+              <a:off x="9401175" y="11715750"/>
+              <a:ext cx="57150" cy="1114425"/>
+            </a:xfrm>
+            <a:prstGeom prst="rect">
+              <a:avLst/>
+            </a:prstGeom>
+            <a:solidFill>
+              <a:srgbClr val="7FA05A"/>
+            </a:solidFill>
+            <a:ln>
+              <a:noFill/>
+            </a:ln>
+            <a:effectLst/>
+          </p:spPr>
+          <p:style>
+            <a:lnRef idx="1">
+              <a:schemeClr val="accent1"/>
+            </a:lnRef>
+            <a:fillRef idx="3">
+              <a:schemeClr val="accent1"/>
+            </a:fillRef>
+            <a:effectRef idx="2">
+              <a:schemeClr val="accent1"/>
+            </a:effectRef>
+            <a:fontRef idx="minor">
+              <a:schemeClr val="lt1"/>
+            </a:fontRef>
+          </p:style>
+          <p:txBody>
+            <a:bodyPr rtlCol="0" anchor="ctr"/>
+            <a:lstStyle/>
+            <a:p>
+              <a:pPr algn="ctr"/>
+            </a:p>
+          </p:txBody>
+        </p:sp>
+        <p:sp>
+          <p:nvSpPr>
+            <p:cNvPr id="21" name="Oval 20"/>
+            <p:cNvSpPr/>
+            <p:nvPr/>
+          </p:nvSpPr>
+          <p:spPr>
+            <a:xfrm rot="19800000">
+              <a:off x="9448800" y="12272962"/>
+              <a:ext cx="385762" cy="171450"/>
+            </a:xfrm>
+            <a:prstGeom prst="ellipse">
+              <a:avLst/>
+            </a:prstGeom>
+            <a:solidFill>
+              <a:srgbClr val="59A66C"/>
+            </a:solidFill>
+            <a:ln w="57150">
+              <a:solidFill>
+                <a:srgbClr val="FFFFFF"/>
+              </a:solidFill>
+            </a:ln>
+            <a:effectLst/>
+          </p:spPr>
+          <p:style>
+            <a:lnRef idx="1">
+              <a:schemeClr val="accent1"/>
+            </a:lnRef>
+            <a:fillRef idx="3">
+              <a:schemeClr val="accent1"/>
+            </a:fillRef>
+            <a:effectRef idx="2">
+              <a:schemeClr val="accent1"/>
+            </a:effectRef>
+            <a:fontRef idx="minor">
+              <a:schemeClr val="lt1"/>
+            </a:fontRef>
+          </p:style>
+          <p:txBody>
+            <a:bodyPr rtlCol="0" anchor="ctr"/>
+            <a:lstStyle/>
+            <a:p>
+              <a:pPr algn="ctr"/>
+            </a:p>
+          </p:txBody>
+        </p:sp>
+        <p:sp>
+          <p:nvSpPr>
+            <p:cNvPr id="22" name="Oval 21"/>
+            <p:cNvSpPr/>
+            <p:nvPr/>
+          </p:nvSpPr>
+          <p:spPr>
+            <a:xfrm>
+              <a:off x="9515475" y="11595735"/>
+              <a:ext cx="360045" cy="240030"/>
+            </a:xfrm>
+            <a:prstGeom prst="ellipse">
+              <a:avLst/>
+            </a:prstGeom>
+            <a:solidFill>
+              <a:srgbClr val="F2CF5B"/>
+            </a:solidFill>
+            <a:ln w="38100">
+              <a:solidFill>
+                <a:srgbClr val="FFFFFF"/>
+              </a:solidFill>
+            </a:ln>
+            <a:effectLst/>
+          </p:spPr>
+          <p:style>
+            <a:lnRef idx="1">
+              <a:schemeClr val="accent1"/>
+            </a:lnRef>
+            <a:fillRef idx="3">
+              <a:schemeClr val="accent1"/>
+            </a:fillRef>
+            <a:effectRef idx="2">
+              <a:schemeClr val="accent1"/>
+            </a:effectRef>
+            <a:fontRef idx="minor">
+              <a:schemeClr val="lt1"/>
+            </a:fontRef>
+          </p:style>
+          <p:txBody>
+            <a:bodyPr rtlCol="0" anchor="ctr"/>
+            <a:lstStyle/>
+            <a:p>
+              <a:pPr algn="ctr"/>
+            </a:p>
+          </p:txBody>
+        </p:sp>
+        <p:sp>
+          <p:nvSpPr>
+            <p:cNvPr id="23" name="Oval 22"/>
+            <p:cNvSpPr/>
+            <p:nvPr/>
+          </p:nvSpPr>
+          <p:spPr>
+            <a:xfrm rot="3600000">
+              <a:off x="9382601" y="11825879"/>
+              <a:ext cx="360045" cy="240030"/>
+            </a:xfrm>
+            <a:prstGeom prst="ellipse">
+              <a:avLst/>
+            </a:prstGeom>
+            <a:solidFill>
+              <a:srgbClr val="F2CF5B"/>
+            </a:solidFill>
+            <a:ln w="38100">
+              <a:solidFill>
+                <a:srgbClr val="FFFFFF"/>
+              </a:solidFill>
+            </a:ln>
+            <a:effectLst/>
+          </p:spPr>
+          <p:style>
+            <a:lnRef idx="1">
+              <a:schemeClr val="accent1"/>
+            </a:lnRef>
+            <a:fillRef idx="3">
+              <a:schemeClr val="accent1"/>
+            </a:fillRef>
+            <a:effectRef idx="2">
+              <a:schemeClr val="accent1"/>
+            </a:effectRef>
+            <a:fontRef idx="minor">
+              <a:schemeClr val="lt1"/>
+            </a:fontRef>
+          </p:style>
+          <p:txBody>
+            <a:bodyPr rtlCol="0" anchor="ctr"/>
+            <a:lstStyle/>
+            <a:p>
+              <a:pPr algn="ctr"/>
+            </a:p>
+          </p:txBody>
+        </p:sp>
+        <p:sp>
+          <p:nvSpPr>
+            <p:cNvPr id="24" name="Oval 23"/>
+            <p:cNvSpPr/>
+            <p:nvPr/>
+          </p:nvSpPr>
+          <p:spPr>
+            <a:xfrm rot="7200000">
+              <a:off x="9116853" y="11825879"/>
+              <a:ext cx="360045" cy="240030"/>
+            </a:xfrm>
+            <a:prstGeom prst="ellipse">
+              <a:avLst/>
+            </a:prstGeom>
+            <a:solidFill>
+              <a:srgbClr val="F2CF5B"/>
+            </a:solidFill>
+            <a:ln w="38100">
+              <a:solidFill>
+                <a:srgbClr val="FFFFFF"/>
+              </a:solidFill>
+            </a:ln>
+            <a:effectLst/>
+          </p:spPr>
+          <p:style>
+            <a:lnRef idx="1">
+              <a:schemeClr val="accent1"/>
+            </a:lnRef>
+            <a:fillRef idx="3">
+              <a:schemeClr val="accent1"/>
+            </a:fillRef>
+            <a:effectRef idx="2">
+              <a:schemeClr val="accent1"/>
+            </a:effectRef>
+            <a:fontRef idx="minor">
+              <a:schemeClr val="lt1"/>
+            </a:fontRef>
+          </p:style>
+          <p:txBody>
+            <a:bodyPr rtlCol="0" anchor="ctr"/>
+            <a:lstStyle/>
+            <a:p>
+              <a:pPr algn="ctr"/>
+            </a:p>
+          </p:txBody>
+        </p:sp>
+        <p:sp>
+          <p:nvSpPr>
+            <p:cNvPr id="25" name="Oval 24"/>
+            <p:cNvSpPr/>
+            <p:nvPr/>
+          </p:nvSpPr>
+          <p:spPr>
+            <a:xfrm rot="10800000">
+              <a:off x="8983980" y="11595735"/>
+              <a:ext cx="360045" cy="240030"/>
+            </a:xfrm>
+            <a:prstGeom prst="ellipse">
+              <a:avLst/>
+            </a:prstGeom>
+            <a:solidFill>
+              <a:srgbClr val="F2CF5B"/>
+            </a:solidFill>
+            <a:ln w="38100">
+              <a:solidFill>
+                <a:srgbClr val="FFFFFF"/>
+              </a:solidFill>
+            </a:ln>
+            <a:effectLst/>
+          </p:spPr>
+          <p:style>
+            <a:lnRef idx="1">
+              <a:schemeClr val="accent1"/>
+            </a:lnRef>
+            <a:fillRef idx="3">
+              <a:schemeClr val="accent1"/>
+            </a:fillRef>
+            <a:effectRef idx="2">
+              <a:schemeClr val="accent1"/>
+            </a:effectRef>
+            <a:fontRef idx="minor">
+              <a:schemeClr val="lt1"/>
+            </a:fontRef>
+          </p:style>
+          <p:txBody>
+            <a:bodyPr rtlCol="0" anchor="ctr"/>
+            <a:lstStyle/>
+            <a:p>
+              <a:pPr algn="ctr"/>
+            </a:p>
+          </p:txBody>
+        </p:sp>
+        <p:sp>
+          <p:nvSpPr>
+            <p:cNvPr id="26" name="Oval 25"/>
+            <p:cNvSpPr/>
+            <p:nvPr/>
+          </p:nvSpPr>
+          <p:spPr>
+            <a:xfrm rot="14400000">
+              <a:off x="9116853" y="11365590"/>
+              <a:ext cx="360045" cy="240030"/>
+            </a:xfrm>
+            <a:prstGeom prst="ellipse">
+              <a:avLst/>
+            </a:prstGeom>
+            <a:solidFill>
+              <a:srgbClr val="F2CF5B"/>
+            </a:solidFill>
+            <a:ln w="38100">
+              <a:solidFill>
+                <a:srgbClr val="FFFFFF"/>
+              </a:solidFill>
+            </a:ln>
+            <a:effectLst/>
+          </p:spPr>
+          <p:style>
+            <a:lnRef idx="1">
+              <a:schemeClr val="accent1"/>
+            </a:lnRef>
+            <a:fillRef idx="3">
+              <a:schemeClr val="accent1"/>
+            </a:fillRef>
+            <a:effectRef idx="2">
+              <a:schemeClr val="accent1"/>
+            </a:effectRef>
+            <a:fontRef idx="minor">
+              <a:schemeClr val="lt1"/>
+            </a:fontRef>
+          </p:style>
+          <p:txBody>
+            <a:bodyPr rtlCol="0" anchor="ctr"/>
+            <a:lstStyle/>
+            <a:p>
+              <a:pPr algn="ctr"/>
+            </a:p>
+          </p:txBody>
+        </p:sp>
+        <p:sp>
+          <p:nvSpPr>
+            <p:cNvPr id="27" name="Oval 26"/>
+            <p:cNvSpPr/>
+            <p:nvPr/>
+          </p:nvSpPr>
+          <p:spPr>
+            <a:xfrm rot="18000000">
+              <a:off x="9382601" y="11365590"/>
+              <a:ext cx="360045" cy="240030"/>
+            </a:xfrm>
+            <a:prstGeom prst="ellipse">
+              <a:avLst/>
+            </a:prstGeom>
+            <a:solidFill>
+              <a:srgbClr val="F2CF5B"/>
+            </a:solidFill>
+            <a:ln w="38100">
+              <a:solidFill>
+                <a:srgbClr val="FFFFFF"/>
+              </a:solidFill>
+            </a:ln>
+            <a:effectLst/>
+          </p:spPr>
+          <p:style>
+            <a:lnRef idx="1">
+              <a:schemeClr val="accent1"/>
+            </a:lnRef>
+            <a:fillRef idx="3">
+              <a:schemeClr val="accent1"/>
+            </a:fillRef>
+            <a:effectRef idx="2">
+              <a:schemeClr val="accent1"/>
+            </a:effectRef>
+            <a:fontRef idx="minor">
+              <a:schemeClr val="lt1"/>
+            </a:fontRef>
+          </p:style>
+          <p:txBody>
+            <a:bodyPr rtlCol="0" anchor="ctr"/>
+            <a:lstStyle/>
+            <a:p>
+              <a:pPr algn="ctr"/>
+            </a:p>
+          </p:txBody>
+        </p:sp>
+        <p:sp>
+          <p:nvSpPr>
+            <p:cNvPr id="28" name="Oval 27"/>
+            <p:cNvSpPr/>
+            <p:nvPr/>
+          </p:nvSpPr>
+          <p:spPr>
+            <a:xfrm>
+              <a:off x="9266872" y="11552872"/>
+              <a:ext cx="325755" cy="325755"/>
+            </a:xfrm>
+            <a:prstGeom prst="ellipse">
+              <a:avLst/>
+            </a:prstGeom>
+            <a:solidFill>
+              <a:srgbClr val="8C6A4E"/>
+            </a:solidFill>
+            <a:ln w="38100">
+              <a:solidFill>
+                <a:srgbClr val="FFFFFF"/>
+              </a:solidFill>
+            </a:ln>
+            <a:effectLst/>
+          </p:spPr>
+          <p:style>
+            <a:lnRef idx="1">
+              <a:schemeClr val="accent1"/>
+            </a:lnRef>
+            <a:fillRef idx="3">
+              <a:schemeClr val="accent1"/>
+            </a:fillRef>
+            <a:effectRef idx="2">
+              <a:schemeClr val="accent1"/>
+            </a:effectRef>
+            <a:fontRef idx="minor">
+              <a:schemeClr val="lt1"/>
+            </a:fontRef>
+          </p:style>
+          <p:txBody>
+            <a:bodyPr rtlCol="0" anchor="ctr"/>
+            <a:lstStyle/>
+            <a:p>
+              <a:pPr algn="ctr"/>
+            </a:p>
+          </p:txBody>
+        </p:sp>
       </p:grpSp>
     </p:spTree>
   </p:cSld>
@@ -9984,7 +15447,7 @@
         </p:sp>
         <p:pic>
           <p:nvPicPr>
-            <p:cNvPr id="4" name="Picture 3" descr="560209301084620092.jpg"/>
+            <p:cNvPr id="4" name="Picture 3" descr="6242569719062395373.jpg"/>
             <p:cNvPicPr>
               <a:picLocks noChangeAspect="1"/>
             </p:cNvPicPr>
@@ -10461,6 +15924,437 @@
             </a:prstGeom>
           </p:spPr>
         </p:pic>
+      </p:grpSp>
+      <p:sp>
+        <p:nvSpPr>
+          <p:cNvPr id="17" name="Rectangle 16"/>
+          <p:cNvSpPr/>
+          <p:nvPr/>
+        </p:nvSpPr>
+        <p:spPr>
+          <a:xfrm rot="19680000">
+            <a:off x="619125" y="523875"/>
+            <a:ext cx="1619250" cy="476250"/>
+          </a:xfrm>
+          <a:prstGeom prst="rect">
+            <a:avLst/>
+          </a:prstGeom>
+          <a:solidFill>
+            <a:srgbClr val="DBE6A7">
+              <a:alpha val="70000"/>
+            </a:srgbClr>
+          </a:solidFill>
+          <a:ln>
+            <a:noFill/>
+          </a:ln>
+          <a:effectLst/>
+        </p:spPr>
+        <p:style>
+          <a:lnRef idx="1">
+            <a:schemeClr val="accent1"/>
+          </a:lnRef>
+          <a:fillRef idx="3">
+            <a:schemeClr val="accent1"/>
+          </a:fillRef>
+          <a:effectRef idx="2">
+            <a:schemeClr val="accent1"/>
+          </a:effectRef>
+          <a:fontRef idx="minor">
+            <a:schemeClr val="lt1"/>
+          </a:fontRef>
+        </p:style>
+        <p:txBody>
+          <a:bodyPr rtlCol="0" anchor="ctr"/>
+          <a:lstStyle/>
+          <a:p>
+            <a:pPr algn="ctr"/>
+          </a:p>
+        </p:txBody>
+      </p:sp>
+      <p:sp>
+        <p:nvSpPr>
+          <p:cNvPr id="18" name="Rectangle 17"/>
+          <p:cNvSpPr/>
+          <p:nvPr/>
+        </p:nvSpPr>
+        <p:spPr>
+          <a:xfrm rot="2160000">
+            <a:off x="8239125" y="952500"/>
+            <a:ext cx="1619250" cy="476250"/>
+          </a:xfrm>
+          <a:prstGeom prst="rect">
+            <a:avLst/>
+          </a:prstGeom>
+          <a:solidFill>
+            <a:srgbClr val="DBE6A7">
+              <a:alpha val="70000"/>
+            </a:srgbClr>
+          </a:solidFill>
+          <a:ln>
+            <a:noFill/>
+          </a:ln>
+          <a:effectLst/>
+        </p:spPr>
+        <p:style>
+          <a:lnRef idx="1">
+            <a:schemeClr val="accent1"/>
+          </a:lnRef>
+          <a:fillRef idx="3">
+            <a:schemeClr val="accent1"/>
+          </a:fillRef>
+          <a:effectRef idx="2">
+            <a:schemeClr val="accent1"/>
+          </a:effectRef>
+          <a:fontRef idx="minor">
+            <a:schemeClr val="lt1"/>
+          </a:fontRef>
+        </p:style>
+        <p:txBody>
+          <a:bodyPr rtlCol="0" anchor="ctr"/>
+          <a:lstStyle/>
+          <a:p>
+            <a:pPr algn="ctr"/>
+          </a:p>
+        </p:txBody>
+      </p:sp>
+      <p:grpSp>
+        <p:nvGrpSpPr>
+          <p:cNvPr id="19" name="Group 18"/>
+          <p:cNvGrpSpPr/>
+          <p:nvPr/>
+        </p:nvGrpSpPr>
+        <p:grpSpPr>
+          <a:xfrm rot="480000">
+            <a:off x="0" y="0"/>
+            <a:ext cx="10096500" cy="12592050"/>
+            <a:chOff x="0" y="0"/>
+            <a:chExt cx="10096500" cy="12592050"/>
+          </a:xfrm>
+        </p:grpSpPr>
+        <p:sp>
+          <p:nvSpPr>
+            <p:cNvPr id="20" name="Rectangle 19"/>
+            <p:cNvSpPr/>
+            <p:nvPr/>
+          </p:nvSpPr>
+          <p:spPr>
+            <a:xfrm>
+              <a:off x="9296400" y="11342370"/>
+              <a:ext cx="76200" cy="944880"/>
+            </a:xfrm>
+            <a:prstGeom prst="rect">
+              <a:avLst/>
+            </a:prstGeom>
+            <a:solidFill>
+              <a:srgbClr val="7FA05A"/>
+            </a:solidFill>
+            <a:ln>
+              <a:noFill/>
+            </a:ln>
+            <a:effectLst/>
+          </p:spPr>
+          <p:style>
+            <a:lnRef idx="1">
+              <a:schemeClr val="accent1"/>
+            </a:lnRef>
+            <a:fillRef idx="3">
+              <a:schemeClr val="accent1"/>
+            </a:fillRef>
+            <a:effectRef idx="2">
+              <a:schemeClr val="accent1"/>
+            </a:effectRef>
+            <a:fontRef idx="minor">
+              <a:schemeClr val="lt1"/>
+            </a:fontRef>
+          </p:style>
+          <p:txBody>
+            <a:bodyPr rtlCol="0" anchor="ctr"/>
+            <a:lstStyle/>
+            <a:p>
+              <a:pPr algn="ctr"/>
+            </a:p>
+          </p:txBody>
+        </p:sp>
+        <p:sp>
+          <p:nvSpPr>
+            <p:cNvPr id="21" name="Oval 20"/>
+            <p:cNvSpPr/>
+            <p:nvPr/>
+          </p:nvSpPr>
+          <p:spPr>
+            <a:xfrm rot="8700000">
+              <a:off x="8724900" y="11129010"/>
+              <a:ext cx="609600" cy="304800"/>
+            </a:xfrm>
+            <a:prstGeom prst="ellipse">
+              <a:avLst/>
+            </a:prstGeom>
+            <a:solidFill>
+              <a:srgbClr val="59A66C"/>
+            </a:solidFill>
+            <a:ln w="57150">
+              <a:solidFill>
+                <a:srgbClr val="FFFFFF"/>
+              </a:solidFill>
+            </a:ln>
+            <a:effectLst/>
+          </p:spPr>
+          <p:style>
+            <a:lnRef idx="1">
+              <a:schemeClr val="accent1"/>
+            </a:lnRef>
+            <a:fillRef idx="3">
+              <a:schemeClr val="accent1"/>
+            </a:fillRef>
+            <a:effectRef idx="2">
+              <a:schemeClr val="accent1"/>
+            </a:effectRef>
+            <a:fontRef idx="minor">
+              <a:schemeClr val="lt1"/>
+            </a:fontRef>
+          </p:style>
+          <p:txBody>
+            <a:bodyPr rtlCol="0" anchor="ctr"/>
+            <a:lstStyle/>
+            <a:p>
+              <a:pPr algn="ctr"/>
+            </a:p>
+          </p:txBody>
+        </p:sp>
+        <p:sp>
+          <p:nvSpPr>
+            <p:cNvPr id="22" name="Oval 21"/>
+            <p:cNvSpPr/>
+            <p:nvPr/>
+          </p:nvSpPr>
+          <p:spPr>
+            <a:xfrm rot="2100000">
+              <a:off x="9334500" y="11129010"/>
+              <a:ext cx="609600" cy="304800"/>
+            </a:xfrm>
+            <a:prstGeom prst="ellipse">
+              <a:avLst/>
+            </a:prstGeom>
+            <a:solidFill>
+              <a:srgbClr val="59A66C"/>
+            </a:solidFill>
+            <a:ln w="57150">
+              <a:solidFill>
+                <a:srgbClr val="FFFFFF"/>
+              </a:solidFill>
+            </a:ln>
+            <a:effectLst/>
+          </p:spPr>
+          <p:style>
+            <a:lnRef idx="1">
+              <a:schemeClr val="accent1"/>
+            </a:lnRef>
+            <a:fillRef idx="3">
+              <a:schemeClr val="accent1"/>
+            </a:fillRef>
+            <a:effectRef idx="2">
+              <a:schemeClr val="accent1"/>
+            </a:effectRef>
+            <a:fontRef idx="minor">
+              <a:schemeClr val="lt1"/>
+            </a:fontRef>
+          </p:style>
+          <p:txBody>
+            <a:bodyPr rtlCol="0" anchor="ctr"/>
+            <a:lstStyle/>
+            <a:p>
+              <a:pPr algn="ctr"/>
+            </a:p>
+          </p:txBody>
+        </p:sp>
+        <p:sp>
+          <p:nvSpPr>
+            <p:cNvPr id="23" name="Oval 22"/>
+            <p:cNvSpPr/>
+            <p:nvPr/>
+          </p:nvSpPr>
+          <p:spPr>
+            <a:xfrm>
+              <a:off x="8572500" y="12134850"/>
+              <a:ext cx="1524000" cy="457200"/>
+            </a:xfrm>
+            <a:prstGeom prst="ellipse">
+              <a:avLst/>
+            </a:prstGeom>
+            <a:solidFill>
+              <a:srgbClr val="4F3433"/>
+            </a:solidFill>
+            <a:ln w="57150">
+              <a:solidFill>
+                <a:srgbClr val="FFFFFF"/>
+              </a:solidFill>
+            </a:ln>
+            <a:effectLst>
+              <a:outerShdw blurRad="228600" dist="76200" dir="5400000" algn="t" rotWithShape="0">
+                <a:srgbClr val="000000">
+                  <a:alpha val="30000"/>
+                </a:srgbClr>
+              </a:outerShdw>
+            </a:effectLst>
+          </p:spPr>
+          <p:style>
+            <a:lnRef idx="1">
+              <a:schemeClr val="accent1"/>
+            </a:lnRef>
+            <a:fillRef idx="3">
+              <a:schemeClr val="accent1"/>
+            </a:fillRef>
+            <a:effectRef idx="2">
+              <a:schemeClr val="accent1"/>
+            </a:effectRef>
+            <a:fontRef idx="minor">
+              <a:schemeClr val="lt1"/>
+            </a:fontRef>
+          </p:style>
+          <p:txBody>
+            <a:bodyPr rtlCol="0" anchor="ctr"/>
+            <a:lstStyle/>
+            <a:p>
+              <a:pPr algn="ctr"/>
+            </a:p>
+          </p:txBody>
+        </p:sp>
+        <p:sp>
+          <p:nvSpPr>
+            <p:cNvPr id="24" name="Oval 23"/>
+            <p:cNvSpPr/>
+            <p:nvPr/>
+          </p:nvSpPr>
+          <p:spPr>
+            <a:xfrm>
+              <a:off x="9220200" y="12312454"/>
+              <a:ext cx="41030" cy="41030"/>
+            </a:xfrm>
+            <a:prstGeom prst="ellipse">
+              <a:avLst/>
+            </a:prstGeom>
+            <a:solidFill>
+              <a:srgbClr val="F4F1EA"/>
+            </a:solidFill>
+            <a:ln>
+              <a:noFill/>
+            </a:ln>
+            <a:effectLst/>
+          </p:spPr>
+          <p:style>
+            <a:lnRef idx="1">
+              <a:schemeClr val="accent1"/>
+            </a:lnRef>
+            <a:fillRef idx="3">
+              <a:schemeClr val="accent1"/>
+            </a:fillRef>
+            <a:effectRef idx="2">
+              <a:schemeClr val="accent1"/>
+            </a:effectRef>
+            <a:fontRef idx="minor">
+              <a:schemeClr val="lt1"/>
+            </a:fontRef>
+          </p:style>
+          <p:txBody>
+            <a:bodyPr rtlCol="0" anchor="ctr"/>
+            <a:lstStyle/>
+            <a:p>
+              <a:pPr algn="ctr"/>
+            </a:p>
+          </p:txBody>
+        </p:sp>
+        <p:sp>
+          <p:nvSpPr>
+            <p:cNvPr id="25" name="Oval 24"/>
+            <p:cNvSpPr/>
+            <p:nvPr/>
+          </p:nvSpPr>
+          <p:spPr>
+            <a:xfrm>
+              <a:off x="9407769" y="12312454"/>
+              <a:ext cx="41030" cy="41030"/>
+            </a:xfrm>
+            <a:prstGeom prst="ellipse">
+              <a:avLst/>
+            </a:prstGeom>
+            <a:solidFill>
+              <a:srgbClr val="F4F1EA"/>
+            </a:solidFill>
+            <a:ln>
+              <a:noFill/>
+            </a:ln>
+            <a:effectLst/>
+          </p:spPr>
+          <p:style>
+            <a:lnRef idx="1">
+              <a:schemeClr val="accent1"/>
+            </a:lnRef>
+            <a:fillRef idx="3">
+              <a:schemeClr val="accent1"/>
+            </a:fillRef>
+            <a:effectRef idx="2">
+              <a:schemeClr val="accent1"/>
+            </a:effectRef>
+            <a:fontRef idx="minor">
+              <a:schemeClr val="lt1"/>
+            </a:fontRef>
+          </p:style>
+          <p:txBody>
+            <a:bodyPr rtlCol="0" anchor="ctr"/>
+            <a:lstStyle/>
+            <a:p>
+              <a:pPr algn="ctr"/>
+            </a:p>
+          </p:txBody>
+        </p:sp>
+        <p:sp>
+          <p:nvSpPr>
+            <p:cNvPr id="26" name="Block Arc 25"/>
+            <p:cNvSpPr/>
+            <p:nvPr/>
+          </p:nvSpPr>
+          <p:spPr>
+            <a:xfrm rot="10800000">
+              <a:off x="9270023" y="12344693"/>
+              <a:ext cx="128953" cy="93784"/>
+            </a:xfrm>
+            <a:prstGeom prst="blockArc">
+              <a:avLst>
+                <a:gd name="adj1" fmla="val 10800000"/>
+                <a:gd name="adj2" fmla="val 0"/>
+                <a:gd name="adj3" fmla="val 18000"/>
+              </a:avLst>
+            </a:prstGeom>
+            <a:solidFill>
+              <a:srgbClr val="F4F1EA"/>
+            </a:solidFill>
+            <a:ln>
+              <a:noFill/>
+            </a:ln>
+            <a:effectLst/>
+          </p:spPr>
+          <p:style>
+            <a:lnRef idx="1">
+              <a:schemeClr val="accent1"/>
+            </a:lnRef>
+            <a:fillRef idx="3">
+              <a:schemeClr val="accent1"/>
+            </a:fillRef>
+            <a:effectRef idx="2">
+              <a:schemeClr val="accent1"/>
+            </a:effectRef>
+            <a:fontRef idx="minor">
+              <a:schemeClr val="lt1"/>
+            </a:fontRef>
+          </p:style>
+          <p:txBody>
+            <a:bodyPr rtlCol="0" anchor="ctr"/>
+            <a:lstStyle/>
+            <a:p>
+              <a:pPr algn="ctr"/>
+            </a:p>
+          </p:txBody>
+        </p:sp>
       </p:grpSp>
     </p:spTree>
   </p:cSld>
@@ -10556,7 +16450,7 @@
         </p:sp>
         <p:pic>
           <p:nvPicPr>
-            <p:cNvPr id="4" name="Picture 3" descr="588480253606403439.jpg"/>
+            <p:cNvPr id="4" name="Picture 3" descr="7580433875254582571.jpg"/>
             <p:cNvPicPr>
               <a:picLocks noChangeAspect="1"/>
             </p:cNvPicPr>
@@ -11033,6 +16927,391 @@
             </a:prstGeom>
           </p:spPr>
         </p:pic>
+      </p:grpSp>
+      <p:sp>
+        <p:nvSpPr>
+          <p:cNvPr id="17" name="Rectangle 16"/>
+          <p:cNvSpPr/>
+          <p:nvPr/>
+        </p:nvSpPr>
+        <p:spPr>
+          <a:xfrm rot="19680000">
+            <a:off x="619125" y="523875"/>
+            <a:ext cx="1619250" cy="476250"/>
+          </a:xfrm>
+          <a:prstGeom prst="rect">
+            <a:avLst/>
+          </a:prstGeom>
+          <a:solidFill>
+            <a:srgbClr val="DBE6A7">
+              <a:alpha val="70000"/>
+            </a:srgbClr>
+          </a:solidFill>
+          <a:ln>
+            <a:noFill/>
+          </a:ln>
+          <a:effectLst/>
+        </p:spPr>
+        <p:style>
+          <a:lnRef idx="1">
+            <a:schemeClr val="accent1"/>
+          </a:lnRef>
+          <a:fillRef idx="3">
+            <a:schemeClr val="accent1"/>
+          </a:fillRef>
+          <a:effectRef idx="2">
+            <a:schemeClr val="accent1"/>
+          </a:effectRef>
+          <a:fontRef idx="minor">
+            <a:schemeClr val="lt1"/>
+          </a:fontRef>
+        </p:style>
+        <p:txBody>
+          <a:bodyPr rtlCol="0" anchor="ctr"/>
+          <a:lstStyle/>
+          <a:p>
+            <a:pPr algn="ctr"/>
+          </a:p>
+        </p:txBody>
+      </p:sp>
+      <p:sp>
+        <p:nvSpPr>
+          <p:cNvPr id="18" name="Rectangle 17"/>
+          <p:cNvSpPr/>
+          <p:nvPr/>
+        </p:nvSpPr>
+        <p:spPr>
+          <a:xfrm rot="2160000">
+            <a:off x="8239125" y="952500"/>
+            <a:ext cx="1619250" cy="476250"/>
+          </a:xfrm>
+          <a:prstGeom prst="rect">
+            <a:avLst/>
+          </a:prstGeom>
+          <a:solidFill>
+            <a:srgbClr val="DBE6A7">
+              <a:alpha val="70000"/>
+            </a:srgbClr>
+          </a:solidFill>
+          <a:ln>
+            <a:noFill/>
+          </a:ln>
+          <a:effectLst/>
+        </p:spPr>
+        <p:style>
+          <a:lnRef idx="1">
+            <a:schemeClr val="accent1"/>
+          </a:lnRef>
+          <a:fillRef idx="3">
+            <a:schemeClr val="accent1"/>
+          </a:fillRef>
+          <a:effectRef idx="2">
+            <a:schemeClr val="accent1"/>
+          </a:effectRef>
+          <a:fontRef idx="minor">
+            <a:schemeClr val="lt1"/>
+          </a:fontRef>
+        </p:style>
+        <p:txBody>
+          <a:bodyPr rtlCol="0" anchor="ctr"/>
+          <a:lstStyle/>
+          <a:p>
+            <a:pPr algn="ctr"/>
+          </a:p>
+        </p:txBody>
+      </p:sp>
+      <p:grpSp>
+        <p:nvGrpSpPr>
+          <p:cNvPr id="19" name="Group 18"/>
+          <p:cNvGrpSpPr/>
+          <p:nvPr/>
+        </p:nvGrpSpPr>
+        <p:grpSpPr>
+          <a:xfrm rot="360000">
+            <a:off x="0" y="0"/>
+            <a:ext cx="9948861" cy="12430125"/>
+            <a:chOff x="0" y="0"/>
+            <a:chExt cx="9948861" cy="12430125"/>
+          </a:xfrm>
+        </p:grpSpPr>
+        <p:sp>
+          <p:nvSpPr>
+            <p:cNvPr id="20" name="Rounded Rectangle 19"/>
+            <p:cNvSpPr/>
+            <p:nvPr/>
+          </p:nvSpPr>
+          <p:spPr>
+            <a:xfrm>
+              <a:off x="8815387" y="12268200"/>
+              <a:ext cx="1133474" cy="161925"/>
+            </a:xfrm>
+            <a:prstGeom prst="roundRect">
+              <a:avLst/>
+            </a:prstGeom>
+            <a:solidFill>
+              <a:srgbClr val="3E6B5A"/>
+            </a:solidFill>
+            <a:ln w="57150">
+              <a:solidFill>
+                <a:srgbClr val="FFFFFF"/>
+              </a:solidFill>
+            </a:ln>
+            <a:effectLst>
+              <a:outerShdw blurRad="228600" dist="76200" dir="5400000" algn="t" rotWithShape="0">
+                <a:srgbClr val="000000">
+                  <a:alpha val="30000"/>
+                </a:srgbClr>
+              </a:outerShdw>
+            </a:effectLst>
+          </p:spPr>
+          <p:style>
+            <a:lnRef idx="1">
+              <a:schemeClr val="accent1"/>
+            </a:lnRef>
+            <a:fillRef idx="3">
+              <a:schemeClr val="accent1"/>
+            </a:fillRef>
+            <a:effectRef idx="2">
+              <a:schemeClr val="accent1"/>
+            </a:effectRef>
+            <a:fontRef idx="minor">
+              <a:schemeClr val="lt1"/>
+            </a:fontRef>
+          </p:style>
+          <p:txBody>
+            <a:bodyPr rtlCol="0" anchor="ctr"/>
+            <a:lstStyle/>
+            <a:p>
+              <a:pPr algn="ctr"/>
+            </a:p>
+          </p:txBody>
+        </p:sp>
+        <p:sp>
+          <p:nvSpPr>
+            <p:cNvPr id="21" name="Rounded Rectangle 20"/>
+            <p:cNvSpPr/>
+            <p:nvPr/>
+          </p:nvSpPr>
+          <p:spPr>
+            <a:xfrm>
+              <a:off x="9463087" y="11264265"/>
+              <a:ext cx="226695" cy="1036320"/>
+            </a:xfrm>
+            <a:prstGeom prst="roundRect">
+              <a:avLst/>
+            </a:prstGeom>
+            <a:solidFill>
+              <a:srgbClr val="3E6B5A"/>
+            </a:solidFill>
+            <a:ln w="57150">
+              <a:solidFill>
+                <a:srgbClr val="FFFFFF"/>
+              </a:solidFill>
+            </a:ln>
+            <a:effectLst/>
+          </p:spPr>
+          <p:style>
+            <a:lnRef idx="1">
+              <a:schemeClr val="accent1"/>
+            </a:lnRef>
+            <a:fillRef idx="3">
+              <a:schemeClr val="accent1"/>
+            </a:fillRef>
+            <a:effectRef idx="2">
+              <a:schemeClr val="accent1"/>
+            </a:effectRef>
+            <a:fontRef idx="minor">
+              <a:schemeClr val="lt1"/>
+            </a:fontRef>
+          </p:style>
+          <p:txBody>
+            <a:bodyPr rtlCol="0" anchor="ctr"/>
+            <a:lstStyle/>
+            <a:p>
+              <a:pPr algn="ctr"/>
+            </a:p>
+          </p:txBody>
+        </p:sp>
+        <p:sp>
+          <p:nvSpPr>
+            <p:cNvPr id="22" name="Rectangle 21"/>
+            <p:cNvSpPr/>
+            <p:nvPr/>
+          </p:nvSpPr>
+          <p:spPr>
+            <a:xfrm>
+              <a:off x="8928735" y="11814810"/>
+              <a:ext cx="809625" cy="80962"/>
+            </a:xfrm>
+            <a:prstGeom prst="rect">
+              <a:avLst/>
+            </a:prstGeom>
+            <a:solidFill>
+              <a:srgbClr val="22371F"/>
+            </a:solidFill>
+            <a:ln>
+              <a:noFill/>
+            </a:ln>
+            <a:effectLst/>
+          </p:spPr>
+          <p:style>
+            <a:lnRef idx="1">
+              <a:schemeClr val="accent1"/>
+            </a:lnRef>
+            <a:fillRef idx="3">
+              <a:schemeClr val="accent1"/>
+            </a:fillRef>
+            <a:effectRef idx="2">
+              <a:schemeClr val="accent1"/>
+            </a:effectRef>
+            <a:fontRef idx="minor">
+              <a:schemeClr val="lt1"/>
+            </a:fontRef>
+          </p:style>
+          <p:txBody>
+            <a:bodyPr rtlCol="0" anchor="ctr"/>
+            <a:lstStyle/>
+            <a:p>
+              <a:pPr algn="ctr"/>
+            </a:p>
+          </p:txBody>
+        </p:sp>
+        <p:sp>
+          <p:nvSpPr>
+            <p:cNvPr id="23" name="Rounded Rectangle 22"/>
+            <p:cNvSpPr/>
+            <p:nvPr/>
+          </p:nvSpPr>
+          <p:spPr>
+            <a:xfrm rot="20520000">
+              <a:off x="9058275" y="10891837"/>
+              <a:ext cx="259080" cy="809625"/>
+            </a:xfrm>
+            <a:prstGeom prst="roundRect">
+              <a:avLst/>
+            </a:prstGeom>
+            <a:solidFill>
+              <a:srgbClr val="D9D2C3"/>
+            </a:solidFill>
+            <a:ln w="57150">
+              <a:solidFill>
+                <a:srgbClr val="FFFFFF"/>
+              </a:solidFill>
+            </a:ln>
+            <a:effectLst/>
+          </p:spPr>
+          <p:style>
+            <a:lnRef idx="1">
+              <a:schemeClr val="accent1"/>
+            </a:lnRef>
+            <a:fillRef idx="3">
+              <a:schemeClr val="accent1"/>
+            </a:fillRef>
+            <a:effectRef idx="2">
+              <a:schemeClr val="accent1"/>
+            </a:effectRef>
+            <a:fontRef idx="minor">
+              <a:schemeClr val="lt1"/>
+            </a:fontRef>
+          </p:style>
+          <p:txBody>
+            <a:bodyPr rtlCol="0" anchor="ctr"/>
+            <a:lstStyle/>
+            <a:p>
+              <a:pPr algn="ctr"/>
+            </a:p>
+          </p:txBody>
+        </p:sp>
+        <p:sp>
+          <p:nvSpPr>
+            <p:cNvPr id="24" name="Rounded Rectangle 23"/>
+            <p:cNvSpPr/>
+            <p:nvPr/>
+          </p:nvSpPr>
+          <p:spPr>
+            <a:xfrm rot="20520000">
+              <a:off x="8944927" y="10746105"/>
+              <a:ext cx="323850" cy="161925"/>
+            </a:xfrm>
+            <a:prstGeom prst="roundRect">
+              <a:avLst/>
+            </a:prstGeom>
+            <a:solidFill>
+              <a:srgbClr val="3E6B5A"/>
+            </a:solidFill>
+            <a:ln w="57150">
+              <a:solidFill>
+                <a:srgbClr val="FFFFFF"/>
+              </a:solidFill>
+            </a:ln>
+            <a:effectLst/>
+          </p:spPr>
+          <p:style>
+            <a:lnRef idx="1">
+              <a:schemeClr val="accent1"/>
+            </a:lnRef>
+            <a:fillRef idx="3">
+              <a:schemeClr val="accent1"/>
+            </a:fillRef>
+            <a:effectRef idx="2">
+              <a:schemeClr val="accent1"/>
+            </a:effectRef>
+            <a:fontRef idx="minor">
+              <a:schemeClr val="lt1"/>
+            </a:fontRef>
+          </p:style>
+          <p:txBody>
+            <a:bodyPr rtlCol="0" anchor="ctr"/>
+            <a:lstStyle/>
+            <a:p>
+              <a:pPr algn="ctr"/>
+            </a:p>
+          </p:txBody>
+        </p:sp>
+        <p:sp>
+          <p:nvSpPr>
+            <p:cNvPr id="25" name="Oval 24"/>
+            <p:cNvSpPr/>
+            <p:nvPr/>
+          </p:nvSpPr>
+          <p:spPr>
+            <a:xfrm>
+              <a:off x="9414510" y="11426190"/>
+              <a:ext cx="226695" cy="226695"/>
+            </a:xfrm>
+            <a:prstGeom prst="ellipse">
+              <a:avLst/>
+            </a:prstGeom>
+            <a:solidFill>
+              <a:srgbClr val="E0A83A"/>
+            </a:solidFill>
+            <a:ln>
+              <a:noFill/>
+            </a:ln>
+            <a:effectLst/>
+          </p:spPr>
+          <p:style>
+            <a:lnRef idx="1">
+              <a:schemeClr val="accent1"/>
+            </a:lnRef>
+            <a:fillRef idx="3">
+              <a:schemeClr val="accent1"/>
+            </a:fillRef>
+            <a:effectRef idx="2">
+              <a:schemeClr val="accent1"/>
+            </a:effectRef>
+            <a:fontRef idx="minor">
+              <a:schemeClr val="lt1"/>
+            </a:fontRef>
+          </p:style>
+          <p:txBody>
+            <a:bodyPr rtlCol="0" anchor="ctr"/>
+            <a:lstStyle/>
+            <a:p>
+              <a:pPr algn="ctr"/>
+            </a:p>
+          </p:txBody>
+        </p:sp>
       </p:grpSp>
     </p:spTree>
   </p:cSld>
@@ -11655,6 +17934,435 @@
           </p:spPr>
         </p:pic>
       </p:grpSp>
+      <p:sp>
+        <p:nvSpPr>
+          <p:cNvPr id="18" name="Rectangle 17"/>
+          <p:cNvSpPr/>
+          <p:nvPr/>
+        </p:nvSpPr>
+        <p:spPr>
+          <a:xfrm rot="19680000">
+            <a:off x="619125" y="523875"/>
+            <a:ext cx="1619250" cy="476250"/>
+          </a:xfrm>
+          <a:prstGeom prst="rect">
+            <a:avLst/>
+          </a:prstGeom>
+          <a:solidFill>
+            <a:srgbClr val="DBE6A7">
+              <a:alpha val="70000"/>
+            </a:srgbClr>
+          </a:solidFill>
+          <a:ln>
+            <a:noFill/>
+          </a:ln>
+          <a:effectLst/>
+        </p:spPr>
+        <p:style>
+          <a:lnRef idx="1">
+            <a:schemeClr val="accent1"/>
+          </a:lnRef>
+          <a:fillRef idx="3">
+            <a:schemeClr val="accent1"/>
+          </a:fillRef>
+          <a:effectRef idx="2">
+            <a:schemeClr val="accent1"/>
+          </a:effectRef>
+          <a:fontRef idx="minor">
+            <a:schemeClr val="lt1"/>
+          </a:fontRef>
+        </p:style>
+        <p:txBody>
+          <a:bodyPr rtlCol="0" anchor="ctr"/>
+          <a:lstStyle/>
+          <a:p>
+            <a:pPr algn="ctr"/>
+          </a:p>
+        </p:txBody>
+      </p:sp>
+      <p:sp>
+        <p:nvSpPr>
+          <p:cNvPr id="19" name="Rectangle 18"/>
+          <p:cNvSpPr/>
+          <p:nvPr/>
+        </p:nvSpPr>
+        <p:spPr>
+          <a:xfrm rot="2160000">
+            <a:off x="8239125" y="952500"/>
+            <a:ext cx="1619250" cy="476250"/>
+          </a:xfrm>
+          <a:prstGeom prst="rect">
+            <a:avLst/>
+          </a:prstGeom>
+          <a:solidFill>
+            <a:srgbClr val="DBE6A7">
+              <a:alpha val="70000"/>
+            </a:srgbClr>
+          </a:solidFill>
+          <a:ln>
+            <a:noFill/>
+          </a:ln>
+          <a:effectLst/>
+        </p:spPr>
+        <p:style>
+          <a:lnRef idx="1">
+            <a:schemeClr val="accent1"/>
+          </a:lnRef>
+          <a:fillRef idx="3">
+            <a:schemeClr val="accent1"/>
+          </a:fillRef>
+          <a:effectRef idx="2">
+            <a:schemeClr val="accent1"/>
+          </a:effectRef>
+          <a:fontRef idx="minor">
+            <a:schemeClr val="lt1"/>
+          </a:fontRef>
+        </p:style>
+        <p:txBody>
+          <a:bodyPr rtlCol="0" anchor="ctr"/>
+          <a:lstStyle/>
+          <a:p>
+            <a:pPr algn="ctr"/>
+          </a:p>
+        </p:txBody>
+      </p:sp>
+      <p:grpSp>
+        <p:nvGrpSpPr>
+          <p:cNvPr id="20" name="Group 19"/>
+          <p:cNvGrpSpPr/>
+          <p:nvPr/>
+        </p:nvGrpSpPr>
+        <p:grpSpPr>
+          <a:xfrm rot="20400000">
+            <a:off x="0" y="0"/>
+            <a:ext cx="10001250" cy="12396787"/>
+            <a:chOff x="0" y="0"/>
+            <a:chExt cx="10001250" cy="12396787"/>
+          </a:xfrm>
+        </p:grpSpPr>
+        <p:sp>
+          <p:nvSpPr>
+            <p:cNvPr id="21" name="Arc 20"/>
+            <p:cNvSpPr/>
+            <p:nvPr/>
+          </p:nvSpPr>
+          <p:spPr>
+            <a:xfrm>
+              <a:off x="8343900" y="12012739"/>
+              <a:ext cx="242887" cy="156019"/>
+            </a:xfrm>
+            <a:prstGeom prst="arc">
+              <a:avLst/>
+            </a:prstGeom>
+            <a:noFill/>
+            <a:ln w="38100">
+              <a:solidFill>
+                <a:srgbClr val="156826"/>
+              </a:solidFill>
+            </a:ln>
+            <a:effectLst/>
+          </p:spPr>
+          <p:style>
+            <a:lnRef idx="1">
+              <a:schemeClr val="accent1"/>
+            </a:lnRef>
+            <a:fillRef idx="3">
+              <a:schemeClr val="accent1"/>
+            </a:fillRef>
+            <a:effectRef idx="2">
+              <a:schemeClr val="accent1"/>
+            </a:effectRef>
+            <a:fontRef idx="minor">
+              <a:schemeClr val="lt1"/>
+            </a:fontRef>
+          </p:style>
+          <p:txBody>
+            <a:bodyPr rtlCol="0" anchor="ctr"/>
+            <a:lstStyle/>
+            <a:p>
+              <a:pPr algn="ctr"/>
+            </a:p>
+          </p:txBody>
+        </p:sp>
+        <p:sp>
+          <p:nvSpPr>
+            <p:cNvPr id="22" name="Arc 21"/>
+            <p:cNvSpPr/>
+            <p:nvPr/>
+          </p:nvSpPr>
+          <p:spPr>
+            <a:xfrm rot="10800000">
+              <a:off x="8115300" y="12024741"/>
+              <a:ext cx="242887" cy="156019"/>
+            </a:xfrm>
+            <a:prstGeom prst="arc">
+              <a:avLst/>
+            </a:prstGeom>
+            <a:noFill/>
+            <a:ln w="38100">
+              <a:solidFill>
+                <a:srgbClr val="156826"/>
+              </a:solidFill>
+            </a:ln>
+            <a:effectLst/>
+          </p:spPr>
+          <p:style>
+            <a:lnRef idx="1">
+              <a:schemeClr val="accent1"/>
+            </a:lnRef>
+            <a:fillRef idx="3">
+              <a:schemeClr val="accent1"/>
+            </a:fillRef>
+            <a:effectRef idx="2">
+              <a:schemeClr val="accent1"/>
+            </a:effectRef>
+            <a:fontRef idx="minor">
+              <a:schemeClr val="lt1"/>
+            </a:fontRef>
+          </p:style>
+          <p:txBody>
+            <a:bodyPr rtlCol="0" anchor="ctr"/>
+            <a:lstStyle/>
+            <a:p>
+              <a:pPr algn="ctr"/>
+            </a:p>
+          </p:txBody>
+        </p:sp>
+        <p:sp>
+          <p:nvSpPr>
+            <p:cNvPr id="23" name="Arc 22"/>
+            <p:cNvSpPr/>
+            <p:nvPr/>
+          </p:nvSpPr>
+          <p:spPr>
+            <a:xfrm>
+              <a:off x="7886700" y="12012739"/>
+              <a:ext cx="242887" cy="156019"/>
+            </a:xfrm>
+            <a:prstGeom prst="arc">
+              <a:avLst/>
+            </a:prstGeom>
+            <a:noFill/>
+            <a:ln w="38100">
+              <a:solidFill>
+                <a:srgbClr val="156826"/>
+              </a:solidFill>
+            </a:ln>
+            <a:effectLst/>
+          </p:spPr>
+          <p:style>
+            <a:lnRef idx="1">
+              <a:schemeClr val="accent1"/>
+            </a:lnRef>
+            <a:fillRef idx="3">
+              <a:schemeClr val="accent1"/>
+            </a:fillRef>
+            <a:effectRef idx="2">
+              <a:schemeClr val="accent1"/>
+            </a:effectRef>
+            <a:fontRef idx="minor">
+              <a:schemeClr val="lt1"/>
+            </a:fontRef>
+          </p:style>
+          <p:txBody>
+            <a:bodyPr rtlCol="0" anchor="ctr"/>
+            <a:lstStyle/>
+            <a:p>
+              <a:pPr algn="ctr"/>
+            </a:p>
+          </p:txBody>
+        </p:sp>
+        <p:sp>
+          <p:nvSpPr>
+            <p:cNvPr id="24" name="Rounded Rectangle 23"/>
+            <p:cNvSpPr/>
+            <p:nvPr/>
+          </p:nvSpPr>
+          <p:spPr>
+            <a:xfrm>
+              <a:off x="8572500" y="11796712"/>
+              <a:ext cx="1428750" cy="600075"/>
+            </a:xfrm>
+            <a:prstGeom prst="roundRect">
+              <a:avLst>
+                <a:gd name="adj" fmla="val 50000"/>
+              </a:avLst>
+            </a:prstGeom>
+            <a:solidFill>
+              <a:srgbClr val="BFD8A6"/>
+            </a:solidFill>
+            <a:ln w="57150">
+              <a:solidFill>
+                <a:srgbClr val="FFFFFF"/>
+              </a:solidFill>
+            </a:ln>
+            <a:effectLst>
+              <a:outerShdw blurRad="228600" dist="76200" dir="5400000" algn="t" rotWithShape="0">
+                <a:srgbClr val="000000">
+                  <a:alpha val="30000"/>
+                </a:srgbClr>
+              </a:outerShdw>
+            </a:effectLst>
+          </p:spPr>
+          <p:style>
+            <a:lnRef idx="1">
+              <a:schemeClr val="accent1"/>
+            </a:lnRef>
+            <a:fillRef idx="3">
+              <a:schemeClr val="accent1"/>
+            </a:fillRef>
+            <a:effectRef idx="2">
+              <a:schemeClr val="accent1"/>
+            </a:effectRef>
+            <a:fontRef idx="minor">
+              <a:schemeClr val="lt1"/>
+            </a:fontRef>
+          </p:style>
+          <p:txBody>
+            <a:bodyPr rtlCol="0" anchor="ctr"/>
+            <a:lstStyle/>
+            <a:p>
+              <a:pPr algn="ctr"/>
+            </a:p>
+          </p:txBody>
+        </p:sp>
+        <p:sp>
+          <p:nvSpPr>
+            <p:cNvPr id="25" name="Oval 24"/>
+            <p:cNvSpPr/>
+            <p:nvPr/>
+          </p:nvSpPr>
+          <p:spPr>
+            <a:xfrm>
+              <a:off x="9331685" y="12044016"/>
+              <a:ext cx="45460" cy="45460"/>
+            </a:xfrm>
+            <a:prstGeom prst="ellipse">
+              <a:avLst/>
+            </a:prstGeom>
+            <a:solidFill>
+              <a:srgbClr val="22371F"/>
+            </a:solidFill>
+            <a:ln>
+              <a:noFill/>
+            </a:ln>
+            <a:effectLst/>
+          </p:spPr>
+          <p:style>
+            <a:lnRef idx="1">
+              <a:schemeClr val="accent1"/>
+            </a:lnRef>
+            <a:fillRef idx="3">
+              <a:schemeClr val="accent1"/>
+            </a:fillRef>
+            <a:effectRef idx="2">
+              <a:schemeClr val="accent1"/>
+            </a:effectRef>
+            <a:fontRef idx="minor">
+              <a:schemeClr val="lt1"/>
+            </a:fontRef>
+          </p:style>
+          <p:txBody>
+            <a:bodyPr rtlCol="0" anchor="ctr"/>
+            <a:lstStyle/>
+            <a:p>
+              <a:pPr algn="ctr"/>
+            </a:p>
+          </p:txBody>
+        </p:sp>
+        <p:sp>
+          <p:nvSpPr>
+            <p:cNvPr id="26" name="Oval 25"/>
+            <p:cNvSpPr/>
+            <p:nvPr/>
+          </p:nvSpPr>
+          <p:spPr>
+            <a:xfrm>
+              <a:off x="9539503" y="12044016"/>
+              <a:ext cx="45460" cy="45460"/>
+            </a:xfrm>
+            <a:prstGeom prst="ellipse">
+              <a:avLst/>
+            </a:prstGeom>
+            <a:solidFill>
+              <a:srgbClr val="22371F"/>
+            </a:solidFill>
+            <a:ln>
+              <a:noFill/>
+            </a:ln>
+            <a:effectLst/>
+          </p:spPr>
+          <p:style>
+            <a:lnRef idx="1">
+              <a:schemeClr val="accent1"/>
+            </a:lnRef>
+            <a:fillRef idx="3">
+              <a:schemeClr val="accent1"/>
+            </a:fillRef>
+            <a:effectRef idx="2">
+              <a:schemeClr val="accent1"/>
+            </a:effectRef>
+            <a:fontRef idx="minor">
+              <a:schemeClr val="lt1"/>
+            </a:fontRef>
+          </p:style>
+          <p:txBody>
+            <a:bodyPr rtlCol="0" anchor="ctr"/>
+            <a:lstStyle/>
+            <a:p>
+              <a:pPr algn="ctr"/>
+            </a:p>
+          </p:txBody>
+        </p:sp>
+        <p:sp>
+          <p:nvSpPr>
+            <p:cNvPr id="27" name="Block Arc 26"/>
+            <p:cNvSpPr/>
+            <p:nvPr/>
+          </p:nvSpPr>
+          <p:spPr>
+            <a:xfrm rot="10800000">
+              <a:off x="9386887" y="12079734"/>
+              <a:ext cx="142874" cy="103909"/>
+            </a:xfrm>
+            <a:prstGeom prst="blockArc">
+              <a:avLst>
+                <a:gd name="adj1" fmla="val 10800000"/>
+                <a:gd name="adj2" fmla="val 0"/>
+                <a:gd name="adj3" fmla="val 18000"/>
+              </a:avLst>
+            </a:prstGeom>
+            <a:solidFill>
+              <a:srgbClr val="22371F"/>
+            </a:solidFill>
+            <a:ln>
+              <a:noFill/>
+            </a:ln>
+            <a:effectLst/>
+          </p:spPr>
+          <p:style>
+            <a:lnRef idx="1">
+              <a:schemeClr val="accent1"/>
+            </a:lnRef>
+            <a:fillRef idx="3">
+              <a:schemeClr val="accent1"/>
+            </a:fillRef>
+            <a:effectRef idx="2">
+              <a:schemeClr val="accent1"/>
+            </a:effectRef>
+            <a:fontRef idx="minor">
+              <a:schemeClr val="lt1"/>
+            </a:fontRef>
+          </p:style>
+          <p:txBody>
+            <a:bodyPr rtlCol="0" anchor="ctr"/>
+            <a:lstStyle/>
+            <a:p>
+              <a:pPr algn="ctr"/>
+            </a:p>
+          </p:txBody>
+        </p:sp>
+      </p:grpSp>
     </p:spTree>
   </p:cSld>
   <p:clrMapOvr>
@@ -12275,6 +18983,525 @@
             </a:prstGeom>
           </p:spPr>
         </p:pic>
+      </p:grpSp>
+      <p:sp>
+        <p:nvSpPr>
+          <p:cNvPr id="18" name="Rectangle 17"/>
+          <p:cNvSpPr/>
+          <p:nvPr/>
+        </p:nvSpPr>
+        <p:spPr>
+          <a:xfrm rot="19680000">
+            <a:off x="619125" y="523875"/>
+            <a:ext cx="1619250" cy="476250"/>
+          </a:xfrm>
+          <a:prstGeom prst="rect">
+            <a:avLst/>
+          </a:prstGeom>
+          <a:solidFill>
+            <a:srgbClr val="DBE6A7">
+              <a:alpha val="70000"/>
+            </a:srgbClr>
+          </a:solidFill>
+          <a:ln>
+            <a:noFill/>
+          </a:ln>
+          <a:effectLst/>
+        </p:spPr>
+        <p:style>
+          <a:lnRef idx="1">
+            <a:schemeClr val="accent1"/>
+          </a:lnRef>
+          <a:fillRef idx="3">
+            <a:schemeClr val="accent1"/>
+          </a:fillRef>
+          <a:effectRef idx="2">
+            <a:schemeClr val="accent1"/>
+          </a:effectRef>
+          <a:fontRef idx="minor">
+            <a:schemeClr val="lt1"/>
+          </a:fontRef>
+        </p:style>
+        <p:txBody>
+          <a:bodyPr rtlCol="0" anchor="ctr"/>
+          <a:lstStyle/>
+          <a:p>
+            <a:pPr algn="ctr"/>
+          </a:p>
+        </p:txBody>
+      </p:sp>
+      <p:sp>
+        <p:nvSpPr>
+          <p:cNvPr id="19" name="Rectangle 18"/>
+          <p:cNvSpPr/>
+          <p:nvPr/>
+        </p:nvSpPr>
+        <p:spPr>
+          <a:xfrm rot="2160000">
+            <a:off x="8239125" y="952500"/>
+            <a:ext cx="1619250" cy="476250"/>
+          </a:xfrm>
+          <a:prstGeom prst="rect">
+            <a:avLst/>
+          </a:prstGeom>
+          <a:solidFill>
+            <a:srgbClr val="DBE6A7">
+              <a:alpha val="70000"/>
+            </a:srgbClr>
+          </a:solidFill>
+          <a:ln>
+            <a:noFill/>
+          </a:ln>
+          <a:effectLst/>
+        </p:spPr>
+        <p:style>
+          <a:lnRef idx="1">
+            <a:schemeClr val="accent1"/>
+          </a:lnRef>
+          <a:fillRef idx="3">
+            <a:schemeClr val="accent1"/>
+          </a:fillRef>
+          <a:effectRef idx="2">
+            <a:schemeClr val="accent1"/>
+          </a:effectRef>
+          <a:fontRef idx="minor">
+            <a:schemeClr val="lt1"/>
+          </a:fontRef>
+        </p:style>
+        <p:txBody>
+          <a:bodyPr rtlCol="0" anchor="ctr"/>
+          <a:lstStyle/>
+          <a:p>
+            <a:pPr algn="ctr"/>
+          </a:p>
+        </p:txBody>
+      </p:sp>
+      <p:grpSp>
+        <p:nvGrpSpPr>
+          <p:cNvPr id="20" name="Group 19"/>
+          <p:cNvGrpSpPr/>
+          <p:nvPr/>
+        </p:nvGrpSpPr>
+        <p:grpSpPr>
+          <a:xfrm rot="600000">
+            <a:off x="0" y="0"/>
+            <a:ext cx="9875520" cy="12830175"/>
+            <a:chOff x="0" y="0"/>
+            <a:chExt cx="9875520" cy="12830175"/>
+          </a:xfrm>
+        </p:grpSpPr>
+        <p:sp>
+          <p:nvSpPr>
+            <p:cNvPr id="21" name="Rectangle 20"/>
+            <p:cNvSpPr/>
+            <p:nvPr/>
+          </p:nvSpPr>
+          <p:spPr>
+            <a:xfrm>
+              <a:off x="9401175" y="11715750"/>
+              <a:ext cx="57150" cy="1114425"/>
+            </a:xfrm>
+            <a:prstGeom prst="rect">
+              <a:avLst/>
+            </a:prstGeom>
+            <a:solidFill>
+              <a:srgbClr val="7FA05A"/>
+            </a:solidFill>
+            <a:ln>
+              <a:noFill/>
+            </a:ln>
+            <a:effectLst/>
+          </p:spPr>
+          <p:style>
+            <a:lnRef idx="1">
+              <a:schemeClr val="accent1"/>
+            </a:lnRef>
+            <a:fillRef idx="3">
+              <a:schemeClr val="accent1"/>
+            </a:fillRef>
+            <a:effectRef idx="2">
+              <a:schemeClr val="accent1"/>
+            </a:effectRef>
+            <a:fontRef idx="minor">
+              <a:schemeClr val="lt1"/>
+            </a:fontRef>
+          </p:style>
+          <p:txBody>
+            <a:bodyPr rtlCol="0" anchor="ctr"/>
+            <a:lstStyle/>
+            <a:p>
+              <a:pPr algn="ctr"/>
+            </a:p>
+          </p:txBody>
+        </p:sp>
+        <p:sp>
+          <p:nvSpPr>
+            <p:cNvPr id="22" name="Oval 21"/>
+            <p:cNvSpPr/>
+            <p:nvPr/>
+          </p:nvSpPr>
+          <p:spPr>
+            <a:xfrm rot="19800000">
+              <a:off x="9448800" y="12272962"/>
+              <a:ext cx="385762" cy="171450"/>
+            </a:xfrm>
+            <a:prstGeom prst="ellipse">
+              <a:avLst/>
+            </a:prstGeom>
+            <a:solidFill>
+              <a:srgbClr val="59A66C"/>
+            </a:solidFill>
+            <a:ln w="57150">
+              <a:solidFill>
+                <a:srgbClr val="FFFFFF"/>
+              </a:solidFill>
+            </a:ln>
+            <a:effectLst/>
+          </p:spPr>
+          <p:style>
+            <a:lnRef idx="1">
+              <a:schemeClr val="accent1"/>
+            </a:lnRef>
+            <a:fillRef idx="3">
+              <a:schemeClr val="accent1"/>
+            </a:fillRef>
+            <a:effectRef idx="2">
+              <a:schemeClr val="accent1"/>
+            </a:effectRef>
+            <a:fontRef idx="minor">
+              <a:schemeClr val="lt1"/>
+            </a:fontRef>
+          </p:style>
+          <p:txBody>
+            <a:bodyPr rtlCol="0" anchor="ctr"/>
+            <a:lstStyle/>
+            <a:p>
+              <a:pPr algn="ctr"/>
+            </a:p>
+          </p:txBody>
+        </p:sp>
+        <p:sp>
+          <p:nvSpPr>
+            <p:cNvPr id="23" name="Oval 22"/>
+            <p:cNvSpPr/>
+            <p:nvPr/>
+          </p:nvSpPr>
+          <p:spPr>
+            <a:xfrm>
+              <a:off x="9515475" y="11595735"/>
+              <a:ext cx="360045" cy="240030"/>
+            </a:xfrm>
+            <a:prstGeom prst="ellipse">
+              <a:avLst/>
+            </a:prstGeom>
+            <a:solidFill>
+              <a:srgbClr val="F2CF5B"/>
+            </a:solidFill>
+            <a:ln w="38100">
+              <a:solidFill>
+                <a:srgbClr val="FFFFFF"/>
+              </a:solidFill>
+            </a:ln>
+            <a:effectLst/>
+          </p:spPr>
+          <p:style>
+            <a:lnRef idx="1">
+              <a:schemeClr val="accent1"/>
+            </a:lnRef>
+            <a:fillRef idx="3">
+              <a:schemeClr val="accent1"/>
+            </a:fillRef>
+            <a:effectRef idx="2">
+              <a:schemeClr val="accent1"/>
+            </a:effectRef>
+            <a:fontRef idx="minor">
+              <a:schemeClr val="lt1"/>
+            </a:fontRef>
+          </p:style>
+          <p:txBody>
+            <a:bodyPr rtlCol="0" anchor="ctr"/>
+            <a:lstStyle/>
+            <a:p>
+              <a:pPr algn="ctr"/>
+            </a:p>
+          </p:txBody>
+        </p:sp>
+        <p:sp>
+          <p:nvSpPr>
+            <p:cNvPr id="24" name="Oval 23"/>
+            <p:cNvSpPr/>
+            <p:nvPr/>
+          </p:nvSpPr>
+          <p:spPr>
+            <a:xfrm rot="3600000">
+              <a:off x="9382601" y="11825879"/>
+              <a:ext cx="360045" cy="240030"/>
+            </a:xfrm>
+            <a:prstGeom prst="ellipse">
+              <a:avLst/>
+            </a:prstGeom>
+            <a:solidFill>
+              <a:srgbClr val="F2CF5B"/>
+            </a:solidFill>
+            <a:ln w="38100">
+              <a:solidFill>
+                <a:srgbClr val="FFFFFF"/>
+              </a:solidFill>
+            </a:ln>
+            <a:effectLst/>
+          </p:spPr>
+          <p:style>
+            <a:lnRef idx="1">
+              <a:schemeClr val="accent1"/>
+            </a:lnRef>
+            <a:fillRef idx="3">
+              <a:schemeClr val="accent1"/>
+            </a:fillRef>
+            <a:effectRef idx="2">
+              <a:schemeClr val="accent1"/>
+            </a:effectRef>
+            <a:fontRef idx="minor">
+              <a:schemeClr val="lt1"/>
+            </a:fontRef>
+          </p:style>
+          <p:txBody>
+            <a:bodyPr rtlCol="0" anchor="ctr"/>
+            <a:lstStyle/>
+            <a:p>
+              <a:pPr algn="ctr"/>
+            </a:p>
+          </p:txBody>
+        </p:sp>
+        <p:sp>
+          <p:nvSpPr>
+            <p:cNvPr id="25" name="Oval 24"/>
+            <p:cNvSpPr/>
+            <p:nvPr/>
+          </p:nvSpPr>
+          <p:spPr>
+            <a:xfrm rot="7200000">
+              <a:off x="9116853" y="11825879"/>
+              <a:ext cx="360045" cy="240030"/>
+            </a:xfrm>
+            <a:prstGeom prst="ellipse">
+              <a:avLst/>
+            </a:prstGeom>
+            <a:solidFill>
+              <a:srgbClr val="F2CF5B"/>
+            </a:solidFill>
+            <a:ln w="38100">
+              <a:solidFill>
+                <a:srgbClr val="FFFFFF"/>
+              </a:solidFill>
+            </a:ln>
+            <a:effectLst/>
+          </p:spPr>
+          <p:style>
+            <a:lnRef idx="1">
+              <a:schemeClr val="accent1"/>
+            </a:lnRef>
+            <a:fillRef idx="3">
+              <a:schemeClr val="accent1"/>
+            </a:fillRef>
+            <a:effectRef idx="2">
+              <a:schemeClr val="accent1"/>
+            </a:effectRef>
+            <a:fontRef idx="minor">
+              <a:schemeClr val="lt1"/>
+            </a:fontRef>
+          </p:style>
+          <p:txBody>
+            <a:bodyPr rtlCol="0" anchor="ctr"/>
+            <a:lstStyle/>
+            <a:p>
+              <a:pPr algn="ctr"/>
+            </a:p>
+          </p:txBody>
+        </p:sp>
+        <p:sp>
+          <p:nvSpPr>
+            <p:cNvPr id="26" name="Oval 25"/>
+            <p:cNvSpPr/>
+            <p:nvPr/>
+          </p:nvSpPr>
+          <p:spPr>
+            <a:xfrm rot="10800000">
+              <a:off x="8983980" y="11595735"/>
+              <a:ext cx="360045" cy="240030"/>
+            </a:xfrm>
+            <a:prstGeom prst="ellipse">
+              <a:avLst/>
+            </a:prstGeom>
+            <a:solidFill>
+              <a:srgbClr val="F2CF5B"/>
+            </a:solidFill>
+            <a:ln w="38100">
+              <a:solidFill>
+                <a:srgbClr val="FFFFFF"/>
+              </a:solidFill>
+            </a:ln>
+            <a:effectLst/>
+          </p:spPr>
+          <p:style>
+            <a:lnRef idx="1">
+              <a:schemeClr val="accent1"/>
+            </a:lnRef>
+            <a:fillRef idx="3">
+              <a:schemeClr val="accent1"/>
+            </a:fillRef>
+            <a:effectRef idx="2">
+              <a:schemeClr val="accent1"/>
+            </a:effectRef>
+            <a:fontRef idx="minor">
+              <a:schemeClr val="lt1"/>
+            </a:fontRef>
+          </p:style>
+          <p:txBody>
+            <a:bodyPr rtlCol="0" anchor="ctr"/>
+            <a:lstStyle/>
+            <a:p>
+              <a:pPr algn="ctr"/>
+            </a:p>
+          </p:txBody>
+        </p:sp>
+        <p:sp>
+          <p:nvSpPr>
+            <p:cNvPr id="27" name="Oval 26"/>
+            <p:cNvSpPr/>
+            <p:nvPr/>
+          </p:nvSpPr>
+          <p:spPr>
+            <a:xfrm rot="14400000">
+              <a:off x="9116853" y="11365590"/>
+              <a:ext cx="360045" cy="240030"/>
+            </a:xfrm>
+            <a:prstGeom prst="ellipse">
+              <a:avLst/>
+            </a:prstGeom>
+            <a:solidFill>
+              <a:srgbClr val="F2CF5B"/>
+            </a:solidFill>
+            <a:ln w="38100">
+              <a:solidFill>
+                <a:srgbClr val="FFFFFF"/>
+              </a:solidFill>
+            </a:ln>
+            <a:effectLst/>
+          </p:spPr>
+          <p:style>
+            <a:lnRef idx="1">
+              <a:schemeClr val="accent1"/>
+            </a:lnRef>
+            <a:fillRef idx="3">
+              <a:schemeClr val="accent1"/>
+            </a:fillRef>
+            <a:effectRef idx="2">
+              <a:schemeClr val="accent1"/>
+            </a:effectRef>
+            <a:fontRef idx="minor">
+              <a:schemeClr val="lt1"/>
+            </a:fontRef>
+          </p:style>
+          <p:txBody>
+            <a:bodyPr rtlCol="0" anchor="ctr"/>
+            <a:lstStyle/>
+            <a:p>
+              <a:pPr algn="ctr"/>
+            </a:p>
+          </p:txBody>
+        </p:sp>
+        <p:sp>
+          <p:nvSpPr>
+            <p:cNvPr id="28" name="Oval 27"/>
+            <p:cNvSpPr/>
+            <p:nvPr/>
+          </p:nvSpPr>
+          <p:spPr>
+            <a:xfrm rot="18000000">
+              <a:off x="9382601" y="11365590"/>
+              <a:ext cx="360045" cy="240030"/>
+            </a:xfrm>
+            <a:prstGeom prst="ellipse">
+              <a:avLst/>
+            </a:prstGeom>
+            <a:solidFill>
+              <a:srgbClr val="F2CF5B"/>
+            </a:solidFill>
+            <a:ln w="38100">
+              <a:solidFill>
+                <a:srgbClr val="FFFFFF"/>
+              </a:solidFill>
+            </a:ln>
+            <a:effectLst/>
+          </p:spPr>
+          <p:style>
+            <a:lnRef idx="1">
+              <a:schemeClr val="accent1"/>
+            </a:lnRef>
+            <a:fillRef idx="3">
+              <a:schemeClr val="accent1"/>
+            </a:fillRef>
+            <a:effectRef idx="2">
+              <a:schemeClr val="accent1"/>
+            </a:effectRef>
+            <a:fontRef idx="minor">
+              <a:schemeClr val="lt1"/>
+            </a:fontRef>
+          </p:style>
+          <p:txBody>
+            <a:bodyPr rtlCol="0" anchor="ctr"/>
+            <a:lstStyle/>
+            <a:p>
+              <a:pPr algn="ctr"/>
+            </a:p>
+          </p:txBody>
+        </p:sp>
+        <p:sp>
+          <p:nvSpPr>
+            <p:cNvPr id="29" name="Oval 28"/>
+            <p:cNvSpPr/>
+            <p:nvPr/>
+          </p:nvSpPr>
+          <p:spPr>
+            <a:xfrm>
+              <a:off x="9266872" y="11552872"/>
+              <a:ext cx="325755" cy="325755"/>
+            </a:xfrm>
+            <a:prstGeom prst="ellipse">
+              <a:avLst/>
+            </a:prstGeom>
+            <a:solidFill>
+              <a:srgbClr val="8C6A4E"/>
+            </a:solidFill>
+            <a:ln w="38100">
+              <a:solidFill>
+                <a:srgbClr val="FFFFFF"/>
+              </a:solidFill>
+            </a:ln>
+            <a:effectLst/>
+          </p:spPr>
+          <p:style>
+            <a:lnRef idx="1">
+              <a:schemeClr val="accent1"/>
+            </a:lnRef>
+            <a:fillRef idx="3">
+              <a:schemeClr val="accent1"/>
+            </a:fillRef>
+            <a:effectRef idx="2">
+              <a:schemeClr val="accent1"/>
+            </a:effectRef>
+            <a:fontRef idx="minor">
+              <a:schemeClr val="lt1"/>
+            </a:fontRef>
+          </p:style>
+          <p:txBody>
+            <a:bodyPr rtlCol="0" anchor="ctr"/>
+            <a:lstStyle/>
+            <a:p>
+              <a:pPr algn="ctr"/>
+            </a:p>
+          </p:txBody>
+        </p:sp>
       </p:grpSp>
     </p:spTree>
   </p:cSld>
@@ -12897,6 +20124,695 @@
           </p:spPr>
         </p:pic>
       </p:grpSp>
+      <p:sp>
+        <p:nvSpPr>
+          <p:cNvPr id="18" name="Rectangle 17"/>
+          <p:cNvSpPr/>
+          <p:nvPr/>
+        </p:nvSpPr>
+        <p:spPr>
+          <a:xfrm rot="19680000">
+            <a:off x="619125" y="523875"/>
+            <a:ext cx="1619250" cy="476250"/>
+          </a:xfrm>
+          <a:prstGeom prst="rect">
+            <a:avLst/>
+          </a:prstGeom>
+          <a:solidFill>
+            <a:srgbClr val="DBE6A7">
+              <a:alpha val="70000"/>
+            </a:srgbClr>
+          </a:solidFill>
+          <a:ln>
+            <a:noFill/>
+          </a:ln>
+          <a:effectLst/>
+        </p:spPr>
+        <p:style>
+          <a:lnRef idx="1">
+            <a:schemeClr val="accent1"/>
+          </a:lnRef>
+          <a:fillRef idx="3">
+            <a:schemeClr val="accent1"/>
+          </a:fillRef>
+          <a:effectRef idx="2">
+            <a:schemeClr val="accent1"/>
+          </a:effectRef>
+          <a:fontRef idx="minor">
+            <a:schemeClr val="lt1"/>
+          </a:fontRef>
+        </p:style>
+        <p:txBody>
+          <a:bodyPr rtlCol="0" anchor="ctr"/>
+          <a:lstStyle/>
+          <a:p>
+            <a:pPr algn="ctr"/>
+          </a:p>
+        </p:txBody>
+      </p:sp>
+      <p:sp>
+        <p:nvSpPr>
+          <p:cNvPr id="19" name="Rectangle 18"/>
+          <p:cNvSpPr/>
+          <p:nvPr/>
+        </p:nvSpPr>
+        <p:spPr>
+          <a:xfrm rot="2160000">
+            <a:off x="8239125" y="952500"/>
+            <a:ext cx="1619250" cy="476250"/>
+          </a:xfrm>
+          <a:prstGeom prst="rect">
+            <a:avLst/>
+          </a:prstGeom>
+          <a:solidFill>
+            <a:srgbClr val="DBE6A7">
+              <a:alpha val="70000"/>
+            </a:srgbClr>
+          </a:solidFill>
+          <a:ln>
+            <a:noFill/>
+          </a:ln>
+          <a:effectLst/>
+        </p:spPr>
+        <p:style>
+          <a:lnRef idx="1">
+            <a:schemeClr val="accent1"/>
+          </a:lnRef>
+          <a:fillRef idx="3">
+            <a:schemeClr val="accent1"/>
+          </a:fillRef>
+          <a:effectRef idx="2">
+            <a:schemeClr val="accent1"/>
+          </a:effectRef>
+          <a:fontRef idx="minor">
+            <a:schemeClr val="lt1"/>
+          </a:fontRef>
+        </p:style>
+        <p:txBody>
+          <a:bodyPr rtlCol="0" anchor="ctr"/>
+          <a:lstStyle/>
+          <a:p>
+            <a:pPr algn="ctr"/>
+          </a:p>
+        </p:txBody>
+      </p:sp>
+      <p:grpSp>
+        <p:nvGrpSpPr>
+          <p:cNvPr id="20" name="Group 19"/>
+          <p:cNvGrpSpPr/>
+          <p:nvPr/>
+        </p:nvGrpSpPr>
+        <p:grpSpPr>
+          <a:xfrm rot="1800000">
+            <a:off x="0" y="0"/>
+            <a:ext cx="9867900" cy="12477750"/>
+            <a:chOff x="0" y="0"/>
+            <a:chExt cx="9867900" cy="12477750"/>
+          </a:xfrm>
+        </p:grpSpPr>
+        <p:sp>
+          <p:nvSpPr>
+            <p:cNvPr id="21" name="Rectangle 20"/>
+            <p:cNvSpPr/>
+            <p:nvPr/>
+          </p:nvSpPr>
+          <p:spPr>
+            <a:xfrm rot="1500000">
+              <a:off x="8997846" y="11878071"/>
+              <a:ext cx="171450" cy="38100"/>
+            </a:xfrm>
+            <a:prstGeom prst="rect">
+              <a:avLst/>
+            </a:prstGeom>
+            <a:solidFill>
+              <a:srgbClr val="22371F"/>
+            </a:solidFill>
+            <a:ln>
+              <a:noFill/>
+            </a:ln>
+            <a:effectLst/>
+          </p:spPr>
+          <p:style>
+            <a:lnRef idx="1">
+              <a:schemeClr val="accent1"/>
+            </a:lnRef>
+            <a:fillRef idx="3">
+              <a:schemeClr val="accent1"/>
+            </a:fillRef>
+            <a:effectRef idx="2">
+              <a:schemeClr val="accent1"/>
+            </a:effectRef>
+            <a:fontRef idx="minor">
+              <a:schemeClr val="lt1"/>
+            </a:fontRef>
+          </p:style>
+          <p:txBody>
+            <a:bodyPr rtlCol="0" anchor="ctr"/>
+            <a:lstStyle/>
+            <a:p>
+              <a:pPr algn="ctr"/>
+            </a:p>
+          </p:txBody>
+        </p:sp>
+        <p:sp>
+          <p:nvSpPr>
+            <p:cNvPr id="22" name="Rectangle 21"/>
+            <p:cNvSpPr/>
+            <p:nvPr/>
+          </p:nvSpPr>
+          <p:spPr>
+            <a:xfrm>
+              <a:off x="8991600" y="12077700"/>
+              <a:ext cx="171450" cy="38100"/>
+            </a:xfrm>
+            <a:prstGeom prst="rect">
+              <a:avLst/>
+            </a:prstGeom>
+            <a:solidFill>
+              <a:srgbClr val="22371F"/>
+            </a:solidFill>
+            <a:ln>
+              <a:noFill/>
+            </a:ln>
+            <a:effectLst/>
+          </p:spPr>
+          <p:style>
+            <a:lnRef idx="1">
+              <a:schemeClr val="accent1"/>
+            </a:lnRef>
+            <a:fillRef idx="3">
+              <a:schemeClr val="accent1"/>
+            </a:fillRef>
+            <a:effectRef idx="2">
+              <a:schemeClr val="accent1"/>
+            </a:effectRef>
+            <a:fontRef idx="minor">
+              <a:schemeClr val="lt1"/>
+            </a:fontRef>
+          </p:style>
+          <p:txBody>
+            <a:bodyPr rtlCol="0" anchor="ctr"/>
+            <a:lstStyle/>
+            <a:p>
+              <a:pPr algn="ctr"/>
+            </a:p>
+          </p:txBody>
+        </p:sp>
+        <p:sp>
+          <p:nvSpPr>
+            <p:cNvPr id="23" name="Rectangle 22"/>
+            <p:cNvSpPr/>
+            <p:nvPr/>
+          </p:nvSpPr>
+          <p:spPr>
+            <a:xfrm rot="20100000">
+              <a:off x="8997846" y="12277328"/>
+              <a:ext cx="171450" cy="38100"/>
+            </a:xfrm>
+            <a:prstGeom prst="rect">
+              <a:avLst/>
+            </a:prstGeom>
+            <a:solidFill>
+              <a:srgbClr val="22371F"/>
+            </a:solidFill>
+            <a:ln>
+              <a:noFill/>
+            </a:ln>
+            <a:effectLst/>
+          </p:spPr>
+          <p:style>
+            <a:lnRef idx="1">
+              <a:schemeClr val="accent1"/>
+            </a:lnRef>
+            <a:fillRef idx="3">
+              <a:schemeClr val="accent1"/>
+            </a:fillRef>
+            <a:effectRef idx="2">
+              <a:schemeClr val="accent1"/>
+            </a:effectRef>
+            <a:fontRef idx="minor">
+              <a:schemeClr val="lt1"/>
+            </a:fontRef>
+          </p:style>
+          <p:txBody>
+            <a:bodyPr rtlCol="0" anchor="ctr"/>
+            <a:lstStyle/>
+            <a:p>
+              <a:pPr algn="ctr"/>
+            </a:p>
+          </p:txBody>
+        </p:sp>
+        <p:sp>
+          <p:nvSpPr>
+            <p:cNvPr id="24" name="Rectangle 23"/>
+            <p:cNvSpPr/>
+            <p:nvPr/>
+          </p:nvSpPr>
+          <p:spPr>
+            <a:xfrm rot="20100000">
+              <a:off x="9690203" y="11878071"/>
+              <a:ext cx="171450" cy="38100"/>
+            </a:xfrm>
+            <a:prstGeom prst="rect">
+              <a:avLst/>
+            </a:prstGeom>
+            <a:solidFill>
+              <a:srgbClr val="22371F"/>
+            </a:solidFill>
+            <a:ln>
+              <a:noFill/>
+            </a:ln>
+            <a:effectLst/>
+          </p:spPr>
+          <p:style>
+            <a:lnRef idx="1">
+              <a:schemeClr val="accent1"/>
+            </a:lnRef>
+            <a:fillRef idx="3">
+              <a:schemeClr val="accent1"/>
+            </a:fillRef>
+            <a:effectRef idx="2">
+              <a:schemeClr val="accent1"/>
+            </a:effectRef>
+            <a:fontRef idx="minor">
+              <a:schemeClr val="lt1"/>
+            </a:fontRef>
+          </p:style>
+          <p:txBody>
+            <a:bodyPr rtlCol="0" anchor="ctr"/>
+            <a:lstStyle/>
+            <a:p>
+              <a:pPr algn="ctr"/>
+            </a:p>
+          </p:txBody>
+        </p:sp>
+        <p:sp>
+          <p:nvSpPr>
+            <p:cNvPr id="25" name="Rectangle 24"/>
+            <p:cNvSpPr/>
+            <p:nvPr/>
+          </p:nvSpPr>
+          <p:spPr>
+            <a:xfrm>
+              <a:off x="9696450" y="12077700"/>
+              <a:ext cx="171450" cy="38100"/>
+            </a:xfrm>
+            <a:prstGeom prst="rect">
+              <a:avLst/>
+            </a:prstGeom>
+            <a:solidFill>
+              <a:srgbClr val="22371F"/>
+            </a:solidFill>
+            <a:ln>
+              <a:noFill/>
+            </a:ln>
+            <a:effectLst/>
+          </p:spPr>
+          <p:style>
+            <a:lnRef idx="1">
+              <a:schemeClr val="accent1"/>
+            </a:lnRef>
+            <a:fillRef idx="3">
+              <a:schemeClr val="accent1"/>
+            </a:fillRef>
+            <a:effectRef idx="2">
+              <a:schemeClr val="accent1"/>
+            </a:effectRef>
+            <a:fontRef idx="minor">
+              <a:schemeClr val="lt1"/>
+            </a:fontRef>
+          </p:style>
+          <p:txBody>
+            <a:bodyPr rtlCol="0" anchor="ctr"/>
+            <a:lstStyle/>
+            <a:p>
+              <a:pPr algn="ctr"/>
+            </a:p>
+          </p:txBody>
+        </p:sp>
+        <p:sp>
+          <p:nvSpPr>
+            <p:cNvPr id="26" name="Rectangle 25"/>
+            <p:cNvSpPr/>
+            <p:nvPr/>
+          </p:nvSpPr>
+          <p:spPr>
+            <a:xfrm rot="1500000">
+              <a:off x="9690203" y="12277328"/>
+              <a:ext cx="171450" cy="38100"/>
+            </a:xfrm>
+            <a:prstGeom prst="rect">
+              <a:avLst/>
+            </a:prstGeom>
+            <a:solidFill>
+              <a:srgbClr val="22371F"/>
+            </a:solidFill>
+            <a:ln>
+              <a:noFill/>
+            </a:ln>
+            <a:effectLst/>
+          </p:spPr>
+          <p:style>
+            <a:lnRef idx="1">
+              <a:schemeClr val="accent1"/>
+            </a:lnRef>
+            <a:fillRef idx="3">
+              <a:schemeClr val="accent1"/>
+            </a:fillRef>
+            <a:effectRef idx="2">
+              <a:schemeClr val="accent1"/>
+            </a:effectRef>
+            <a:fontRef idx="minor">
+              <a:schemeClr val="lt1"/>
+            </a:fontRef>
+          </p:style>
+          <p:txBody>
+            <a:bodyPr rtlCol="0" anchor="ctr"/>
+            <a:lstStyle/>
+            <a:p>
+              <a:pPr algn="ctr"/>
+            </a:p>
+          </p:txBody>
+        </p:sp>
+        <p:sp>
+          <p:nvSpPr>
+            <p:cNvPr id="27" name="Oval 26"/>
+            <p:cNvSpPr/>
+            <p:nvPr/>
+          </p:nvSpPr>
+          <p:spPr>
+            <a:xfrm>
+              <a:off x="9296400" y="11506200"/>
+              <a:ext cx="266700" cy="228600"/>
+            </a:xfrm>
+            <a:prstGeom prst="ellipse">
+              <a:avLst/>
+            </a:prstGeom>
+            <a:solidFill>
+              <a:srgbClr val="22371F"/>
+            </a:solidFill>
+            <a:ln w="57150">
+              <a:solidFill>
+                <a:srgbClr val="FFFFFF"/>
+              </a:solidFill>
+            </a:ln>
+            <a:effectLst/>
+          </p:spPr>
+          <p:style>
+            <a:lnRef idx="1">
+              <a:schemeClr val="accent1"/>
+            </a:lnRef>
+            <a:fillRef idx="3">
+              <a:schemeClr val="accent1"/>
+            </a:fillRef>
+            <a:effectRef idx="2">
+              <a:schemeClr val="accent1"/>
+            </a:effectRef>
+            <a:fontRef idx="minor">
+              <a:schemeClr val="lt1"/>
+            </a:fontRef>
+          </p:style>
+          <p:txBody>
+            <a:bodyPr rtlCol="0" anchor="ctr"/>
+            <a:lstStyle/>
+            <a:p>
+              <a:pPr algn="ctr"/>
+            </a:p>
+          </p:txBody>
+        </p:sp>
+        <p:sp>
+          <p:nvSpPr>
+            <p:cNvPr id="28" name="Oval 27"/>
+            <p:cNvSpPr/>
+            <p:nvPr/>
+          </p:nvSpPr>
+          <p:spPr>
+            <a:xfrm>
+              <a:off x="9144000" y="11668125"/>
+              <a:ext cx="571500" cy="809625"/>
+            </a:xfrm>
+            <a:prstGeom prst="ellipse">
+              <a:avLst/>
+            </a:prstGeom>
+            <a:solidFill>
+              <a:srgbClr val="2F4A3A"/>
+            </a:solidFill>
+            <a:ln w="57150">
+              <a:solidFill>
+                <a:srgbClr val="FFFFFF"/>
+              </a:solidFill>
+            </a:ln>
+            <a:effectLst>
+              <a:outerShdw blurRad="228600" dist="76200" dir="5400000" algn="t" rotWithShape="0">
+                <a:srgbClr val="000000">
+                  <a:alpha val="30000"/>
+                </a:srgbClr>
+              </a:outerShdw>
+            </a:effectLst>
+          </p:spPr>
+          <p:style>
+            <a:lnRef idx="1">
+              <a:schemeClr val="accent1"/>
+            </a:lnRef>
+            <a:fillRef idx="3">
+              <a:schemeClr val="accent1"/>
+            </a:fillRef>
+            <a:effectRef idx="2">
+              <a:schemeClr val="accent1"/>
+            </a:effectRef>
+            <a:fontRef idx="minor">
+              <a:schemeClr val="lt1"/>
+            </a:fontRef>
+          </p:style>
+          <p:txBody>
+            <a:bodyPr rtlCol="0" anchor="ctr"/>
+            <a:lstStyle/>
+            <a:p>
+              <a:pPr algn="ctr"/>
+            </a:p>
+          </p:txBody>
+        </p:sp>
+        <p:sp>
+          <p:nvSpPr>
+            <p:cNvPr id="29" name="Rectangle 28"/>
+            <p:cNvSpPr/>
+            <p:nvPr/>
+          </p:nvSpPr>
+          <p:spPr>
+            <a:xfrm>
+              <a:off x="9410700" y="11696700"/>
+              <a:ext cx="38100" cy="762000"/>
+            </a:xfrm>
+            <a:prstGeom prst="rect">
+              <a:avLst/>
+            </a:prstGeom>
+            <a:solidFill>
+              <a:srgbClr val="FFFFFF"/>
+            </a:solidFill>
+            <a:ln>
+              <a:noFill/>
+            </a:ln>
+            <a:effectLst/>
+          </p:spPr>
+          <p:style>
+            <a:lnRef idx="1">
+              <a:schemeClr val="accent1"/>
+            </a:lnRef>
+            <a:fillRef idx="3">
+              <a:schemeClr val="accent1"/>
+            </a:fillRef>
+            <a:effectRef idx="2">
+              <a:schemeClr val="accent1"/>
+            </a:effectRef>
+            <a:fontRef idx="minor">
+              <a:schemeClr val="lt1"/>
+            </a:fontRef>
+          </p:style>
+          <p:txBody>
+            <a:bodyPr rtlCol="0" anchor="ctr"/>
+            <a:lstStyle/>
+            <a:p>
+              <a:pPr algn="ctr"/>
+            </a:p>
+          </p:txBody>
+        </p:sp>
+        <p:sp>
+          <p:nvSpPr>
+            <p:cNvPr id="30" name="Oval 29"/>
+            <p:cNvSpPr/>
+            <p:nvPr/>
+          </p:nvSpPr>
+          <p:spPr>
+            <a:xfrm>
+              <a:off x="9258300" y="11915775"/>
+              <a:ext cx="76200" cy="76200"/>
+            </a:xfrm>
+            <a:prstGeom prst="ellipse">
+              <a:avLst/>
+            </a:prstGeom>
+            <a:solidFill>
+              <a:srgbClr val="DBE6A7"/>
+            </a:solidFill>
+            <a:ln>
+              <a:noFill/>
+            </a:ln>
+            <a:effectLst/>
+          </p:spPr>
+          <p:style>
+            <a:lnRef idx="1">
+              <a:schemeClr val="accent1"/>
+            </a:lnRef>
+            <a:fillRef idx="3">
+              <a:schemeClr val="accent1"/>
+            </a:fillRef>
+            <a:effectRef idx="2">
+              <a:schemeClr val="accent1"/>
+            </a:effectRef>
+            <a:fontRef idx="minor">
+              <a:schemeClr val="lt1"/>
+            </a:fontRef>
+          </p:style>
+          <p:txBody>
+            <a:bodyPr rtlCol="0" anchor="ctr"/>
+            <a:lstStyle/>
+            <a:p>
+              <a:pPr algn="ctr"/>
+            </a:p>
+          </p:txBody>
+        </p:sp>
+        <p:sp>
+          <p:nvSpPr>
+            <p:cNvPr id="31" name="Oval 30"/>
+            <p:cNvSpPr/>
+            <p:nvPr/>
+          </p:nvSpPr>
+          <p:spPr>
+            <a:xfrm>
+              <a:off x="9525000" y="12011025"/>
+              <a:ext cx="76200" cy="76200"/>
+            </a:xfrm>
+            <a:prstGeom prst="ellipse">
+              <a:avLst/>
+            </a:prstGeom>
+            <a:solidFill>
+              <a:srgbClr val="DBE6A7"/>
+            </a:solidFill>
+            <a:ln>
+              <a:noFill/>
+            </a:ln>
+            <a:effectLst/>
+          </p:spPr>
+          <p:style>
+            <a:lnRef idx="1">
+              <a:schemeClr val="accent1"/>
+            </a:lnRef>
+            <a:fillRef idx="3">
+              <a:schemeClr val="accent1"/>
+            </a:fillRef>
+            <a:effectRef idx="2">
+              <a:schemeClr val="accent1"/>
+            </a:effectRef>
+            <a:fontRef idx="minor">
+              <a:schemeClr val="lt1"/>
+            </a:fontRef>
+          </p:style>
+          <p:txBody>
+            <a:bodyPr rtlCol="0" anchor="ctr"/>
+            <a:lstStyle/>
+            <a:p>
+              <a:pPr algn="ctr"/>
+            </a:p>
+          </p:txBody>
+        </p:sp>
+        <p:sp>
+          <p:nvSpPr>
+            <p:cNvPr id="32" name="Oval 31"/>
+            <p:cNvSpPr/>
+            <p:nvPr/>
+          </p:nvSpPr>
+          <p:spPr>
+            <a:xfrm>
+              <a:off x="9277350" y="12201525"/>
+              <a:ext cx="76200" cy="76200"/>
+            </a:xfrm>
+            <a:prstGeom prst="ellipse">
+              <a:avLst/>
+            </a:prstGeom>
+            <a:solidFill>
+              <a:srgbClr val="DBE6A7"/>
+            </a:solidFill>
+            <a:ln>
+              <a:noFill/>
+            </a:ln>
+            <a:effectLst/>
+          </p:spPr>
+          <p:style>
+            <a:lnRef idx="1">
+              <a:schemeClr val="accent1"/>
+            </a:lnRef>
+            <a:fillRef idx="3">
+              <a:schemeClr val="accent1"/>
+            </a:fillRef>
+            <a:effectRef idx="2">
+              <a:schemeClr val="accent1"/>
+            </a:effectRef>
+            <a:fontRef idx="minor">
+              <a:schemeClr val="lt1"/>
+            </a:fontRef>
+          </p:style>
+          <p:txBody>
+            <a:bodyPr rtlCol="0" anchor="ctr"/>
+            <a:lstStyle/>
+            <a:p>
+              <a:pPr algn="ctr"/>
+            </a:p>
+          </p:txBody>
+        </p:sp>
+        <p:sp>
+          <p:nvSpPr>
+            <p:cNvPr id="33" name="Oval 32"/>
+            <p:cNvSpPr/>
+            <p:nvPr/>
+          </p:nvSpPr>
+          <p:spPr>
+            <a:xfrm>
+              <a:off x="9505950" y="12268200"/>
+              <a:ext cx="76200" cy="76200"/>
+            </a:xfrm>
+            <a:prstGeom prst="ellipse">
+              <a:avLst/>
+            </a:prstGeom>
+            <a:solidFill>
+              <a:srgbClr val="DBE6A7"/>
+            </a:solidFill>
+            <a:ln>
+              <a:noFill/>
+            </a:ln>
+            <a:effectLst/>
+          </p:spPr>
+          <p:style>
+            <a:lnRef idx="1">
+              <a:schemeClr val="accent1"/>
+            </a:lnRef>
+            <a:fillRef idx="3">
+              <a:schemeClr val="accent1"/>
+            </a:fillRef>
+            <a:effectRef idx="2">
+              <a:schemeClr val="accent1"/>
+            </a:effectRef>
+            <a:fontRef idx="minor">
+              <a:schemeClr val="lt1"/>
+            </a:fontRef>
+          </p:style>
+          <p:txBody>
+            <a:bodyPr rtlCol="0" anchor="ctr"/>
+            <a:lstStyle/>
+            <a:p>
+              <a:pPr algn="ctr"/>
+            </a:p>
+          </p:txBody>
+        </p:sp>
+      </p:grpSp>
     </p:spTree>
   </p:cSld>
   <p:clrMapOvr>
@@ -13518,6 +21434,122 @@
           </p:spPr>
         </p:pic>
       </p:grpSp>
+      <p:sp>
+        <p:nvSpPr>
+          <p:cNvPr id="18" name="Rectangle 17"/>
+          <p:cNvSpPr/>
+          <p:nvPr/>
+        </p:nvSpPr>
+        <p:spPr>
+          <a:xfrm rot="19680000">
+            <a:off x="619125" y="523875"/>
+            <a:ext cx="1619250" cy="476250"/>
+          </a:xfrm>
+          <a:prstGeom prst="rect">
+            <a:avLst/>
+          </a:prstGeom>
+          <a:solidFill>
+            <a:srgbClr val="DBE6A7">
+              <a:alpha val="70000"/>
+            </a:srgbClr>
+          </a:solidFill>
+          <a:ln>
+            <a:noFill/>
+          </a:ln>
+          <a:effectLst/>
+        </p:spPr>
+        <p:style>
+          <a:lnRef idx="1">
+            <a:schemeClr val="accent1"/>
+          </a:lnRef>
+          <a:fillRef idx="3">
+            <a:schemeClr val="accent1"/>
+          </a:fillRef>
+          <a:effectRef idx="2">
+            <a:schemeClr val="accent1"/>
+          </a:effectRef>
+          <a:fontRef idx="minor">
+            <a:schemeClr val="lt1"/>
+          </a:fontRef>
+        </p:style>
+        <p:txBody>
+          <a:bodyPr rtlCol="0" anchor="ctr"/>
+          <a:lstStyle/>
+          <a:p>
+            <a:pPr algn="ctr"/>
+          </a:p>
+        </p:txBody>
+      </p:sp>
+      <p:sp>
+        <p:nvSpPr>
+          <p:cNvPr id="19" name="Rectangle 18"/>
+          <p:cNvSpPr/>
+          <p:nvPr/>
+        </p:nvSpPr>
+        <p:spPr>
+          <a:xfrm rot="2160000">
+            <a:off x="8239125" y="952500"/>
+            <a:ext cx="1619250" cy="476250"/>
+          </a:xfrm>
+          <a:prstGeom prst="rect">
+            <a:avLst/>
+          </a:prstGeom>
+          <a:solidFill>
+            <a:srgbClr val="DBE6A7">
+              <a:alpha val="70000"/>
+            </a:srgbClr>
+          </a:solidFill>
+          <a:ln>
+            <a:noFill/>
+          </a:ln>
+          <a:effectLst/>
+        </p:spPr>
+        <p:style>
+          <a:lnRef idx="1">
+            <a:schemeClr val="accent1"/>
+          </a:lnRef>
+          <a:fillRef idx="3">
+            <a:schemeClr val="accent1"/>
+          </a:fillRef>
+          <a:effectRef idx="2">
+            <a:schemeClr val="accent1"/>
+          </a:effectRef>
+          <a:fontRef idx="minor">
+            <a:schemeClr val="lt1"/>
+          </a:fontRef>
+        </p:style>
+        <p:txBody>
+          <a:bodyPr rtlCol="0" anchor="ctr"/>
+          <a:lstStyle/>
+          <a:p>
+            <a:pPr algn="ctr"/>
+          </a:p>
+        </p:txBody>
+      </p:sp>
+      <p:pic>
+        <p:nvPicPr>
+          <p:cNvPr id="20" name="Picture 19" descr="trim-dried-flowers-2-1.png"/>
+          <p:cNvPicPr>
+            <a:picLocks noChangeAspect="1"/>
+          </p:cNvPicPr>
+          <p:nvPr/>
+        </p:nvPicPr>
+        <p:blipFill>
+          <a:blip r:embed="rId4"/>
+          <a:stretch>
+            <a:fillRect/>
+          </a:stretch>
+        </p:blipFill>
+        <p:spPr>
+          <a:xfrm rot="1440000">
+            <a:off x="8810625" y="10830254"/>
+            <a:ext cx="1428750" cy="2151991"/>
+          </a:xfrm>
+          <a:prstGeom prst="rect">
+            <a:avLst/>
+          </a:prstGeom>
+        </p:spPr>
+      </p:pic>
     </p:spTree>
   </p:cSld>
   <p:clrMapOvr>

--- a/templates/posts/october/05-10-2026-mon-ig-teachers-day.pptx
+++ b/templates/posts/october/05-10-2026-mon-ig-teachers-day.pptx
@@ -4756,9 +4756,9 @@
           <p:nvPr/>
         </p:nvSpPr>
         <p:spPr>
-          <a:xfrm rot="21480000">
-            <a:off x="2000250" y="3810000"/>
-            <a:ext cx="6286500" cy="4476750"/>
+          <a:xfrm>
+            <a:off x="1619250" y="3143250"/>
+            <a:ext cx="7048500" cy="5905500"/>
           </a:xfrm>
           <a:prstGeom prst="rect">
             <a:avLst/>
@@ -4807,7 +4807,7 @@
         </p:nvSpPr>
         <p:spPr>
           <a:xfrm rot="19920000">
-            <a:off x="1857375" y="3657600"/>
+            <a:off x="1476375" y="2990850"/>
             <a:ext cx="1428750" cy="419100"/>
           </a:xfrm>
           <a:prstGeom prst="rect">
@@ -4853,7 +4853,7 @@
         </p:nvSpPr>
         <p:spPr>
           <a:xfrm rot="1680000">
-            <a:off x="7000875" y="3657600"/>
+            <a:off x="7381875" y="2990850"/>
             <a:ext cx="1428750" cy="419100"/>
           </a:xfrm>
           <a:prstGeom prst="rect">
@@ -4899,8 +4899,8 @@
         </p:nvSpPr>
         <p:spPr>
           <a:xfrm>
-            <a:off x="2286000" y="4476750"/>
-            <a:ext cx="5715000" cy="4191659"/>
+            <a:off x="2000250" y="3810000"/>
+            <a:ext cx="6286500" cy="4362343"/>
           </a:xfrm>
           <a:prstGeom prst="rect">
             <a:avLst/>
@@ -4919,7 +4919,7 @@
               </a:lnSpc>
             </a:pPr>
             <a:r>
-              <a:rPr sz="4800" b="1" i="0">
+              <a:rPr sz="5000" b="1" i="0">
                 <a:solidFill>
                   <a:srgbClr val="22371F"/>
                 </a:solidFill>
@@ -4939,9 +4939,9 @@
         <p:grpSpPr>
           <a:xfrm rot="360000">
             <a:off x="0" y="0"/>
-            <a:ext cx="7739062" cy="8858250"/>
+            <a:ext cx="8186736" cy="10096500"/>
             <a:chOff x="0" y="0"/>
-            <a:chExt cx="7739062" cy="8858250"/>
+            <a:chExt cx="8186736" cy="10096500"/>
           </a:xfrm>
         </p:grpSpPr>
         <p:sp>
@@ -4952,8 +4952,8 @@
           </p:nvSpPr>
           <p:spPr>
             <a:xfrm>
-              <a:off x="6738937" y="8715375"/>
-              <a:ext cx="1000125" cy="142875"/>
+              <a:off x="7053262" y="9934575"/>
+              <a:ext cx="1133474" cy="161925"/>
             </a:xfrm>
             <a:prstGeom prst="roundRect">
               <a:avLst/>
@@ -5004,8 +5004,8 @@
           </p:nvSpPr>
           <p:spPr>
             <a:xfrm>
-              <a:off x="7310437" y="7829550"/>
-              <a:ext cx="200025" cy="914400"/>
+              <a:off x="7700962" y="8930640"/>
+              <a:ext cx="226695" cy="1036320"/>
             </a:xfrm>
             <a:prstGeom prst="roundRect">
               <a:avLst/>
@@ -5050,8 +5050,8 @@
           </p:nvSpPr>
           <p:spPr>
             <a:xfrm>
-              <a:off x="6838950" y="8315325"/>
-              <a:ext cx="714375" cy="71437"/>
+              <a:off x="7166610" y="9481185"/>
+              <a:ext cx="809625" cy="80962"/>
             </a:xfrm>
             <a:prstGeom prst="rect">
               <a:avLst/>
@@ -5094,8 +5094,8 @@
           </p:nvSpPr>
           <p:spPr>
             <a:xfrm rot="20520000">
-              <a:off x="6953250" y="7500937"/>
-              <a:ext cx="228600" cy="714375"/>
+              <a:off x="7296150" y="8558212"/>
+              <a:ext cx="259080" cy="809625"/>
             </a:xfrm>
             <a:prstGeom prst="roundRect">
               <a:avLst/>
@@ -5140,8 +5140,8 @@
           </p:nvSpPr>
           <p:spPr>
             <a:xfrm rot="20520000">
-              <a:off x="6853237" y="7372350"/>
-              <a:ext cx="285750" cy="142875"/>
+              <a:off x="7182802" y="8412480"/>
+              <a:ext cx="323850" cy="161925"/>
             </a:xfrm>
             <a:prstGeom prst="roundRect">
               <a:avLst/>
@@ -5186,8 +5186,8 @@
           </p:nvSpPr>
           <p:spPr>
             <a:xfrm>
-              <a:off x="7267575" y="7972425"/>
-              <a:ext cx="200025" cy="200025"/>
+              <a:off x="7652385" y="9092565"/>
+              <a:ext cx="226695" cy="226695"/>
             </a:xfrm>
             <a:prstGeom prst="ellipse">
               <a:avLst/>
@@ -5232,9 +5232,9 @@
         <p:grpSpPr>
           <a:xfrm rot="21240000">
             <a:off x="0" y="0"/>
-            <a:ext cx="3810000" cy="9124950"/>
+            <a:ext cx="3476625" cy="10191750"/>
             <a:chOff x="0" y="0"/>
-            <a:chExt cx="3810000" cy="9124950"/>
+            <a:chExt cx="3476625" cy="10191750"/>
           </a:xfrm>
         </p:grpSpPr>
         <p:sp>
@@ -5245,8 +5245,8 @@
           </p:nvSpPr>
           <p:spPr>
             <a:xfrm>
-              <a:off x="3105150" y="8031480"/>
-              <a:ext cx="76200" cy="826770"/>
+              <a:off x="2724150" y="9020175"/>
+              <a:ext cx="76200" cy="885825"/>
             </a:xfrm>
             <a:prstGeom prst="rect">
               <a:avLst/>
@@ -5289,8 +5289,8 @@
           </p:nvSpPr>
           <p:spPr>
             <a:xfrm rot="8700000">
-              <a:off x="2609850" y="7844790"/>
-              <a:ext cx="533400" cy="266700"/>
+              <a:off x="2190750" y="8820150"/>
+              <a:ext cx="571500" cy="285750"/>
             </a:xfrm>
             <a:prstGeom prst="ellipse">
               <a:avLst/>
@@ -5335,8 +5335,8 @@
           </p:nvSpPr>
           <p:spPr>
             <a:xfrm rot="2100000">
-              <a:off x="3143250" y="7844790"/>
-              <a:ext cx="533400" cy="266700"/>
+              <a:off x="2762250" y="8820150"/>
+              <a:ext cx="571500" cy="285750"/>
             </a:xfrm>
             <a:prstGeom prst="ellipse">
               <a:avLst/>
@@ -5381,8 +5381,8 @@
           </p:nvSpPr>
           <p:spPr>
             <a:xfrm>
-              <a:off x="2476500" y="8724900"/>
-              <a:ext cx="1333500" cy="400050"/>
+              <a:off x="2047875" y="9763125"/>
+              <a:ext cx="1428750" cy="428625"/>
             </a:xfrm>
             <a:prstGeom prst="ellipse">
               <a:avLst/>
@@ -5433,8 +5433,8 @@
           </p:nvSpPr>
           <p:spPr>
             <a:xfrm>
-              <a:off x="3043237" y="8880304"/>
-              <a:ext cx="35901" cy="35901"/>
+              <a:off x="2655093" y="9929629"/>
+              <a:ext cx="38466" cy="38466"/>
             </a:xfrm>
             <a:prstGeom prst="ellipse">
               <a:avLst/>
@@ -5477,8 +5477,8 @@
           </p:nvSpPr>
           <p:spPr>
             <a:xfrm>
-              <a:off x="3207360" y="8880304"/>
-              <a:ext cx="35901" cy="35901"/>
+              <a:off x="2830939" y="9929629"/>
+              <a:ext cx="38466" cy="38466"/>
             </a:xfrm>
             <a:prstGeom prst="ellipse">
               <a:avLst/>
@@ -5521,8 +5521,8 @@
           </p:nvSpPr>
           <p:spPr>
             <a:xfrm rot="10800000">
-              <a:off x="3086832" y="8908512"/>
-              <a:ext cx="112834" cy="82061"/>
+              <a:off x="2701802" y="9959852"/>
+              <a:ext cx="120894" cy="87923"/>
             </a:xfrm>
             <a:prstGeom prst="blockArc">
               <a:avLst>
@@ -5619,7 +5619,7 @@
           <p:nvPr/>
         </p:nvGrpSpPr>
         <p:grpSpPr>
-          <a:xfrm rot="180000">
+          <a:xfrm>
             <a:off x="0" y="0"/>
             <a:ext cx="9429750" cy="12334875"/>
             <a:chOff x="0" y="0"/>
@@ -6669,7 +6669,7 @@
           <p:nvPr/>
         </p:nvGrpSpPr>
         <p:grpSpPr>
-          <a:xfrm rot="180000">
+          <a:xfrm>
             <a:off x="0" y="0"/>
             <a:ext cx="9429750" cy="12334875"/>
             <a:chOff x="0" y="0"/>
@@ -6730,7 +6730,7 @@
         </p:sp>
         <p:pic>
           <p:nvPicPr>
-            <p:cNvPr id="4" name="Picture 3" descr="9001695925251202517.jpg"/>
+            <p:cNvPr id="4" name="Picture 3" descr="737939244691707000.jpg"/>
             <p:cNvPicPr>
               <a:picLocks noChangeAspect="1"/>
             </p:cNvPicPr>
@@ -7850,7 +7850,7 @@
           <p:nvPr/>
         </p:nvGrpSpPr>
         <p:grpSpPr>
-          <a:xfrm rot="180000">
+          <a:xfrm>
             <a:off x="0" y="0"/>
             <a:ext cx="9429750" cy="12334875"/>
             <a:chOff x="0" y="0"/>
@@ -9160,7 +9160,7 @@
           <p:nvPr/>
         </p:nvGrpSpPr>
         <p:grpSpPr>
-          <a:xfrm rot="180000">
+          <a:xfrm>
             <a:off x="0" y="0"/>
             <a:ext cx="9429750" cy="12334875"/>
             <a:chOff x="0" y="0"/>
@@ -9897,7 +9897,7 @@
           <p:nvPr/>
         </p:nvGrpSpPr>
         <p:grpSpPr>
-          <a:xfrm rot="180000">
+          <a:xfrm>
             <a:off x="0" y="0"/>
             <a:ext cx="9429750" cy="12334875"/>
             <a:chOff x="0" y="0"/>
@@ -9958,7 +9958,7 @@
         </p:sp>
         <p:pic>
           <p:nvPicPr>
-            <p:cNvPr id="4" name="Picture 3" descr="4466978079890479619.jpg"/>
+            <p:cNvPr id="4" name="Picture 3" descr="1477269886006864837.jpg"/>
             <p:cNvPicPr>
               <a:picLocks noChangeAspect="1"/>
             </p:cNvPicPr>
@@ -10942,7 +10942,7 @@
           <p:nvPr/>
         </p:nvGrpSpPr>
         <p:grpSpPr>
-          <a:xfrm rot="180000">
+          <a:xfrm>
             <a:off x="0" y="0"/>
             <a:ext cx="9429750" cy="12334875"/>
             <a:chOff x="0" y="0"/>
@@ -12250,9 +12250,9 @@
           <p:nvPr/>
         </p:nvSpPr>
         <p:spPr>
-          <a:xfrm rot="120000">
-            <a:off x="2000250" y="4286250"/>
-            <a:ext cx="6286500" cy="4286250"/>
+          <a:xfrm>
+            <a:off x="1619250" y="3429000"/>
+            <a:ext cx="7048500" cy="5524500"/>
           </a:xfrm>
           <a:prstGeom prst="rect">
             <a:avLst/>
@@ -12301,7 +12301,7 @@
         </p:nvSpPr>
         <p:spPr>
           <a:xfrm rot="19920000">
-            <a:off x="1857375" y="4133850"/>
+            <a:off x="1476375" y="3276600"/>
             <a:ext cx="1428750" cy="419100"/>
           </a:xfrm>
           <a:prstGeom prst="rect">
@@ -12347,7 +12347,7 @@
         </p:nvSpPr>
         <p:spPr>
           <a:xfrm rot="1680000">
-            <a:off x="7000875" y="4133850"/>
+            <a:off x="7381875" y="3276600"/>
             <a:ext cx="1428750" cy="419100"/>
           </a:xfrm>
           <a:prstGeom prst="rect">
@@ -12393,8 +12393,8 @@
         </p:nvSpPr>
         <p:spPr>
           <a:xfrm>
-            <a:off x="2286000" y="5048250"/>
-            <a:ext cx="5715000" cy="4191659"/>
+            <a:off x="2000250" y="4095750"/>
+            <a:ext cx="6286500" cy="4362343"/>
           </a:xfrm>
           <a:prstGeom prst="rect">
             <a:avLst/>
@@ -12413,7 +12413,7 @@
               </a:lnSpc>
             </a:pPr>
             <a:r>
-              <a:rPr sz="4800" b="1" i="0">
+              <a:rPr sz="5000" b="1" i="0">
                 <a:solidFill>
                   <a:srgbClr val="22371F"/>
                 </a:solidFill>
@@ -12433,9 +12433,9 @@
         <p:grpSpPr>
           <a:xfrm rot="21120000">
             <a:off x="0" y="0"/>
-            <a:ext cx="3589020" cy="9972675"/>
+            <a:ext cx="3303270" cy="10639425"/>
             <a:chOff x="0" y="0"/>
-            <a:chExt cx="3589020" cy="9972675"/>
+            <a:chExt cx="3303270" cy="10639425"/>
           </a:xfrm>
         </p:grpSpPr>
         <p:sp>
@@ -12446,7 +12446,7 @@
           </p:nvSpPr>
           <p:spPr>
             <a:xfrm>
-              <a:off x="3114675" y="8858250"/>
+              <a:off x="2828925" y="9525000"/>
               <a:ext cx="57150" cy="1114425"/>
             </a:xfrm>
             <a:prstGeom prst="rect">
@@ -12490,7 +12490,7 @@
           </p:nvSpPr>
           <p:spPr>
             <a:xfrm rot="19800000">
-              <a:off x="3162300" y="9415462"/>
+              <a:off x="2876550" y="10082212"/>
               <a:ext cx="385762" cy="171450"/>
             </a:xfrm>
             <a:prstGeom prst="ellipse">
@@ -12536,7 +12536,7 @@
           </p:nvSpPr>
           <p:spPr>
             <a:xfrm>
-              <a:off x="3228975" y="8738235"/>
+              <a:off x="2943225" y="9404985"/>
               <a:ext cx="360045" cy="240030"/>
             </a:xfrm>
             <a:prstGeom prst="ellipse">
@@ -12582,7 +12582,7 @@
           </p:nvSpPr>
           <p:spPr>
             <a:xfrm rot="3600000">
-              <a:off x="3096101" y="8968379"/>
+              <a:off x="2810351" y="9635129"/>
               <a:ext cx="360045" cy="240030"/>
             </a:xfrm>
             <a:prstGeom prst="ellipse">
@@ -12628,7 +12628,7 @@
           </p:nvSpPr>
           <p:spPr>
             <a:xfrm rot="7200000">
-              <a:off x="2830353" y="8968379"/>
+              <a:off x="2544603" y="9635129"/>
               <a:ext cx="360045" cy="240030"/>
             </a:xfrm>
             <a:prstGeom prst="ellipse">
@@ -12674,7 +12674,7 @@
           </p:nvSpPr>
           <p:spPr>
             <a:xfrm rot="10800000">
-              <a:off x="2697480" y="8738235"/>
+              <a:off x="2411730" y="9404985"/>
               <a:ext cx="360045" cy="240030"/>
             </a:xfrm>
             <a:prstGeom prst="ellipse">
@@ -12720,7 +12720,7 @@
           </p:nvSpPr>
           <p:spPr>
             <a:xfrm rot="14400000">
-              <a:off x="2830353" y="8508090"/>
+              <a:off x="2544603" y="9174840"/>
               <a:ext cx="360045" cy="240030"/>
             </a:xfrm>
             <a:prstGeom prst="ellipse">
@@ -12766,7 +12766,7 @@
           </p:nvSpPr>
           <p:spPr>
             <a:xfrm rot="18000000">
-              <a:off x="3096101" y="8508090"/>
+              <a:off x="2810351" y="9174840"/>
               <a:ext cx="360045" cy="240030"/>
             </a:xfrm>
             <a:prstGeom prst="ellipse">
@@ -12812,7 +12812,7 @@
           </p:nvSpPr>
           <p:spPr>
             <a:xfrm>
-              <a:off x="2980372" y="8695372"/>
+              <a:off x="2694622" y="9362122"/>
               <a:ext cx="325755" cy="325755"/>
             </a:xfrm>
             <a:prstGeom prst="ellipse">
@@ -12860,9 +12860,9 @@
         <p:grpSpPr>
           <a:xfrm rot="20880000">
             <a:off x="0" y="0"/>
-            <a:ext cx="7905750" cy="9328785"/>
+            <a:ext cx="8239125" cy="10015537"/>
             <a:chOff x="0" y="0"/>
-            <a:chExt cx="7905750" cy="9328785"/>
+            <a:chExt cx="8239125" cy="10015537"/>
           </a:xfrm>
         </p:grpSpPr>
         <p:sp>
@@ -12873,8 +12873,8 @@
           </p:nvSpPr>
           <p:spPr>
             <a:xfrm>
-              <a:off x="6358890" y="8970340"/>
-              <a:ext cx="226695" cy="145618"/>
+              <a:off x="6581775" y="9631489"/>
+              <a:ext cx="242887" cy="156019"/>
             </a:xfrm>
             <a:prstGeom prst="arc">
               <a:avLst/>
@@ -12917,8 +12917,8 @@
           </p:nvSpPr>
           <p:spPr>
             <a:xfrm rot="10800000">
-              <a:off x="6145530" y="8981541"/>
-              <a:ext cx="226695" cy="145618"/>
+              <a:off x="6353175" y="9643491"/>
+              <a:ext cx="242887" cy="156019"/>
             </a:xfrm>
             <a:prstGeom prst="arc">
               <a:avLst/>
@@ -12961,8 +12961,8 @@
           </p:nvSpPr>
           <p:spPr>
             <a:xfrm>
-              <a:off x="5932170" y="8970340"/>
-              <a:ext cx="226695" cy="145618"/>
+              <a:off x="6124575" y="9631489"/>
+              <a:ext cx="242887" cy="156019"/>
             </a:xfrm>
             <a:prstGeom prst="arc">
               <a:avLst/>
@@ -13005,8 +13005,8 @@
           </p:nvSpPr>
           <p:spPr>
             <a:xfrm>
-              <a:off x="6572250" y="8768715"/>
-              <a:ext cx="1333500" cy="560070"/>
+              <a:off x="6810375" y="9415462"/>
+              <a:ext cx="1428750" cy="600075"/>
             </a:xfrm>
             <a:prstGeom prst="roundRect">
               <a:avLst>
@@ -13059,8 +13059,8 @@
           </p:nvSpPr>
           <p:spPr>
             <a:xfrm>
-              <a:off x="7280823" y="8999531"/>
-              <a:ext cx="42429" cy="42429"/>
+              <a:off x="7569560" y="9662766"/>
+              <a:ext cx="45460" cy="45460"/>
             </a:xfrm>
             <a:prstGeom prst="ellipse">
               <a:avLst/>
@@ -13103,8 +13103,8 @@
           </p:nvSpPr>
           <p:spPr>
             <a:xfrm>
-              <a:off x="7474787" y="8999531"/>
-              <a:ext cx="42429" cy="42429"/>
+              <a:off x="7777378" y="9662766"/>
+              <a:ext cx="45460" cy="45460"/>
             </a:xfrm>
             <a:prstGeom prst="ellipse">
               <a:avLst/>
@@ -13147,8 +13147,8 @@
           </p:nvSpPr>
           <p:spPr>
             <a:xfrm rot="10800000">
-              <a:off x="7332345" y="9032869"/>
-              <a:ext cx="133350" cy="96981"/>
+              <a:off x="7624762" y="9698484"/>
+              <a:ext cx="142874" cy="103909"/>
             </a:xfrm>
             <a:prstGeom prst="blockArc">
               <a:avLst>
@@ -13245,7 +13245,7 @@
           <p:nvPr/>
         </p:nvGrpSpPr>
         <p:grpSpPr>
-          <a:xfrm rot="180000">
+          <a:xfrm>
             <a:off x="0" y="0"/>
             <a:ext cx="9429750" cy="12334875"/>
             <a:chOff x="0" y="0"/>
@@ -14295,7 +14295,7 @@
           <p:nvPr/>
         </p:nvGrpSpPr>
         <p:grpSpPr>
-          <a:xfrm rot="180000">
+          <a:xfrm>
             <a:off x="0" y="0"/>
             <a:ext cx="9429750" cy="12334875"/>
             <a:chOff x="0" y="0"/>
@@ -14356,7 +14356,7 @@
         </p:sp>
         <p:pic>
           <p:nvPicPr>
-            <p:cNvPr id="4" name="Picture 3" descr="6711507890228017999.jpg"/>
+            <p:cNvPr id="4" name="Picture 3" descr="1823346550101891004.jpg"/>
             <p:cNvPicPr>
               <a:picLocks noChangeAspect="1"/>
             </p:cNvPicPr>
@@ -15386,7 +15386,7 @@
           <p:nvPr/>
         </p:nvGrpSpPr>
         <p:grpSpPr>
-          <a:xfrm rot="180000">
+          <a:xfrm>
             <a:off x="0" y="0"/>
             <a:ext cx="9429750" cy="12334875"/>
             <a:chOff x="0" y="0"/>
@@ -15447,7 +15447,7 @@
         </p:sp>
         <p:pic>
           <p:nvPicPr>
-            <p:cNvPr id="4" name="Picture 3" descr="6242569719062395373.jpg"/>
+            <p:cNvPr id="4" name="Picture 3" descr="460503049612907722.jpg"/>
             <p:cNvPicPr>
               <a:picLocks noChangeAspect="1"/>
             </p:cNvPicPr>
@@ -16389,7 +16389,7 @@
           <p:nvPr/>
         </p:nvGrpSpPr>
         <p:grpSpPr>
-          <a:xfrm rot="180000">
+          <a:xfrm>
             <a:off x="0" y="0"/>
             <a:ext cx="9429750" cy="12334875"/>
             <a:chOff x="0" y="0"/>
@@ -16450,7 +16450,7 @@
         </p:sp>
         <p:pic>
           <p:nvPicPr>
-            <p:cNvPr id="4" name="Picture 3" descr="7580433875254582571.jpg"/>
+            <p:cNvPr id="4" name="Picture 3" descr="155160722596274885.jpg"/>
             <p:cNvPicPr>
               <a:picLocks noChangeAspect="1"/>
             </p:cNvPicPr>
@@ -17346,7 +17346,7 @@
           <p:nvPr/>
         </p:nvGrpSpPr>
         <p:grpSpPr>
-          <a:xfrm rot="180000">
+          <a:xfrm>
             <a:off x="0" y="0"/>
             <a:ext cx="9429750" cy="12334875"/>
             <a:chOff x="0" y="0"/>
@@ -18396,7 +18396,7 @@
           <p:nvPr/>
         </p:nvGrpSpPr>
         <p:grpSpPr>
-          <a:xfrm rot="180000">
+          <a:xfrm>
             <a:off x="0" y="0"/>
             <a:ext cx="9429750" cy="12334875"/>
             <a:chOff x="0" y="0"/>
@@ -19536,7 +19536,7 @@
           <p:nvPr/>
         </p:nvGrpSpPr>
         <p:grpSpPr>
-          <a:xfrm rot="180000">
+          <a:xfrm>
             <a:off x="0" y="0"/>
             <a:ext cx="9429750" cy="12334875"/>
             <a:chOff x="0" y="0"/>
@@ -20846,7 +20846,7 @@
           <p:nvPr/>
         </p:nvGrpSpPr>
         <p:grpSpPr>
-          <a:xfrm rot="180000">
+          <a:xfrm>
             <a:off x="0" y="0"/>
             <a:ext cx="9429750" cy="12334875"/>
             <a:chOff x="0" y="0"/>
